--- a/slides/datasets-in-10-minutes-synthetic-reasoning.pptx
+++ b/slides/datasets-in-10-minutes-synthetic-reasoning.pptx
@@ -6,7 +6,6 @@
   </p:sldMasterIdLst>
   <p:sldIdLst>
     <p:sldId id="256" r:id="rId6"/>
-    <p:sldId id="257" r:id="rId7"/>
     <p:sldId id="258" r:id="rId8"/>
     <p:sldId id="259" r:id="rId9"/>
     <p:sldId id="260" r:id="rId10"/>
@@ -23,11 +22,8 @@
     <p:sldId id="271" r:id="rId21"/>
     <p:sldId id="272" r:id="rId22"/>
     <p:sldId id="273" r:id="rId23"/>
-    <p:sldId id="274" r:id="rId24"/>
     <p:sldId id="275" r:id="rId25"/>
-    <p:sldId id="276" r:id="rId26"/>
     <p:sldId id="277" r:id="rId27"/>
-    <p:sldId id="278" r:id="rId28"/>
     <p:sldId id="279" r:id="rId29"/>
     <p:sldId id="280" r:id="rId30"/>
     <p:sldId id="281" r:id="rId31"/>
@@ -48,16 +44,9 @@
     <p:sldId id="296" r:id="rId46"/>
     <p:sldId id="297" r:id="rId47"/>
     <p:sldId id="298" r:id="rId48"/>
-    <p:sldId id="299" r:id="rId49"/>
-    <p:sldId id="300" r:id="rId50"/>
-    <p:sldId id="301" r:id="rId51"/>
-    <p:sldId id="302" r:id="rId52"/>
     <p:sldId id="303" r:id="rId53"/>
     <p:sldId id="304" r:id="rId54"/>
     <p:sldId id="305" r:id="rId55"/>
-    <p:sldId id="306" r:id="rId56"/>
-    <p:sldId id="307" r:id="rId57"/>
-    <p:sldId id="308" r:id="rId58"/>
     <p:sldId id="309" r:id="rId59"/>
     <p:sldId id="310" r:id="rId60"/>
   </p:sldIdLst>
@@ -7142,11 +7131,11 @@
         <p:spPr>
           <a:xfrm>
             <a:off x="548640" y="1637627"/>
-            <a:ext cx="8046720" cy="902970"/>
+            <a:ext cx="8046720" cy="1004570"/>
           </a:xfrm>
         </p:spPr>
         <p:txBody>
-          <a:bodyPr wrap="square" lIns="0" rIns="0" tIns="0" bIns="0">
+          <a:bodyPr wrap="square" lIns="0" rIns="0" tIns="0" bIns="101600">
             <a:noAutofit/>
           </a:bodyPr>
           <a:lstStyle/>
@@ -7190,11 +7179,11 @@
         <p:spPr>
           <a:xfrm>
             <a:off x="548640" y="2647277"/>
-            <a:ext cx="8046720" cy="989965"/>
+            <a:ext cx="8046720" cy="1091565"/>
           </a:xfrm>
         </p:spPr>
         <p:txBody>
-          <a:bodyPr lIns="0" rIns="0" tIns="0" bIns="0">
+          <a:bodyPr lIns="0" rIns="0" tIns="0" bIns="101600">
             <a:noAutofit/>
           </a:bodyPr>
           <a:lstStyle/>
@@ -7515,7 +7504,7 @@
                 <a:ea typeface="Noto Sans CJK JP"/>
                 <a:cs typeface="Noto Sans"/>
               </a:rPr>
-              <a:t>公式生成器 / seed 42 / test index 0 / 問題全文・日本語訳</a:t>
+              <a:t>問題（全文）と日本語訳</a:t>
             </a:r>
           </a:p>
         </p:txBody>
@@ -8219,7 +8208,7 @@
         <p:spPr>
           <a:xfrm>
             <a:off x="502920" y="4818888"/>
-            <a:ext cx="8183879" cy="530352"/>
+            <a:ext cx="8183879" cy="621792"/>
           </a:xfrm>
           <a:prstGeom prst="rect">
             <a:avLst/>
@@ -8259,8 +8248,28 @@
                 <a:ea typeface="Noto Sans CJK JP"/>
                 <a:cs typeface="Noto Sans"/>
               </a:rPr>
-              <a:t>[1] Stanford CRFM. HELM v0.4.0 公式生成器。 自然言語・hard / index 6000</a:t>
-            </a:r>
+              <a:t>[1] Stanford CRFM. SRNScenario — 自然言語の合成課題。</a:t>
+            </a:r>
+          </a:p>
+          <a:p>
+            <a:pPr algn="l">
+              <a:lnSpc>
+                <a:spcPts val="940"/>
+              </a:lnSpc>
+              <a:spcBef>
+                <a:spcPts val="0"/>
+              </a:spcBef>
+              <a:spcAft>
+                <a:spcPts val="140"/>
+              </a:spcAft>
+              <a:buNone/>
+              <a:defRPr sz="810" b="0">
+                <a:solidFill>
+                  <a:srgbClr val="303437"/>
+                </a:solidFill>
+                <a:latin typeface="Noto Sans"/>
+              </a:defRPr>
+            </a:pPr>
             <a:r>
               <a:rPr sz="810" b="0" lang="ja-JP" altLang="en-US">
                 <a:solidFill>
@@ -8269,20 +8278,9 @@
                 <a:latin typeface="Noto Sans"/>
                 <a:ea typeface="Noto Sans CJK JP"/>
                 <a:cs typeface="Noto Sans"/>
-              </a:rPr>
-              <a:t>  </a:t>
-            </a:r>
-            <a:r>
-              <a:rPr sz="810" b="0" lang="ja-JP" altLang="en-US">
-                <a:solidFill>
-                  <a:srgbClr val="626669"/>
-                </a:solidFill>
-                <a:latin typeface="Noto Sans"/>
-                <a:ea typeface="Noto Sans CJK JP"/>
-                <a:cs typeface="Noto Sans"/>
-                <a:hlinkClick r:id="rId2"/>
-              </a:rPr>
-              <a:t>https://github.com/stanford-crfm/helm/tree/v0.4.0</a:t>
+                <a:hlinkClick r:id="rId3"/>
+              </a:rPr>
+              <a:t>https://github.com/stanford-crfm/helm/blob/v0.4.0/src/helm/benchmark/scenarios/synthetic_reasoning_natural_scenario.py</a:t>
             </a:r>
           </a:p>
         </p:txBody>
@@ -8523,7 +8521,7 @@
         <p:spPr>
           <a:xfrm>
             <a:off x="502920" y="4700016"/>
-            <a:ext cx="8183879" cy="530352"/>
+            <a:ext cx="8183879" cy="621792"/>
           </a:xfrm>
           <a:prstGeom prst="rect">
             <a:avLst/>
@@ -8563,7 +8561,7 @@
                 <a:ea typeface="Noto Sans CJK JP"/>
                 <a:cs typeface="Noto Sans"/>
               </a:rPr>
-              <a:t>[1] Stanford CRFM. SRNScenario, HELM v0.4.0.</a:t>
+              <a:t>[1] Stanford CRFM. SRNScenario — 自然言語の合成課題。</a:t>
             </a:r>
           </a:p>
           <a:p>
@@ -8655,7 +8653,7 @@
                 <a:ea typeface="Noto Sans CJK JP"/>
                 <a:cs typeface="Noto Sans"/>
               </a:rPr>
-              <a:t>2. 生成器と固定seedの設計</a:t>
+              <a:t>生成方法と問題の構成</a:t>
             </a:r>
           </a:p>
         </p:txBody>
@@ -8703,7 +8701,7 @@
                 <a:ea typeface="Noto Sans CJK JP"/>
                 <a:cs typeface="Noto Sans"/>
               </a:rPr>
-              <a:t>2. 生成器と固定seedの設計</a:t>
+              <a:t>2. 生成方法と問題の構成</a:t>
             </a:r>
           </a:p>
         </p:txBody>
@@ -8817,7 +8815,7 @@
                 <a:ea typeface="Noto Sans CJK JP"/>
                 <a:cs typeface="Noto Sans"/>
               </a:rPr>
-              <a:t>2. 生成器と固定seedの設計</a:t>
+              <a:t>2. 生成方法と問題の構成</a:t>
             </a:r>
           </a:p>
         </p:txBody>
@@ -9443,7 +9441,7 @@
         <p:spPr>
           <a:xfrm>
             <a:off x="502920" y="4700016"/>
-            <a:ext cx="8183879" cy="530352"/>
+            <a:ext cx="8183879" cy="621792"/>
           </a:xfrm>
           <a:prstGeom prst="rect">
             <a:avLst/>
@@ -9483,7 +9481,7 @@
                 <a:ea typeface="Noto Sans CJK JP"/>
                 <a:cs typeface="Noto Sans"/>
               </a:rPr>
-              <a:t>[1] Stanford CRFM. SyntheticReasoningScenario, HELM v0.4.0.</a:t>
+              <a:t>[1] Stanford CRFM. SyntheticReasoningScenario — 記号列の合成課題。</a:t>
             </a:r>
           </a:p>
           <a:p>
@@ -9736,7 +9734,7 @@
                 <a:ea typeface="Noto Sans CJK JP"/>
                 <a:cs typeface="Noto Sans"/>
               </a:rPr>
-              <a:t>2. 生成器と固定seedの設計</a:t>
+              <a:t>2. 生成方法と問題の構成</a:t>
             </a:r>
           </a:p>
         </p:txBody>
@@ -9750,7 +9748,7 @@
         <p:spPr>
           <a:xfrm>
             <a:off x="502920" y="4700016"/>
-            <a:ext cx="8183879" cy="530352"/>
+            <a:ext cx="8183879" cy="621792"/>
           </a:xfrm>
           <a:prstGeom prst="rect">
             <a:avLst/>
@@ -9790,7 +9788,7 @@
                 <a:ea typeface="Noto Sans CJK JP"/>
                 <a:cs typeface="Noto Sans"/>
               </a:rPr>
-              <a:t>[1] Stanford CRFM. SRNScenario, HELM v0.4.0.</a:t>
+              <a:t>[1] Stanford CRFM. SRNScenario — 自然言語の合成課題。</a:t>
             </a:r>
           </a:p>
           <a:p>
@@ -9882,7 +9880,7 @@
                 <a:ea typeface="Noto Sans CJK JP"/>
                 <a:cs typeface="Noto Sans"/>
               </a:rPr>
-              <a:t>各設定を固定seedで11,000例ずつ生成する</a:t>
+              <a:t>既定では、設定ごとに11,000問を作る</a:t>
             </a:r>
           </a:p>
         </p:txBody>
@@ -9930,7 +9928,7 @@
                 <a:ea typeface="Noto Sans CJK JP"/>
                 <a:cs typeface="Noto Sans"/>
               </a:rPr>
-              <a:t>2. 生成器と固定seedの設計</a:t>
+              <a:t>2. 生成方法と問題の構成</a:t>
             </a:r>
           </a:p>
         </p:txBody>
@@ -9952,9 +9950,8 @@
             <a:tbl>
               <a:tblPr firstRow="0" bandRow="0"/>
               <a:tblGrid>
-                <a:gridCol w="1828800"/>
-                <a:gridCol w="4114800"/>
-                <a:gridCol w="2103120"/>
+                <a:gridCol w="4191000"/>
+                <a:gridCol w="3855720"/>
               </a:tblGrid>
               <a:tr h="457200">
                 <a:tc>
@@ -9986,62 +9983,6 @@
                           <a:cs typeface="Noto Sans"/>
                         </a:rPr>
                         <a:t>分割</a:t>
-                      </a:r>
-                    </a:p>
-                  </a:txBody>
-                  <a:tcPr marL="63500" marR="63500" marT="38100" marB="38100" anchor="ctr">
-                    <a:lnL w="7620">
-                      <a:noFill/>
-                    </a:lnL>
-                    <a:lnR w="7620">
-                      <a:noFill/>
-                    </a:lnR>
-                    <a:lnT w="15240">
-                      <a:solidFill>
-                        <a:srgbClr val="626669"/>
-                      </a:solidFill>
-                      <a:prstDash val="solid"/>
-                    </a:lnT>
-                    <a:lnB w="7620">
-                      <a:solidFill>
-                        <a:srgbClr val="626669"/>
-                      </a:solidFill>
-                      <a:prstDash val="solid"/>
-                    </a:lnB>
-                    <a:solidFill>
-                      <a:srgbClr val="FFFEF8"/>
-                    </a:solidFill>
-                  </a:tcPr>
-                </a:tc>
-                <a:tc>
-                  <a:txBody>
-                    <a:bodyPr wrap="square">
-                      <a:noAutofit/>
-                    </a:bodyPr>
-                    <a:lstStyle/>
-                    <a:p>
-                      <a:pPr algn="l">
-                        <a:lnSpc>
-                          <a:spcPts val="2300"/>
-                        </a:lnSpc>
-                        <a:buNone/>
-                        <a:defRPr sz="2000" b="0">
-                          <a:solidFill>
-                            <a:srgbClr val="303437"/>
-                          </a:solidFill>
-                          <a:latin typeface="Noto Sans"/>
-                        </a:defRPr>
-                      </a:pPr>
-                      <a:r>
-                        <a:rPr sz="2000" b="0" lang="ja-JP" altLang="en-US">
-                          <a:solidFill>
-                            <a:srgbClr val="303437"/>
-                          </a:solidFill>
-                          <a:latin typeface="Noto Sans"/>
-                          <a:ea typeface="Noto Sans CJK JP"/>
-                          <a:cs typeface="Noto Sans"/>
-                        </a:rPr>
-                        <a:t>生成順のindex</a:t>
                       </a:r>
                     </a:p>
                   </a:txBody>
@@ -10187,59 +10128,6 @@
                     </a:bodyPr>
                     <a:lstStyle/>
                     <a:p>
-                      <a:pPr algn="l">
-                        <a:lnSpc>
-                          <a:spcPts val="2300"/>
-                        </a:lnSpc>
-                        <a:buNone/>
-                        <a:defRPr sz="2000" b="0">
-                          <a:solidFill>
-                            <a:srgbClr val="303437"/>
-                          </a:solidFill>
-                          <a:latin typeface="Noto Sans"/>
-                        </a:defRPr>
-                      </a:pPr>
-                      <a:r>
-                        <a:rPr sz="2000" b="0" lang="ja-JP" altLang="en-US">
-                          <a:solidFill>
-                            <a:srgbClr val="303437"/>
-                          </a:solidFill>
-                          <a:latin typeface="Noto Sans"/>
-                          <a:ea typeface="Noto Sans CJK JP"/>
-                          <a:cs typeface="Noto Sans"/>
-                        </a:rPr>
-                        <a:t>0〜999</a:t>
-                      </a:r>
-                    </a:p>
-                  </a:txBody>
-                  <a:tcPr marL="63500" marR="63500" marT="38100" marB="38100" anchor="ctr">
-                    <a:lnL w="7620">
-                      <a:noFill/>
-                    </a:lnL>
-                    <a:lnR w="7620">
-                      <a:noFill/>
-                    </a:lnR>
-                    <a:lnT w="7620">
-                      <a:solidFill>
-                        <a:srgbClr val="626669"/>
-                      </a:solidFill>
-                      <a:prstDash val="solid"/>
-                    </a:lnT>
-                    <a:lnB w="7620">
-                      <a:noFill/>
-                    </a:lnB>
-                    <a:solidFill>
-                      <a:srgbClr val="FFFEF8"/>
-                    </a:solidFill>
-                  </a:tcPr>
-                </a:tc>
-                <a:tc>
-                  <a:txBody>
-                    <a:bodyPr wrap="square">
-                      <a:noAutofit/>
-                    </a:bodyPr>
-                    <a:lstStyle/>
-                    <a:p>
                       <a:pPr algn="r">
                         <a:lnSpc>
                           <a:spcPts val="2300"/>
@@ -10317,56 +10205,6 @@
                           <a:cs typeface="Noto Sans"/>
                         </a:rPr>
                         <a:t>valid</a:t>
-                      </a:r>
-                    </a:p>
-                  </a:txBody>
-                  <a:tcPr marL="63500" marR="63500" marT="38100" marB="38100" anchor="ctr">
-                    <a:lnL w="7620">
-                      <a:noFill/>
-                    </a:lnL>
-                    <a:lnR w="7620">
-                      <a:noFill/>
-                    </a:lnR>
-                    <a:lnT w="7620">
-                      <a:noFill/>
-                    </a:lnT>
-                    <a:lnB w="7620">
-                      <a:noFill/>
-                    </a:lnB>
-                    <a:solidFill>
-                      <a:srgbClr val="FFFEF8"/>
-                    </a:solidFill>
-                  </a:tcPr>
-                </a:tc>
-                <a:tc>
-                  <a:txBody>
-                    <a:bodyPr wrap="square">
-                      <a:noAutofit/>
-                    </a:bodyPr>
-                    <a:lstStyle/>
-                    <a:p>
-                      <a:pPr algn="l">
-                        <a:lnSpc>
-                          <a:spcPts val="2300"/>
-                        </a:lnSpc>
-                        <a:buNone/>
-                        <a:defRPr sz="2000" b="0">
-                          <a:solidFill>
-                            <a:srgbClr val="303437"/>
-                          </a:solidFill>
-                          <a:latin typeface="Noto Sans"/>
-                        </a:defRPr>
-                      </a:pPr>
-                      <a:r>
-                        <a:rPr sz="2000" b="0" lang="ja-JP" altLang="en-US">
-                          <a:solidFill>
-                            <a:srgbClr val="303437"/>
-                          </a:solidFill>
-                          <a:latin typeface="Noto Sans"/>
-                          <a:ea typeface="Noto Sans CJK JP"/>
-                          <a:cs typeface="Noto Sans"/>
-                        </a:rPr>
-                        <a:t>1,000〜5,999</a:t>
                       </a:r>
                     </a:p>
                   </a:txBody>
@@ -10500,59 +10338,6 @@
                     </a:bodyPr>
                     <a:lstStyle/>
                     <a:p>
-                      <a:pPr algn="l">
-                        <a:lnSpc>
-                          <a:spcPts val="2300"/>
-                        </a:lnSpc>
-                        <a:buNone/>
-                        <a:defRPr sz="2000" b="0">
-                          <a:solidFill>
-                            <a:srgbClr val="303437"/>
-                          </a:solidFill>
-                          <a:latin typeface="Noto Sans"/>
-                        </a:defRPr>
-                      </a:pPr>
-                      <a:r>
-                        <a:rPr sz="2000" b="0" lang="ja-JP" altLang="en-US">
-                          <a:solidFill>
-                            <a:srgbClr val="303437"/>
-                          </a:solidFill>
-                          <a:latin typeface="Noto Sans"/>
-                          <a:ea typeface="Noto Sans CJK JP"/>
-                          <a:cs typeface="Noto Sans"/>
-                        </a:rPr>
-                        <a:t>6,000〜10,999</a:t>
-                      </a:r>
-                    </a:p>
-                  </a:txBody>
-                  <a:tcPr marL="63500" marR="63500" marT="38100" marB="38100" anchor="ctr">
-                    <a:lnL w="7620">
-                      <a:noFill/>
-                    </a:lnL>
-                    <a:lnR w="7620">
-                      <a:noFill/>
-                    </a:lnR>
-                    <a:lnT w="7620">
-                      <a:noFill/>
-                    </a:lnT>
-                    <a:lnB w="15240">
-                      <a:solidFill>
-                        <a:srgbClr val="626669"/>
-                      </a:solidFill>
-                      <a:prstDash val="solid"/>
-                    </a:lnB>
-                    <a:solidFill>
-                      <a:srgbClr val="FFFEF8"/>
-                    </a:solidFill>
-                  </a:tcPr>
-                </a:tc>
-                <a:tc>
-                  <a:txBody>
-                    <a:bodyPr wrap="square">
-                      <a:noAutofit/>
-                    </a:bodyPr>
-                    <a:lstStyle/>
-                    <a:p>
                       <a:pPr algn="r">
                         <a:lnSpc>
                           <a:spcPts val="2300"/>
@@ -10653,7 +10438,7 @@
                 <a:ea typeface="Noto Sans CJK JP"/>
                 <a:cs typeface="Noto Sans"/>
               </a:rPr>
-              <a:t>既定seedは42。抽象3課題と自然言語2難度を別々に生成する。同じseedでも設定が異なれば、同じ問題の対にはならない。</a:t>
+              <a:t>置換・照合・帰納と、自然言語easy/hardをそれぞれ生成する。問題数と乱数の種は指定できる。</a:t>
             </a:r>
           </a:p>
         </p:txBody>
@@ -10667,7 +10452,7 @@
         <p:spPr>
           <a:xfrm>
             <a:off x="502920" y="4700016"/>
-            <a:ext cx="8183879" cy="530352"/>
+            <a:ext cx="8183879" cy="621792"/>
           </a:xfrm>
           <a:prstGeom prst="rect">
             <a:avLst/>
@@ -10707,19 +10492,28 @@
                 <a:ea typeface="Noto Sans CJK JP"/>
                 <a:cs typeface="Noto Sans"/>
               </a:rPr>
-              <a:t>[1] Stanford CRFM. HELM v0.4.0 公式生成器。</a:t>
-            </a:r>
-            <a:r>
-              <a:rPr sz="810" b="0" lang="ja-JP" altLang="en-US">
-                <a:solidFill>
-                  <a:srgbClr val="626669"/>
-                </a:solidFill>
-                <a:latin typeface="Noto Sans"/>
-                <a:ea typeface="Noto Sans CJK JP"/>
-                <a:cs typeface="Noto Sans"/>
-              </a:rPr>
-              <a:t>  </a:t>
-            </a:r>
+              <a:t>[1] Stanford CRFM. Synthetic Reasoning — 公開生成器。</a:t>
+            </a:r>
+          </a:p>
+          <a:p>
+            <a:pPr algn="l">
+              <a:lnSpc>
+                <a:spcPts val="940"/>
+              </a:lnSpc>
+              <a:spcBef>
+                <a:spcPts val="0"/>
+              </a:spcBef>
+              <a:spcAft>
+                <a:spcPts val="140"/>
+              </a:spcAft>
+              <a:buNone/>
+              <a:defRPr sz="810" b="0">
+                <a:solidFill>
+                  <a:srgbClr val="303437"/>
+                </a:solidFill>
+                <a:latin typeface="Noto Sans"/>
+              </a:defRPr>
+            </a:pPr>
             <a:r>
               <a:rPr sz="810" b="0" lang="ja-JP" altLang="en-US">
                 <a:solidFill>
@@ -10849,7 +10643,7 @@
                 <a:ea typeface="Noto Sans CJK JP"/>
                 <a:cs typeface="Noto Sans"/>
               </a:rPr>
-              <a:t>抽象版は、規則列への置換処理から正解を作る。自然言語版は、事実が各規則の条件を満たすかを調べ、その帰結の集合から正解文を作る。</a:t>
+              <a:t>抽象版は、規則列への置換処理から正解を作る。自然言語版は、事実が各規則の条件を満たすか調べ、その帰結をまとめて正解文を作る。</a:t>
             </a:r>
           </a:p>
           <a:p>
@@ -10879,7 +10673,7 @@
                 <a:ea typeface="Noto Sans CJK JP"/>
                 <a:cs typeface="Noto Sans"/>
               </a:rPr>
-              <a:t>人が問題文と正解を一件ずつ書く方式ではない。乱数seed、生成器のバージョン、モード、生成順のindexを固定すれば、同じ入力と参照正解を再生成できる。</a:t>
+              <a:t>短い語彙表と文型を使い、規則や事実を機械的に組み合わせて多数の問題を作れる。</a:t>
             </a:r>
           </a:p>
           <a:p>
@@ -10909,7 +10703,7 @@
                 <a:ea typeface="Noto Sans CJK JP"/>
                 <a:cs typeface="Noto Sans"/>
               </a:rPr>
-              <a:t>本資料の13例は、v0.4.0の公式生成器をseed42で実行したtestの問題全文と参照正解である。HELMのモデル入力には、問題に指示と提示例が加わる。</a:t>
+              <a:t>同じ乱数seedで生成器を初期化すると、同じ入力と正解を再生成できる。</a:t>
             </a:r>
           </a:p>
         </p:txBody>
@@ -10957,7 +10751,7 @@
                 <a:ea typeface="Noto Sans CJK JP"/>
                 <a:cs typeface="Noto Sans"/>
               </a:rPr>
-              <a:t>2. 生成器と固定seedの設計</a:t>
+              <a:t>2. 生成方法と問題の構成</a:t>
             </a:r>
           </a:p>
         </p:txBody>
@@ -10970,8 +10764,8 @@
         </p:nvSpPr>
         <p:spPr>
           <a:xfrm>
-            <a:off x="502920" y="4700016"/>
-            <a:ext cx="8183879" cy="530352"/>
+            <a:off x="502920" y="4517136"/>
+            <a:ext cx="8183879" cy="621792"/>
           </a:xfrm>
           <a:prstGeom prst="rect">
             <a:avLst/>
@@ -11011,8 +10805,28 @@
                 <a:ea typeface="Noto Sans CJK JP"/>
                 <a:cs typeface="Noto Sans"/>
               </a:rPr>
-              <a:t>[1] Stanford CRFM. HELM v0.4.0 公式生成器。</a:t>
-            </a:r>
+              <a:t>[1] Stanford CRFM. SyntheticReasoningScenario — 記号列の合成課題。</a:t>
+            </a:r>
+          </a:p>
+          <a:p>
+            <a:pPr algn="l">
+              <a:lnSpc>
+                <a:spcPts val="940"/>
+              </a:lnSpc>
+              <a:spcBef>
+                <a:spcPts val="0"/>
+              </a:spcBef>
+              <a:spcAft>
+                <a:spcPts val="140"/>
+              </a:spcAft>
+              <a:buNone/>
+              <a:defRPr sz="810" b="0">
+                <a:solidFill>
+                  <a:srgbClr val="303437"/>
+                </a:solidFill>
+                <a:latin typeface="Noto Sans"/>
+              </a:defRPr>
+            </a:pPr>
             <a:r>
               <a:rPr sz="810" b="0" lang="ja-JP" altLang="en-US">
                 <a:solidFill>
@@ -11021,9 +10835,30 @@
                 <a:latin typeface="Noto Sans"/>
                 <a:ea typeface="Noto Sans CJK JP"/>
                 <a:cs typeface="Noto Sans"/>
-              </a:rPr>
-              <a:t>  </a:t>
-            </a:r>
+                <a:hlinkClick r:id="rId3"/>
+              </a:rPr>
+              <a:t>https://github.com/stanford-crfm/helm/blob/v0.4.0/src/helm/benchmark/scenarios/synthetic_reasoning_scenario.py</a:t>
+            </a:r>
+          </a:p>
+          <a:p>
+            <a:pPr algn="l">
+              <a:lnSpc>
+                <a:spcPts val="940"/>
+              </a:lnSpc>
+              <a:spcBef>
+                <a:spcPts val="0"/>
+              </a:spcBef>
+              <a:spcAft>
+                <a:spcPts val="140"/>
+              </a:spcAft>
+              <a:buNone/>
+              <a:defRPr sz="810" b="0">
+                <a:solidFill>
+                  <a:srgbClr val="303437"/>
+                </a:solidFill>
+                <a:latin typeface="Noto Sans"/>
+              </a:defRPr>
+            </a:pPr>
             <a:r>
               <a:rPr sz="810" b="0" lang="ja-JP" altLang="en-US">
                 <a:solidFill>
@@ -11032,9 +10867,40 @@
                 <a:latin typeface="Noto Sans"/>
                 <a:ea typeface="Noto Sans CJK JP"/>
                 <a:cs typeface="Noto Sans"/>
-                <a:hlinkClick r:id="rId2"/>
-              </a:rPr>
-              <a:t>https://github.com/stanford-crfm/helm/tree/v0.4.0</a:t>
+              </a:rPr>
+              <a:t>[2] Stanford CRFM. SRNScenario — 自然言語の合成課題。</a:t>
+            </a:r>
+          </a:p>
+          <a:p>
+            <a:pPr algn="l">
+              <a:lnSpc>
+                <a:spcPts val="940"/>
+              </a:lnSpc>
+              <a:spcBef>
+                <a:spcPts val="0"/>
+              </a:spcBef>
+              <a:spcAft>
+                <a:spcPts val="140"/>
+              </a:spcAft>
+              <a:buNone/>
+              <a:defRPr sz="810" b="0">
+                <a:solidFill>
+                  <a:srgbClr val="303437"/>
+                </a:solidFill>
+                <a:latin typeface="Noto Sans"/>
+              </a:defRPr>
+            </a:pPr>
+            <a:r>
+              <a:rPr sz="810" b="0" lang="ja-JP" altLang="en-US">
+                <a:solidFill>
+                  <a:srgbClr val="626669"/>
+                </a:solidFill>
+                <a:latin typeface="Noto Sans"/>
+                <a:ea typeface="Noto Sans CJK JP"/>
+                <a:cs typeface="Noto Sans"/>
+                <a:hlinkClick r:id="rId4"/>
+              </a:rPr>
+              <a:t>https://github.com/stanford-crfm/helm/blob/v0.4.0/src/helm/benchmark/scenarios/synthetic_reasoning_natural_scenario.py</a:t>
             </a:r>
           </a:p>
         </p:txBody>
@@ -11100,7 +10966,7 @@
                 <a:ea typeface="Noto Sans CJK JP"/>
                 <a:cs typeface="Noto Sans"/>
               </a:rPr>
-              <a:t>3. 採点方法とモデルの到達水準</a:t>
+              <a:t>答えの形式と問題の特徴</a:t>
             </a:r>
           </a:p>
         </p:txBody>
@@ -11148,7 +11014,7 @@
                 <a:ea typeface="Noto Sans CJK JP"/>
                 <a:cs typeface="Noto Sans"/>
               </a:rPr>
-              <a:t>3. 採点方法とモデルの到達水準</a:t>
+              <a:t>3. 答えの形式と問題の特徴</a:t>
             </a:r>
           </a:p>
         </p:txBody>
@@ -11214,7 +11080,7 @@
                 <a:ea typeface="Noto Sans CJK JP"/>
                 <a:cs typeface="Noto Sans"/>
               </a:rPr>
-              <a:t>抽象版の主指標は、正規化後の文字列一致</a:t>
+              <a:t>課題ごとに、求める出力の形が変わる</a:t>
             </a:r>
           </a:p>
         </p:txBody>
@@ -11267,7 +11133,7 @@
                 <a:ea typeface="Noto Sans CJK JP"/>
                 <a:cs typeface="Noto Sans"/>
               </a:rPr>
-              <a:t>Classic v0.4.0の抽象版の主指標はquasi_exact_match。小文字化し、句読点・英語の冠詞・余分な空白を除いてから、参照正解と一致するかを0/1で採点する。</a:t>
+              <a:t>置換では、記号を保った置換後の文字列を答える。照合では候補の規則列そのもの、帰納ではRule:に続く規則列を出力する。</a:t>
             </a:r>
           </a:p>
           <a:p>
@@ -11297,37 +11163,7 @@
                 <a:ea typeface="Noto Sans CJK JP"/>
                 <a:cs typeface="Noto Sans"/>
               </a:rPr>
-              <a:t>この句読点除去では+、-、*、=も消える。したがって、主指標の正解率は記号まで正しく再現した割合とは異なる。</a:t>
-            </a:r>
-          </a:p>
-          <a:p>
-            <a:pPr marL="457200" indent="-355600">
-              <a:lnSpc>
-                <a:spcPts val="2379"/>
-              </a:lnSpc>
-              <a:spcAft>
-                <a:spcPts val="0"/>
-              </a:spcAft>
-              <a:buSzPct val="66500"/>
-              <a:buFont typeface="Noto Sans CJK JP"/>
-              <a:buChar char="●"/>
-              <a:defRPr sz="2000" b="0">
-                <a:solidFill>
-                  <a:srgbClr val="303437"/>
-                </a:solidFill>
-                <a:latin typeface="Noto Sans"/>
-              </a:defRPr>
-            </a:pPr>
-            <a:r>
-              <a:rPr sz="2000" b="0" lang="ja-JP" altLang="en-US">
-                <a:solidFill>
-                  <a:srgbClr val="303437"/>
-                </a:solidFill>
-                <a:latin typeface="Noto Sans"/>
-                <a:ea typeface="Noto Sans CJK JP"/>
-                <a:cs typeface="Noto Sans"/>
-              </a:rPr>
-              <a:t>記号を保った厳密一致exact_matchも公開されている。次の2表では、同じモデル・同じtestについて、正規化後の一致と厳密一致を分けて示す。</a:t>
+              <a:t>自然言語版は、事実から新たに導ける属性をまとめる。複数ならandで結び、新たな帰結がなければNothing.と答える。</a:t>
             </a:r>
           </a:p>
         </p:txBody>
@@ -11375,7 +11211,7 @@
                 <a:ea typeface="Noto Sans CJK JP"/>
                 <a:cs typeface="Noto Sans"/>
               </a:rPr>
-              <a:t>3. 採点方法とモデルの到達水準</a:t>
+              <a:t>3. 答えの形式と問題の特徴</a:t>
             </a:r>
           </a:p>
         </p:txBody>
@@ -11388,8 +11224,8 @@
         </p:nvSpPr>
         <p:spPr>
           <a:xfrm>
-            <a:off x="502920" y="4700016"/>
-            <a:ext cx="8183879" cy="530352"/>
+            <a:off x="502920" y="4517136"/>
+            <a:ext cx="8183879" cy="621792"/>
           </a:xfrm>
           <a:prstGeom prst="rect">
             <a:avLst/>
@@ -11429,8 +11265,28 @@
                 <a:ea typeface="Noto Sans CJK JP"/>
                 <a:cs typeface="Noto Sans"/>
               </a:rPr>
-              <a:t>[1] Stanford CRFM. BasicMetric, HELM v0.4.0.</a:t>
-            </a:r>
+              <a:t>[1] Stanford CRFM. SyntheticReasoningScenario — 記号列の合成課題。</a:t>
+            </a:r>
+          </a:p>
+          <a:p>
+            <a:pPr algn="l">
+              <a:lnSpc>
+                <a:spcPts val="940"/>
+              </a:lnSpc>
+              <a:spcBef>
+                <a:spcPts val="0"/>
+              </a:spcBef>
+              <a:spcAft>
+                <a:spcPts val="140"/>
+              </a:spcAft>
+              <a:buNone/>
+              <a:defRPr sz="810" b="0">
+                <a:solidFill>
+                  <a:srgbClr val="303437"/>
+                </a:solidFill>
+                <a:latin typeface="Noto Sans"/>
+              </a:defRPr>
+            </a:pPr>
             <a:r>
               <a:rPr sz="810" b="0" lang="ja-JP" altLang="en-US">
                 <a:solidFill>
@@ -11439,9 +11295,30 @@
                 <a:latin typeface="Noto Sans"/>
                 <a:ea typeface="Noto Sans CJK JP"/>
                 <a:cs typeface="Noto Sans"/>
-              </a:rPr>
-              <a:t>  </a:t>
-            </a:r>
+                <a:hlinkClick r:id="rId3"/>
+              </a:rPr>
+              <a:t>https://github.com/stanford-crfm/helm/blob/v0.4.0/src/helm/benchmark/scenarios/synthetic_reasoning_scenario.py</a:t>
+            </a:r>
+          </a:p>
+          <a:p>
+            <a:pPr algn="l">
+              <a:lnSpc>
+                <a:spcPts val="940"/>
+              </a:lnSpc>
+              <a:spcBef>
+                <a:spcPts val="0"/>
+              </a:spcBef>
+              <a:spcAft>
+                <a:spcPts val="140"/>
+              </a:spcAft>
+              <a:buNone/>
+              <a:defRPr sz="810" b="0">
+                <a:solidFill>
+                  <a:srgbClr val="303437"/>
+                </a:solidFill>
+                <a:latin typeface="Noto Sans"/>
+              </a:defRPr>
+            </a:pPr>
             <a:r>
               <a:rPr sz="810" b="0" lang="ja-JP" altLang="en-US">
                 <a:solidFill>
@@ -11450,1084 +11327,10 @@
                 <a:latin typeface="Noto Sans"/>
                 <a:ea typeface="Noto Sans CJK JP"/>
                 <a:cs typeface="Noto Sans"/>
-                <a:hlinkClick r:id="rId2"/>
-              </a:rPr>
-              <a:t>https://github.com/stanford-crfm/helm/blob/v0.4.0/src/helm/benchmark/metrics/basic_metrics.py</a:t>
-            </a:r>
-          </a:p>
-        </p:txBody>
-      </p:sp>
-    </p:spTree>
-  </p:cSld>
-  <p:clrMapOvr>
-    <a:masterClrMapping/>
-  </p:clrMapOvr>
-</p:sld>
-</file>
-
-<file path=ppt/slides/slide19.xml><?xml version="1.0" encoding="utf-8"?>
-<p:sld xmlns:a="http://schemas.openxmlformats.org/drawingml/2006/main" xmlns:p="http://schemas.openxmlformats.org/presentationml/2006/main" xmlns:r="http://schemas.openxmlformats.org/officeDocument/2006/relationships">
-  <p:cSld>
-    <p:spTree>
-      <p:nvGrpSpPr>
-        <p:cNvPr id="1" name=""/>
-        <p:cNvGrpSpPr/>
-        <p:nvPr/>
-      </p:nvGrpSpPr>
-      <p:grpSpPr/>
-      <p:sp>
-        <p:nvSpPr>
-          <p:cNvPr id="2" name="Title 1"/>
-          <p:cNvSpPr>
-            <a:spLocks noGrp="1"/>
-          </p:cNvSpPr>
-          <p:nvPr>
-            <p:ph type="title"/>
-          </p:nvPr>
-        </p:nvSpPr>
-        <p:spPr>
-          <a:xfrm>
-            <a:off x="468172" y="650138"/>
-            <a:ext cx="8206740" cy="616305"/>
-          </a:xfrm>
-        </p:spPr>
-        <p:txBody>
-          <a:bodyPr wrap="square" lIns="0" rIns="0" tIns="0" bIns="0">
-            <a:noAutofit/>
-          </a:bodyPr>
-          <a:lstStyle/>
-          <a:p>
-            <a:pPr algn="l">
-              <a:lnSpc>
-                <a:spcPct val="110000"/>
-              </a:lnSpc>
-              <a:buNone/>
-              <a:defRPr sz="2800" b="0">
-                <a:solidFill>
-                  <a:srgbClr val="303437"/>
-                </a:solidFill>
-                <a:latin typeface="Noto Sans"/>
-              </a:defRPr>
-            </a:pPr>
-            <a:r>
-              <a:rPr sz="2800" b="1" lang="ja-JP" altLang="en-US">
-                <a:solidFill>
-                  <a:srgbClr val="303437"/>
-                </a:solidFill>
-                <a:latin typeface="Noto Sans"/>
-                <a:ea typeface="Noto Sans CJK JP"/>
-                <a:cs typeface="Noto Sans"/>
-              </a:rPr>
-              <a:t>抽象版：正規化後の一致率</a:t>
-            </a:r>
-          </a:p>
-        </p:txBody>
-      </p:sp>
-      <p:sp>
-        <p:nvSpPr>
-          <p:cNvPr id="3" name="Title 2"/>
-          <p:cNvSpPr>
-            <a:spLocks noGrp="1"/>
-          </p:cNvSpPr>
-          <p:nvPr>
-            <p:ph type="title" idx="2"/>
-          </p:nvPr>
-        </p:nvSpPr>
-        <p:spPr>
-          <a:xfrm>
-            <a:off x="75895" y="0"/>
-            <a:ext cx="8115300" cy="480060"/>
-          </a:xfrm>
-        </p:spPr>
-        <p:txBody>
-          <a:bodyPr wrap="square" lIns="0" rIns="0" tIns="0" bIns="0" anchor="ctr">
-            <a:noAutofit/>
-          </a:bodyPr>
-          <a:lstStyle/>
-          <a:p>
-            <a:pPr algn="l">
-              <a:lnSpc>
-                <a:spcPct val="110000"/>
-              </a:lnSpc>
-              <a:buNone/>
-              <a:defRPr sz="1400" b="0">
-                <a:solidFill>
-                  <a:srgbClr val="303437"/>
-                </a:solidFill>
-                <a:latin typeface="Noto Sans"/>
-              </a:defRPr>
-            </a:pPr>
-            <a:r>
-              <a:rPr sz="1400" b="1" lang="ja-JP" altLang="en-US">
-                <a:solidFill>
-                  <a:srgbClr val="FFFEF8"/>
-                </a:solidFill>
-                <a:latin typeface="Noto Sans"/>
-                <a:ea typeface="Noto Sans CJK JP"/>
-                <a:cs typeface="Noto Sans"/>
-              </a:rPr>
-              <a:t>3. 採点方法とモデルの到達水準</a:t>
-            </a:r>
-          </a:p>
-        </p:txBody>
-      </p:sp>
-      <p:graphicFrame>
-        <p:nvGraphicFramePr>
-          <p:cNvPr id="4" name="Table 3"/>
-          <p:cNvGraphicFramePr>
-            <a:graphicFrameLocks noGrp="1"/>
-          </p:cNvGraphicFramePr>
-          <p:nvPr/>
-        </p:nvGraphicFramePr>
-        <p:xfrm>
-          <a:off x="548640" y="1508760"/>
-          <a:ext cx="8046720" cy="1682496"/>
-        </p:xfrm>
-        <a:graphic>
-          <a:graphicData uri="http://schemas.openxmlformats.org/drawingml/2006/table">
-            <a:tbl>
-              <a:tblPr firstRow="0" bandRow="0"/>
-              <a:tblGrid>
-                <a:gridCol w="3474720"/>
-                <a:gridCol w="1524000"/>
-                <a:gridCol w="1524000"/>
-                <a:gridCol w="1524000"/>
-              </a:tblGrid>
-              <a:tr h="420624">
-                <a:tc>
-                  <a:txBody>
-                    <a:bodyPr wrap="square">
-                      <a:noAutofit/>
-                    </a:bodyPr>
-                    <a:lstStyle/>
-                    <a:p>
-                      <a:pPr algn="l">
-                        <a:lnSpc>
-                          <a:spcPts val="2070"/>
-                        </a:lnSpc>
-                        <a:buNone/>
-                        <a:defRPr sz="1800" b="0">
-                          <a:solidFill>
-                            <a:srgbClr val="303437"/>
-                          </a:solidFill>
-                          <a:latin typeface="Noto Sans"/>
-                        </a:defRPr>
-                      </a:pPr>
-                      <a:r>
-                        <a:rPr sz="1800" b="0" lang="ja-JP" altLang="en-US">
-                          <a:solidFill>
-                            <a:srgbClr val="303437"/>
-                          </a:solidFill>
-                          <a:latin typeface="Noto Sans"/>
-                          <a:ea typeface="Noto Sans CJK JP"/>
-                          <a:cs typeface="Noto Sans"/>
-                        </a:rPr>
-                        <a:t>モデル</a:t>
-                      </a:r>
-                    </a:p>
-                  </a:txBody>
-                  <a:tcPr marL="63500" marR="63500" marT="38100" marB="38100" anchor="ctr">
-                    <a:lnL w="7620">
-                      <a:noFill/>
-                    </a:lnL>
-                    <a:lnR w="7620">
-                      <a:noFill/>
-                    </a:lnR>
-                    <a:lnT w="15240">
-                      <a:solidFill>
-                        <a:srgbClr val="626669"/>
-                      </a:solidFill>
-                      <a:prstDash val="solid"/>
-                    </a:lnT>
-                    <a:lnB w="7620">
-                      <a:solidFill>
-                        <a:srgbClr val="626669"/>
-                      </a:solidFill>
-                      <a:prstDash val="solid"/>
-                    </a:lnB>
-                    <a:solidFill>
-                      <a:srgbClr val="FFFEF8"/>
-                    </a:solidFill>
-                  </a:tcPr>
-                </a:tc>
-                <a:tc>
-                  <a:txBody>
-                    <a:bodyPr wrap="square">
-                      <a:noAutofit/>
-                    </a:bodyPr>
-                    <a:lstStyle/>
-                    <a:p>
-                      <a:pPr algn="r">
-                        <a:lnSpc>
-                          <a:spcPts val="2070"/>
-                        </a:lnSpc>
-                        <a:buNone/>
-                        <a:defRPr sz="1800" b="0">
-                          <a:solidFill>
-                            <a:srgbClr val="303437"/>
-                          </a:solidFill>
-                          <a:latin typeface="Noto Sans"/>
-                        </a:defRPr>
-                      </a:pPr>
-                      <a:r>
-                        <a:rPr sz="1800" b="0" lang="ja-JP" altLang="en-US">
-                          <a:solidFill>
-                            <a:srgbClr val="303437"/>
-                          </a:solidFill>
-                          <a:latin typeface="Noto Sans"/>
-                          <a:ea typeface="Noto Sans CJK JP"/>
-                          <a:cs typeface="Noto Sans"/>
-                        </a:rPr>
-                        <a:t>置換 %</a:t>
-                      </a:r>
-                    </a:p>
-                  </a:txBody>
-                  <a:tcPr marL="63500" marR="63500" marT="38100" marB="38100" anchor="ctr">
-                    <a:lnL w="7620">
-                      <a:noFill/>
-                    </a:lnL>
-                    <a:lnR w="7620">
-                      <a:noFill/>
-                    </a:lnR>
-                    <a:lnT w="15240">
-                      <a:solidFill>
-                        <a:srgbClr val="626669"/>
-                      </a:solidFill>
-                      <a:prstDash val="solid"/>
-                    </a:lnT>
-                    <a:lnB w="7620">
-                      <a:solidFill>
-                        <a:srgbClr val="626669"/>
-                      </a:solidFill>
-                      <a:prstDash val="solid"/>
-                    </a:lnB>
-                    <a:solidFill>
-                      <a:srgbClr val="FFFEF8"/>
-                    </a:solidFill>
-                  </a:tcPr>
-                </a:tc>
-                <a:tc>
-                  <a:txBody>
-                    <a:bodyPr wrap="square">
-                      <a:noAutofit/>
-                    </a:bodyPr>
-                    <a:lstStyle/>
-                    <a:p>
-                      <a:pPr algn="r">
-                        <a:lnSpc>
-                          <a:spcPts val="2070"/>
-                        </a:lnSpc>
-                        <a:buNone/>
-                        <a:defRPr sz="1800" b="0">
-                          <a:solidFill>
-                            <a:srgbClr val="303437"/>
-                          </a:solidFill>
-                          <a:latin typeface="Noto Sans"/>
-                        </a:defRPr>
-                      </a:pPr>
-                      <a:r>
-                        <a:rPr sz="1800" b="0" lang="ja-JP" altLang="en-US">
-                          <a:solidFill>
-                            <a:srgbClr val="303437"/>
-                          </a:solidFill>
-                          <a:latin typeface="Noto Sans"/>
-                          <a:ea typeface="Noto Sans CJK JP"/>
-                          <a:cs typeface="Noto Sans"/>
-                        </a:rPr>
-                        <a:t>照合 %</a:t>
-                      </a:r>
-                    </a:p>
-                  </a:txBody>
-                  <a:tcPr marL="63500" marR="63500" marT="38100" marB="38100" anchor="ctr">
-                    <a:lnL w="7620">
-                      <a:noFill/>
-                    </a:lnL>
-                    <a:lnR w="7620">
-                      <a:noFill/>
-                    </a:lnR>
-                    <a:lnT w="15240">
-                      <a:solidFill>
-                        <a:srgbClr val="626669"/>
-                      </a:solidFill>
-                      <a:prstDash val="solid"/>
-                    </a:lnT>
-                    <a:lnB w="7620">
-                      <a:solidFill>
-                        <a:srgbClr val="626669"/>
-                      </a:solidFill>
-                      <a:prstDash val="solid"/>
-                    </a:lnB>
-                    <a:solidFill>
-                      <a:srgbClr val="FFFEF8"/>
-                    </a:solidFill>
-                  </a:tcPr>
-                </a:tc>
-                <a:tc>
-                  <a:txBody>
-                    <a:bodyPr wrap="square">
-                      <a:noAutofit/>
-                    </a:bodyPr>
-                    <a:lstStyle/>
-                    <a:p>
-                      <a:pPr algn="r">
-                        <a:lnSpc>
-                          <a:spcPts val="2070"/>
-                        </a:lnSpc>
-                        <a:buNone/>
-                        <a:defRPr sz="1800" b="0">
-                          <a:solidFill>
-                            <a:srgbClr val="303437"/>
-                          </a:solidFill>
-                          <a:latin typeface="Noto Sans"/>
-                        </a:defRPr>
-                      </a:pPr>
-                      <a:r>
-                        <a:rPr sz="1800" b="0" lang="ja-JP" altLang="en-US">
-                          <a:solidFill>
-                            <a:srgbClr val="303437"/>
-                          </a:solidFill>
-                          <a:latin typeface="Noto Sans"/>
-                          <a:ea typeface="Noto Sans CJK JP"/>
-                          <a:cs typeface="Noto Sans"/>
-                        </a:rPr>
-                        <a:t>帰納 %</a:t>
-                      </a:r>
-                    </a:p>
-                  </a:txBody>
-                  <a:tcPr marL="63500" marR="63500" marT="38100" marB="38100" anchor="ctr">
-                    <a:lnL w="7620">
-                      <a:noFill/>
-                    </a:lnL>
-                    <a:lnR w="7620">
-                      <a:noFill/>
-                    </a:lnR>
-                    <a:lnT w="15240">
-                      <a:solidFill>
-                        <a:srgbClr val="626669"/>
-                      </a:solidFill>
-                      <a:prstDash val="solid"/>
-                    </a:lnT>
-                    <a:lnB w="7620">
-                      <a:solidFill>
-                        <a:srgbClr val="626669"/>
-                      </a:solidFill>
-                      <a:prstDash val="solid"/>
-                    </a:lnB>
-                    <a:solidFill>
-                      <a:srgbClr val="FFFEF8"/>
-                    </a:solidFill>
-                  </a:tcPr>
-                </a:tc>
-              </a:tr>
-              <a:tr h="420624">
-                <a:tc>
-                  <a:txBody>
-                    <a:bodyPr wrap="square">
-                      <a:noAutofit/>
-                    </a:bodyPr>
-                    <a:lstStyle/>
-                    <a:p>
-                      <a:pPr algn="l">
-                        <a:lnSpc>
-                          <a:spcPts val="2070"/>
-                        </a:lnSpc>
-                        <a:buNone/>
-                        <a:defRPr sz="1800" b="0">
-                          <a:solidFill>
-                            <a:srgbClr val="303437"/>
-                          </a:solidFill>
-                          <a:latin typeface="Noto Sans"/>
-                        </a:defRPr>
-                      </a:pPr>
-                      <a:r>
-                        <a:rPr sz="1800" b="0" lang="ja-JP" altLang="en-US">
-                          <a:solidFill>
-                            <a:srgbClr val="303437"/>
-                          </a:solidFill>
-                          <a:latin typeface="Noto Sans"/>
-                          <a:ea typeface="Noto Sans CJK JP"/>
-                          <a:cs typeface="Noto Sans"/>
-                        </a:rPr>
-                        <a:t>text-davinci-003 (2022)</a:t>
-                      </a:r>
-                    </a:p>
-                  </a:txBody>
-                  <a:tcPr marL="63500" marR="63500" marT="38100" marB="38100" anchor="ctr">
-                    <a:lnL w="7620">
-                      <a:noFill/>
-                    </a:lnL>
-                    <a:lnR w="7620">
-                      <a:noFill/>
-                    </a:lnR>
-                    <a:lnT w="7620">
-                      <a:solidFill>
-                        <a:srgbClr val="626669"/>
-                      </a:solidFill>
-                      <a:prstDash val="solid"/>
-                    </a:lnT>
-                    <a:lnB w="7620">
-                      <a:noFill/>
-                    </a:lnB>
-                    <a:solidFill>
-                      <a:srgbClr val="FFFEF8"/>
-                    </a:solidFill>
-                  </a:tcPr>
-                </a:tc>
-                <a:tc>
-                  <a:txBody>
-                    <a:bodyPr wrap="square">
-                      <a:noAutofit/>
-                    </a:bodyPr>
-                    <a:lstStyle/>
-                    <a:p>
-                      <a:pPr algn="r">
-                        <a:lnSpc>
-                          <a:spcPts val="2070"/>
-                        </a:lnSpc>
-                        <a:buNone/>
-                        <a:defRPr sz="1800" b="0">
-                          <a:solidFill>
-                            <a:srgbClr val="303437"/>
-                          </a:solidFill>
-                          <a:latin typeface="Noto Sans"/>
-                        </a:defRPr>
-                      </a:pPr>
-                      <a:r>
-                        <a:rPr sz="1800" b="0" lang="ja-JP" altLang="en-US">
-                          <a:solidFill>
-                            <a:srgbClr val="303437"/>
-                          </a:solidFill>
-                          <a:latin typeface="Noto Sans"/>
-                          <a:ea typeface="Noto Sans CJK JP"/>
-                          <a:cs typeface="Noto Sans"/>
-                        </a:rPr>
-                        <a:t>97.22</a:t>
-                      </a:r>
-                    </a:p>
-                  </a:txBody>
-                  <a:tcPr marL="63500" marR="63500" marT="38100" marB="38100" anchor="ctr">
-                    <a:lnL w="7620">
-                      <a:noFill/>
-                    </a:lnL>
-                    <a:lnR w="7620">
-                      <a:noFill/>
-                    </a:lnR>
-                    <a:lnT w="7620">
-                      <a:solidFill>
-                        <a:srgbClr val="626669"/>
-                      </a:solidFill>
-                      <a:prstDash val="solid"/>
-                    </a:lnT>
-                    <a:lnB w="7620">
-                      <a:noFill/>
-                    </a:lnB>
-                    <a:solidFill>
-                      <a:srgbClr val="FFFEF8"/>
-                    </a:solidFill>
-                  </a:tcPr>
-                </a:tc>
-                <a:tc>
-                  <a:txBody>
-                    <a:bodyPr wrap="square">
-                      <a:noAutofit/>
-                    </a:bodyPr>
-                    <a:lstStyle/>
-                    <a:p>
-                      <a:pPr algn="r">
-                        <a:lnSpc>
-                          <a:spcPts val="2070"/>
-                        </a:lnSpc>
-                        <a:buNone/>
-                        <a:defRPr sz="1800" b="0">
-                          <a:solidFill>
-                            <a:srgbClr val="303437"/>
-                          </a:solidFill>
-                          <a:latin typeface="Noto Sans"/>
-                        </a:defRPr>
-                      </a:pPr>
-                      <a:r>
-                        <a:rPr sz="1800" b="0" lang="ja-JP" altLang="en-US">
-                          <a:solidFill>
-                            <a:srgbClr val="303437"/>
-                          </a:solidFill>
-                          <a:latin typeface="Noto Sans"/>
-                          <a:ea typeface="Noto Sans CJK JP"/>
-                          <a:cs typeface="Noto Sans"/>
-                        </a:rPr>
-                        <a:t>42.39</a:t>
-                      </a:r>
-                    </a:p>
-                  </a:txBody>
-                  <a:tcPr marL="63500" marR="63500" marT="38100" marB="38100" anchor="ctr">
-                    <a:lnL w="7620">
-                      <a:noFill/>
-                    </a:lnL>
-                    <a:lnR w="7620">
-                      <a:noFill/>
-                    </a:lnR>
-                    <a:lnT w="7620">
-                      <a:solidFill>
-                        <a:srgbClr val="626669"/>
-                      </a:solidFill>
-                      <a:prstDash val="solid"/>
-                    </a:lnT>
-                    <a:lnB w="7620">
-                      <a:noFill/>
-                    </a:lnB>
-                    <a:solidFill>
-                      <a:srgbClr val="FFFEF8"/>
-                    </a:solidFill>
-                  </a:tcPr>
-                </a:tc>
-                <a:tc>
-                  <a:txBody>
-                    <a:bodyPr wrap="square">
-                      <a:noAutofit/>
-                    </a:bodyPr>
-                    <a:lstStyle/>
-                    <a:p>
-                      <a:pPr algn="r">
-                        <a:lnSpc>
-                          <a:spcPts val="2070"/>
-                        </a:lnSpc>
-                        <a:buNone/>
-                        <a:defRPr sz="1800" b="0">
-                          <a:solidFill>
-                            <a:srgbClr val="303437"/>
-                          </a:solidFill>
-                          <a:latin typeface="Noto Sans"/>
-                        </a:defRPr>
-                      </a:pPr>
-                      <a:r>
-                        <a:rPr sz="1800" b="0" lang="ja-JP" altLang="en-US">
-                          <a:solidFill>
-                            <a:srgbClr val="303437"/>
-                          </a:solidFill>
-                          <a:latin typeface="Noto Sans"/>
-                          <a:ea typeface="Noto Sans CJK JP"/>
-                          <a:cs typeface="Noto Sans"/>
-                        </a:rPr>
-                        <a:t>11.13</a:t>
-                      </a:r>
-                    </a:p>
-                  </a:txBody>
-                  <a:tcPr marL="63500" marR="63500" marT="38100" marB="38100" anchor="ctr">
-                    <a:lnL w="7620">
-                      <a:noFill/>
-                    </a:lnL>
-                    <a:lnR w="7620">
-                      <a:noFill/>
-                    </a:lnR>
-                    <a:lnT w="7620">
-                      <a:solidFill>
-                        <a:srgbClr val="626669"/>
-                      </a:solidFill>
-                      <a:prstDash val="solid"/>
-                    </a:lnT>
-                    <a:lnB w="7620">
-                      <a:noFill/>
-                    </a:lnB>
-                    <a:solidFill>
-                      <a:srgbClr val="FFFEF8"/>
-                    </a:solidFill>
-                  </a:tcPr>
-                </a:tc>
-              </a:tr>
-              <a:tr h="420624">
-                <a:tc>
-                  <a:txBody>
-                    <a:bodyPr wrap="square">
-                      <a:noAutofit/>
-                    </a:bodyPr>
-                    <a:lstStyle/>
-                    <a:p>
-                      <a:pPr algn="l">
-                        <a:lnSpc>
-                          <a:spcPts val="2070"/>
-                        </a:lnSpc>
-                        <a:buNone/>
-                        <a:defRPr sz="1800" b="0">
-                          <a:solidFill>
-                            <a:srgbClr val="303437"/>
-                          </a:solidFill>
-                          <a:latin typeface="Noto Sans"/>
-                        </a:defRPr>
-                      </a:pPr>
-                      <a:r>
-                        <a:rPr sz="1800" b="0" lang="ja-JP" altLang="en-US">
-                          <a:solidFill>
-                            <a:srgbClr val="303437"/>
-                          </a:solidFill>
-                          <a:latin typeface="Noto Sans"/>
-                          <a:ea typeface="Noto Sans CJK JP"/>
-                          <a:cs typeface="Noto Sans"/>
-                        </a:rPr>
-                        <a:t>OPT-175B (2022)</a:t>
-                      </a:r>
-                    </a:p>
-                  </a:txBody>
-                  <a:tcPr marL="63500" marR="63500" marT="38100" marB="38100" anchor="ctr">
-                    <a:lnL w="7620">
-                      <a:noFill/>
-                    </a:lnL>
-                    <a:lnR w="7620">
-                      <a:noFill/>
-                    </a:lnR>
-                    <a:lnT w="7620">
-                      <a:noFill/>
-                    </a:lnT>
-                    <a:lnB w="7620">
-                      <a:noFill/>
-                    </a:lnB>
-                    <a:solidFill>
-                      <a:srgbClr val="FFFEF8"/>
-                    </a:solidFill>
-                  </a:tcPr>
-                </a:tc>
-                <a:tc>
-                  <a:txBody>
-                    <a:bodyPr wrap="square">
-                      <a:noAutofit/>
-                    </a:bodyPr>
-                    <a:lstStyle/>
-                    <a:p>
-                      <a:pPr algn="r">
-                        <a:lnSpc>
-                          <a:spcPts val="2070"/>
-                        </a:lnSpc>
-                        <a:buNone/>
-                        <a:defRPr sz="1800" b="0">
-                          <a:solidFill>
-                            <a:srgbClr val="303437"/>
-                          </a:solidFill>
-                          <a:latin typeface="Noto Sans"/>
-                        </a:defRPr>
-                      </a:pPr>
-                      <a:r>
-                        <a:rPr sz="1800" b="0" lang="ja-JP" altLang="en-US">
-                          <a:solidFill>
-                            <a:srgbClr val="303437"/>
-                          </a:solidFill>
-                          <a:latin typeface="Noto Sans"/>
-                          <a:ea typeface="Noto Sans CJK JP"/>
-                          <a:cs typeface="Noto Sans"/>
-                        </a:rPr>
-                        <a:t>25.24</a:t>
-                      </a:r>
-                    </a:p>
-                  </a:txBody>
-                  <a:tcPr marL="63500" marR="63500" marT="38100" marB="38100" anchor="ctr">
-                    <a:lnL w="7620">
-                      <a:noFill/>
-                    </a:lnL>
-                    <a:lnR w="7620">
-                      <a:noFill/>
-                    </a:lnR>
-                    <a:lnT w="7620">
-                      <a:noFill/>
-                    </a:lnT>
-                    <a:lnB w="7620">
-                      <a:noFill/>
-                    </a:lnB>
-                    <a:solidFill>
-                      <a:srgbClr val="FFFEF8"/>
-                    </a:solidFill>
-                  </a:tcPr>
-                </a:tc>
-                <a:tc>
-                  <a:txBody>
-                    <a:bodyPr wrap="square">
-                      <a:noAutofit/>
-                    </a:bodyPr>
-                    <a:lstStyle/>
-                    <a:p>
-                      <a:pPr algn="r">
-                        <a:lnSpc>
-                          <a:spcPts val="2070"/>
-                        </a:lnSpc>
-                        <a:buNone/>
-                        <a:defRPr sz="1800" b="0">
-                          <a:solidFill>
-                            <a:srgbClr val="303437"/>
-                          </a:solidFill>
-                          <a:latin typeface="Noto Sans"/>
-                        </a:defRPr>
-                      </a:pPr>
-                      <a:r>
-                        <a:rPr sz="1800" b="0" lang="ja-JP" altLang="en-US">
-                          <a:solidFill>
-                            <a:srgbClr val="303437"/>
-                          </a:solidFill>
-                          <a:latin typeface="Noto Sans"/>
-                          <a:ea typeface="Noto Sans CJK JP"/>
-                          <a:cs typeface="Noto Sans"/>
-                        </a:rPr>
-                        <a:t>40.58</a:t>
-                      </a:r>
-                    </a:p>
-                  </a:txBody>
-                  <a:tcPr marL="63500" marR="63500" marT="38100" marB="38100" anchor="ctr">
-                    <a:lnL w="7620">
-                      <a:noFill/>
-                    </a:lnL>
-                    <a:lnR w="7620">
-                      <a:noFill/>
-                    </a:lnR>
-                    <a:lnT w="7620">
-                      <a:noFill/>
-                    </a:lnT>
-                    <a:lnB w="7620">
-                      <a:noFill/>
-                    </a:lnB>
-                    <a:solidFill>
-                      <a:srgbClr val="FFFEF8"/>
-                    </a:solidFill>
-                  </a:tcPr>
-                </a:tc>
-                <a:tc>
-                  <a:txBody>
-                    <a:bodyPr wrap="square">
-                      <a:noAutofit/>
-                    </a:bodyPr>
-                    <a:lstStyle/>
-                    <a:p>
-                      <a:pPr algn="r">
-                        <a:lnSpc>
-                          <a:spcPts val="2070"/>
-                        </a:lnSpc>
-                        <a:buNone/>
-                        <a:defRPr sz="1800" b="0">
-                          <a:solidFill>
-                            <a:srgbClr val="303437"/>
-                          </a:solidFill>
-                          <a:latin typeface="Noto Sans"/>
-                        </a:defRPr>
-                      </a:pPr>
-                      <a:r>
-                        <a:rPr sz="1800" b="0" lang="ja-JP" altLang="en-US">
-                          <a:solidFill>
-                            <a:srgbClr val="303437"/>
-                          </a:solidFill>
-                          <a:latin typeface="Noto Sans"/>
-                          <a:ea typeface="Noto Sans CJK JP"/>
-                          <a:cs typeface="Noto Sans"/>
-                        </a:rPr>
-                        <a:t>1.81</a:t>
-                      </a:r>
-                    </a:p>
-                  </a:txBody>
-                  <a:tcPr marL="63500" marR="63500" marT="38100" marB="38100" anchor="ctr">
-                    <a:lnL w="7620">
-                      <a:noFill/>
-                    </a:lnL>
-                    <a:lnR w="7620">
-                      <a:noFill/>
-                    </a:lnR>
-                    <a:lnT w="7620">
-                      <a:noFill/>
-                    </a:lnT>
-                    <a:lnB w="7620">
-                      <a:noFill/>
-                    </a:lnB>
-                    <a:solidFill>
-                      <a:srgbClr val="FFFEF8"/>
-                    </a:solidFill>
-                  </a:tcPr>
-                </a:tc>
-              </a:tr>
-              <a:tr h="420624">
-                <a:tc>
-                  <a:txBody>
-                    <a:bodyPr wrap="square">
-                      <a:noAutofit/>
-                    </a:bodyPr>
-                    <a:lstStyle/>
-                    <a:p>
-                      <a:pPr algn="l">
-                        <a:lnSpc>
-                          <a:spcPts val="2070"/>
-                        </a:lnSpc>
-                        <a:buNone/>
-                        <a:defRPr sz="1800" b="0">
-                          <a:solidFill>
-                            <a:srgbClr val="303437"/>
-                          </a:solidFill>
-                          <a:latin typeface="Noto Sans"/>
-                        </a:defRPr>
-                      </a:pPr>
-                      <a:r>
-                        <a:rPr sz="1800" b="0" lang="ja-JP" altLang="en-US">
-                          <a:solidFill>
-                            <a:srgbClr val="303437"/>
-                          </a:solidFill>
-                          <a:latin typeface="Noto Sans"/>
-                          <a:ea typeface="Noto Sans CJK JP"/>
-                          <a:cs typeface="Noto Sans"/>
-                        </a:rPr>
-                        <a:t>Llama 2 70B (2023)</a:t>
-                      </a:r>
-                    </a:p>
-                  </a:txBody>
-                  <a:tcPr marL="63500" marR="63500" marT="38100" marB="38100" anchor="ctr">
-                    <a:lnL w="7620">
-                      <a:noFill/>
-                    </a:lnL>
-                    <a:lnR w="7620">
-                      <a:noFill/>
-                    </a:lnR>
-                    <a:lnT w="7620">
-                      <a:noFill/>
-                    </a:lnT>
-                    <a:lnB w="15240">
-                      <a:solidFill>
-                        <a:srgbClr val="626669"/>
-                      </a:solidFill>
-                      <a:prstDash val="solid"/>
-                    </a:lnB>
-                    <a:solidFill>
-                      <a:srgbClr val="FFFEF8"/>
-                    </a:solidFill>
-                  </a:tcPr>
-                </a:tc>
-                <a:tc>
-                  <a:txBody>
-                    <a:bodyPr wrap="square">
-                      <a:noAutofit/>
-                    </a:bodyPr>
-                    <a:lstStyle/>
-                    <a:p>
-                      <a:pPr algn="r">
-                        <a:lnSpc>
-                          <a:spcPts val="2070"/>
-                        </a:lnSpc>
-                        <a:buNone/>
-                        <a:defRPr sz="1800" b="0">
-                          <a:solidFill>
-                            <a:srgbClr val="303437"/>
-                          </a:solidFill>
-                          <a:latin typeface="Noto Sans"/>
-                        </a:defRPr>
-                      </a:pPr>
-                      <a:r>
-                        <a:rPr sz="1800" b="0" lang="ja-JP" altLang="en-US">
-                          <a:solidFill>
-                            <a:srgbClr val="303437"/>
-                          </a:solidFill>
-                          <a:latin typeface="Noto Sans"/>
-                          <a:ea typeface="Noto Sans CJK JP"/>
-                          <a:cs typeface="Noto Sans"/>
-                        </a:rPr>
-                        <a:t>90.49</a:t>
-                      </a:r>
-                    </a:p>
-                  </a:txBody>
-                  <a:tcPr marL="63500" marR="63500" marT="38100" marB="38100" anchor="ctr">
-                    <a:lnL w="7620">
-                      <a:noFill/>
-                    </a:lnL>
-                    <a:lnR w="7620">
-                      <a:noFill/>
-                    </a:lnR>
-                    <a:lnT w="7620">
-                      <a:noFill/>
-                    </a:lnT>
-                    <a:lnB w="15240">
-                      <a:solidFill>
-                        <a:srgbClr val="626669"/>
-                      </a:solidFill>
-                      <a:prstDash val="solid"/>
-                    </a:lnB>
-                    <a:solidFill>
-                      <a:srgbClr val="FFFEF8"/>
-                    </a:solidFill>
-                  </a:tcPr>
-                </a:tc>
-                <a:tc>
-                  <a:txBody>
-                    <a:bodyPr wrap="square">
-                      <a:noAutofit/>
-                    </a:bodyPr>
-                    <a:lstStyle/>
-                    <a:p>
-                      <a:pPr algn="r">
-                        <a:lnSpc>
-                          <a:spcPts val="2070"/>
-                        </a:lnSpc>
-                        <a:buNone/>
-                        <a:defRPr sz="1800" b="0">
-                          <a:solidFill>
-                            <a:srgbClr val="303437"/>
-                          </a:solidFill>
-                          <a:latin typeface="Noto Sans"/>
-                        </a:defRPr>
-                      </a:pPr>
-                      <a:r>
-                        <a:rPr sz="1800" b="0" lang="ja-JP" altLang="en-US">
-                          <a:solidFill>
-                            <a:srgbClr val="303437"/>
-                          </a:solidFill>
-                          <a:latin typeface="Noto Sans"/>
-                          <a:ea typeface="Noto Sans CJK JP"/>
-                          <a:cs typeface="Noto Sans"/>
-                        </a:rPr>
-                        <a:t>48.16</a:t>
-                      </a:r>
-                    </a:p>
-                  </a:txBody>
-                  <a:tcPr marL="63500" marR="63500" marT="38100" marB="38100" anchor="ctr">
-                    <a:lnL w="7620">
-                      <a:noFill/>
-                    </a:lnL>
-                    <a:lnR w="7620">
-                      <a:noFill/>
-                    </a:lnR>
-                    <a:lnT w="7620">
-                      <a:noFill/>
-                    </a:lnT>
-                    <a:lnB w="15240">
-                      <a:solidFill>
-                        <a:srgbClr val="626669"/>
-                      </a:solidFill>
-                      <a:prstDash val="solid"/>
-                    </a:lnB>
-                    <a:solidFill>
-                      <a:srgbClr val="FFFEF8"/>
-                    </a:solidFill>
-                  </a:tcPr>
-                </a:tc>
-                <a:tc>
-                  <a:txBody>
-                    <a:bodyPr wrap="square">
-                      <a:noAutofit/>
-                    </a:bodyPr>
-                    <a:lstStyle/>
-                    <a:p>
-                      <a:pPr algn="r">
-                        <a:lnSpc>
-                          <a:spcPts val="2070"/>
-                        </a:lnSpc>
-                        <a:buNone/>
-                        <a:defRPr sz="1800" b="0">
-                          <a:solidFill>
-                            <a:srgbClr val="303437"/>
-                          </a:solidFill>
-                          <a:latin typeface="Noto Sans"/>
-                        </a:defRPr>
-                      </a:pPr>
-                      <a:r>
-                        <a:rPr sz="1800" b="0" lang="ja-JP" altLang="en-US">
-                          <a:solidFill>
-                            <a:srgbClr val="303437"/>
-                          </a:solidFill>
-                          <a:latin typeface="Noto Sans"/>
-                          <a:ea typeface="Noto Sans CJK JP"/>
-                          <a:cs typeface="Noto Sans"/>
-                        </a:rPr>
-                        <a:t>7.96</a:t>
-                      </a:r>
-                    </a:p>
-                  </a:txBody>
-                  <a:tcPr marL="63500" marR="63500" marT="38100" marB="38100" anchor="ctr">
-                    <a:lnL w="7620">
-                      <a:noFill/>
-                    </a:lnL>
-                    <a:lnR w="7620">
-                      <a:noFill/>
-                    </a:lnR>
-                    <a:lnT w="7620">
-                      <a:noFill/>
-                    </a:lnT>
-                    <a:lnB w="15240">
-                      <a:solidFill>
-                        <a:srgbClr val="626669"/>
-                      </a:solidFill>
-                      <a:prstDash val="solid"/>
-                    </a:lnB>
-                    <a:solidFill>
-                      <a:srgbClr val="FFFEF8"/>
-                    </a:solidFill>
-                  </a:tcPr>
-                </a:tc>
-              </a:tr>
-            </a:tbl>
-          </a:graphicData>
-        </a:graphic>
-      </p:graphicFrame>
-      <p:sp>
-        <p:nvSpPr>
-          <p:cNvPr id="5" name="TextBox 4"/>
-          <p:cNvSpPr txBox="1"/>
-          <p:nvPr/>
-        </p:nvSpPr>
-        <p:spPr>
-          <a:xfrm>
-            <a:off x="594360" y="3392424"/>
-            <a:ext cx="7955279" cy="658368"/>
-          </a:xfrm>
-          <a:prstGeom prst="rect">
-            <a:avLst/>
-          </a:prstGeom>
-          <a:noFill/>
-        </p:spPr>
-        <p:txBody>
-          <a:bodyPr wrap="square" lIns="0" rIns="0" tIns="0" bIns="0">
-            <a:noAutofit/>
-          </a:bodyPr>
-          <a:lstStyle/>
-          <a:p>
-            <a:pPr algn="l">
-              <a:lnSpc>
-                <a:spcPts val="2047"/>
-              </a:lnSpc>
-              <a:spcBef>
-                <a:spcPts val="0"/>
-              </a:spcBef>
-              <a:spcAft>
-                <a:spcPts val="0"/>
-              </a:spcAft>
-              <a:buNone/>
-              <a:defRPr sz="1750" b="0">
-                <a:solidFill>
-                  <a:srgbClr val="303437"/>
-                </a:solidFill>
-                <a:latin typeface="Noto Sans"/>
-              </a:defRPr>
-            </a:pPr>
-            <a:r>
-              <a:rPr sz="1750" b="0" lang="ja-JP" altLang="en-US">
-                <a:solidFill>
-                  <a:srgbClr val="303437"/>
-                </a:solidFill>
-                <a:latin typeface="Noto Sans"/>
-                <a:ea typeface="Noto Sans CJK JP"/>
-                <a:cs typeface="Noto Sans"/>
-              </a:rPr>
-              <a:t>test 515例。text-davinci-003・OPTは3試行平均、Llama 2は1試行。Classic v0.4.0、元run suite v0.3.0。</a:t>
-            </a:r>
-          </a:p>
-        </p:txBody>
-      </p:sp>
-      <p:sp>
-        <p:nvSpPr>
-          <p:cNvPr id="6" name="sources"/>
-          <p:cNvSpPr txBox="1"/>
-          <p:nvPr/>
-        </p:nvSpPr>
-        <p:spPr>
-          <a:xfrm>
-            <a:off x="502920" y="4700016"/>
-            <a:ext cx="8183879" cy="530352"/>
-          </a:xfrm>
-          <a:prstGeom prst="rect">
-            <a:avLst/>
-          </a:prstGeom>
-          <a:noFill/>
-        </p:spPr>
-        <p:txBody>
-          <a:bodyPr wrap="square" lIns="0" rIns="0" tIns="0" bIns="0">
-            <a:noAutofit/>
-          </a:bodyPr>
-          <a:lstStyle/>
+              </a:rPr>
+              <a:t>[2] Stanford CRFM. SRNScenario — 自然言語の合成課題。</a:t>
+            </a:r>
+          </a:p>
           <a:p>
             <a:pPr algn="l">
               <a:lnSpc>
@@ -12555,247 +11358,9 @@
                 <a:latin typeface="Noto Sans"/>
                 <a:ea typeface="Noto Sans CJK JP"/>
                 <a:cs typeface="Noto Sans"/>
-              </a:rPr>
-              <a:t>[1] Liang et al. (2023). Holistic Evaluation of Language Models. TMLR.</a:t>
-            </a:r>
-            <a:r>
-              <a:rPr sz="810" b="0" lang="ja-JP" altLang="en-US">
-                <a:solidFill>
-                  <a:srgbClr val="626669"/>
-                </a:solidFill>
-                <a:latin typeface="Noto Sans"/>
-                <a:ea typeface="Noto Sans CJK JP"/>
-                <a:cs typeface="Noto Sans"/>
-              </a:rPr>
-              <a:t>  </a:t>
-            </a:r>
-            <a:r>
-              <a:rPr sz="810" b="0" lang="ja-JP" altLang="en-US">
-                <a:solidFill>
-                  <a:srgbClr val="626669"/>
-                </a:solidFill>
-                <a:latin typeface="Noto Sans"/>
-                <a:ea typeface="Noto Sans CJK JP"/>
-                <a:cs typeface="Noto Sans"/>
-                <a:hlinkClick r:id="rId2"/>
-              </a:rPr>
-              <a:t>https://arxiv.org/abs/2211.09110</a:t>
-            </a:r>
-          </a:p>
-        </p:txBody>
-      </p:sp>
-    </p:spTree>
-  </p:cSld>
-  <p:clrMapOvr>
-    <a:masterClrMapping/>
-  </p:clrMapOvr>
-</p:sld>
-</file>
-
-<file path=ppt/slides/slide2.xml><?xml version="1.0" encoding="utf-8"?>
-<p:sld xmlns:a="http://schemas.openxmlformats.org/drawingml/2006/main" xmlns:p="http://schemas.openxmlformats.org/presentationml/2006/main" xmlns:r="http://schemas.openxmlformats.org/officeDocument/2006/relationships">
-  <p:cSld>
-    <p:spTree>
-      <p:nvGrpSpPr>
-        <p:cNvPr id="1" name=""/>
-        <p:cNvGrpSpPr/>
-        <p:nvPr/>
-      </p:nvGrpSpPr>
-      <p:grpSpPr/>
-      <p:sp>
-        <p:nvSpPr>
-          <p:cNvPr id="2" name="Title 1"/>
-          <p:cNvSpPr>
-            <a:spLocks noGrp="1"/>
-          </p:cNvSpPr>
-          <p:nvPr>
-            <p:ph type="title"/>
-          </p:nvPr>
-        </p:nvSpPr>
-        <p:spPr>
-          <a:xfrm>
-            <a:off x="468172" y="650138"/>
-            <a:ext cx="8206740" cy="616305"/>
-          </a:xfrm>
-        </p:spPr>
-        <p:txBody>
-          <a:bodyPr wrap="square" lIns="0" rIns="0" tIns="0" bIns="0">
-            <a:noAutofit/>
-          </a:bodyPr>
-          <a:lstStyle/>
-          <a:p>
-            <a:pPr algn="l">
-              <a:lnSpc>
-                <a:spcPct val="110000"/>
-              </a:lnSpc>
-              <a:buNone/>
-              <a:defRPr sz="2800" b="0">
-                <a:solidFill>
-                  <a:srgbClr val="303437"/>
-                </a:solidFill>
-                <a:latin typeface="Noto Sans"/>
-              </a:defRPr>
-            </a:pPr>
-            <a:r>
-              <a:rPr sz="2800" b="1" lang="ja-JP" altLang="en-US">
-                <a:solidFill>
-                  <a:srgbClr val="303437"/>
-                </a:solidFill>
-                <a:latin typeface="Noto Sans"/>
-                <a:ea typeface="Noto Sans CJK JP"/>
-                <a:cs typeface="Noto Sans"/>
-              </a:rPr>
-              <a:t>公式リポジトリ（v0.4.0）</a:t>
-            </a:r>
-          </a:p>
-        </p:txBody>
-      </p:sp>
-      <p:sp>
-        <p:nvSpPr>
-          <p:cNvPr id="3" name="Title 2"/>
-          <p:cNvSpPr>
-            <a:spLocks noGrp="1"/>
-          </p:cNvSpPr>
-          <p:nvPr>
-            <p:ph type="title" idx="2"/>
-          </p:nvPr>
-        </p:nvSpPr>
-        <p:spPr>
-          <a:xfrm>
-            <a:off x="75895" y="0"/>
-            <a:ext cx="8115300" cy="480060"/>
-          </a:xfrm>
-        </p:spPr>
-        <p:txBody>
-          <a:bodyPr wrap="square" lIns="0" rIns="0" tIns="0" bIns="0" anchor="ctr">
-            <a:noAutofit/>
-          </a:bodyPr>
-          <a:lstStyle/>
-          <a:p>
-            <a:pPr algn="l">
-              <a:lnSpc>
-                <a:spcPct val="110000"/>
-              </a:lnSpc>
-              <a:buNone/>
-              <a:defRPr sz="1400" b="0">
-                <a:solidFill>
-                  <a:srgbClr val="303437"/>
-                </a:solidFill>
-                <a:latin typeface="Noto Sans"/>
-              </a:defRPr>
-            </a:pPr>
-            <a:r>
-              <a:rPr sz="1400" b="1" lang="ja-JP" altLang="en-US">
-                <a:solidFill>
-                  <a:srgbClr val="FFFEF8"/>
-                </a:solidFill>
-                <a:latin typeface="Noto Sans"/>
-                <a:ea typeface="Noto Sans CJK JP"/>
-                <a:cs typeface="Noto Sans"/>
-              </a:rPr>
-              <a:t>1. 記号列と自然言語の実例</a:t>
-            </a:r>
-          </a:p>
-        </p:txBody>
-      </p:sp>
-      <p:pic>
-        <p:nvPicPr>
-          <p:cNvPr id="4" name="Picture 3" descr="official-site.png"/>
-          <p:cNvPicPr>
-            <a:picLocks noChangeAspect="1"/>
-          </p:cNvPicPr>
-          <p:nvPr/>
-        </p:nvPicPr>
-        <p:blipFill>
-          <a:blip r:embed="rId2"/>
-          <a:srcRect b="11127"/>
-          <a:stretch>
-            <a:fillRect/>
-          </a:stretch>
-        </p:blipFill>
-        <p:spPr>
-          <a:xfrm>
-            <a:off x="640080" y="1371600"/>
-            <a:ext cx="7863840" cy="3154680"/>
-          </a:xfrm>
-          <a:prstGeom prst="rect">
-            <a:avLst/>
-          </a:prstGeom>
-        </p:spPr>
-      </p:pic>
-      <p:sp>
-        <p:nvSpPr>
-          <p:cNvPr id="5" name="sources"/>
-          <p:cNvSpPr txBox="1"/>
-          <p:nvPr/>
-        </p:nvSpPr>
-        <p:spPr>
-          <a:xfrm>
-            <a:off x="502920" y="4700016"/>
-            <a:ext cx="8183879" cy="530352"/>
-          </a:xfrm>
-          <a:prstGeom prst="rect">
-            <a:avLst/>
-          </a:prstGeom>
-          <a:noFill/>
-        </p:spPr>
-        <p:txBody>
-          <a:bodyPr wrap="square" lIns="0" rIns="0" tIns="0" bIns="0">
-            <a:noAutofit/>
-          </a:bodyPr>
-          <a:lstStyle/>
-          <a:p>
-            <a:pPr algn="l">
-              <a:lnSpc>
-                <a:spcPts val="940"/>
-              </a:lnSpc>
-              <a:spcBef>
-                <a:spcPts val="0"/>
-              </a:spcBef>
-              <a:spcAft>
-                <a:spcPts val="140"/>
-              </a:spcAft>
-              <a:buNone/>
-              <a:defRPr sz="810" b="0">
-                <a:solidFill>
-                  <a:srgbClr val="303437"/>
-                </a:solidFill>
-                <a:latin typeface="Noto Sans"/>
-              </a:defRPr>
-            </a:pPr>
-            <a:r>
-              <a:rPr sz="810" b="0" lang="ja-JP" altLang="en-US">
-                <a:solidFill>
-                  <a:srgbClr val="626669"/>
-                </a:solidFill>
-                <a:latin typeface="Noto Sans"/>
-                <a:ea typeface="Noto Sans CJK JP"/>
-                <a:cs typeface="Noto Sans"/>
-              </a:rPr>
-              <a:t>[1] Stanford CRFM. Holistic Evaluation of Language Models.</a:t>
-            </a:r>
-            <a:r>
-              <a:rPr sz="810" b="0" lang="ja-JP" altLang="en-US">
-                <a:solidFill>
-                  <a:srgbClr val="626669"/>
-                </a:solidFill>
-                <a:latin typeface="Noto Sans"/>
-                <a:ea typeface="Noto Sans CJK JP"/>
-                <a:cs typeface="Noto Sans"/>
-              </a:rPr>
-              <a:t>  </a:t>
-            </a:r>
-            <a:r>
-              <a:rPr sz="810" b="0" lang="ja-JP" altLang="en-US">
-                <a:solidFill>
-                  <a:srgbClr val="626669"/>
-                </a:solidFill>
-                <a:latin typeface="Noto Sans"/>
-                <a:ea typeface="Noto Sans CJK JP"/>
-                <a:cs typeface="Noto Sans"/>
-                <a:hlinkClick r:id="rId3"/>
-              </a:rPr>
-              <a:t>https://github.com/stanford-crfm/helm/tree/v0.4.0</a:t>
+                <a:hlinkClick r:id="rId4"/>
+              </a:rPr>
+              <a:t>https://github.com/stanford-crfm/helm/blob/v0.4.0/src/helm/benchmark/scenarios/synthetic_reasoning_natural_scenario.py</a:t>
             </a:r>
           </a:p>
         </p:txBody>
@@ -12861,7 +11426,7 @@
                 <a:ea typeface="Noto Sans CJK JP"/>
                 <a:cs typeface="Noto Sans"/>
               </a:rPr>
-              <a:t>抽象版：記号を含めた厳密一致率</a:t>
+              <a:t>抽象版：記号を含む文字列の一致率</a:t>
             </a:r>
           </a:p>
         </p:txBody>
@@ -12909,7 +11474,7 @@
                 <a:ea typeface="Noto Sans CJK JP"/>
                 <a:cs typeface="Noto Sans"/>
               </a:rPr>
-              <a:t>3. 採点方法とモデルの到達水準</a:t>
+              <a:t>3. 答えの形式と問題の特徴</a:t>
             </a:r>
           </a:p>
         </p:txBody>
@@ -13805,7 +12370,7 @@
         <p:spPr>
           <a:xfrm>
             <a:off x="594360" y="3392424"/>
-            <a:ext cx="7955279" cy="658368"/>
+            <a:ext cx="7955279" cy="914400"/>
           </a:xfrm>
           <a:prstGeom prst="rect">
             <a:avLst/>
@@ -13845,7 +12410,7 @@
                 <a:ea typeface="Noto Sans CJK JP"/>
                 <a:cs typeface="Noto Sans"/>
               </a:rPr>
-              <a:t>同じtest 515例。exact_matchは前後の空白だけを除く。OPTの置換は正規化後25.24%に対し、厳密一致では1.94%。</a:t>
+              <a:t>2023年公開の成績。各課題のtest 515問で、記号を含む文字列の一致を採点する。text-davinci-003・OPTは3試行、Llama 2は1試行。3モデルとも、置換より帰納で低い。</a:t>
             </a:r>
           </a:p>
         </p:txBody>
@@ -13858,8 +12423,8 @@
         </p:nvSpPr>
         <p:spPr>
           <a:xfrm>
-            <a:off x="502920" y="4700016"/>
-            <a:ext cx="8183879" cy="530352"/>
+            <a:off x="502920" y="4406900"/>
+            <a:ext cx="8183879" cy="723900"/>
           </a:xfrm>
           <a:prstGeom prst="rect">
             <a:avLst/>
@@ -13899,8 +12464,28 @@
                 <a:ea typeface="Noto Sans CJK JP"/>
                 <a:cs typeface="Noto Sans"/>
               </a:rPr>
-              <a:t>[1] Liang et al. (2023). Holistic Evaluation of Language Models. TMLR.</a:t>
-            </a:r>
+              <a:t>[1] Stanford CRFM (2023). 公開成績（2023年11月公開版）。</a:t>
+            </a:r>
+          </a:p>
+          <a:p>
+            <a:pPr algn="l">
+              <a:lnSpc>
+                <a:spcPts val="940"/>
+              </a:lnSpc>
+              <a:spcBef>
+                <a:spcPts val="0"/>
+              </a:spcBef>
+              <a:spcAft>
+                <a:spcPts val="140"/>
+              </a:spcAft>
+              <a:buNone/>
+              <a:defRPr sz="810" b="0">
+                <a:solidFill>
+                  <a:srgbClr val="303437"/>
+                </a:solidFill>
+                <a:latin typeface="Noto Sans"/>
+              </a:defRPr>
+            </a:pPr>
             <a:r>
               <a:rPr sz="810" b="0" lang="ja-JP" altLang="en-US">
                 <a:solidFill>
@@ -13909,324 +12494,9 @@
                 <a:latin typeface="Noto Sans"/>
                 <a:ea typeface="Noto Sans CJK JP"/>
                 <a:cs typeface="Noto Sans"/>
-              </a:rPr>
-              <a:t>  </a:t>
-            </a:r>
-            <a:r>
-              <a:rPr sz="810" b="0" lang="ja-JP" altLang="en-US">
-                <a:solidFill>
-                  <a:srgbClr val="626669"/>
-                </a:solidFill>
-                <a:latin typeface="Noto Sans"/>
-                <a:ea typeface="Noto Sans CJK JP"/>
-                <a:cs typeface="Noto Sans"/>
-                <a:hlinkClick r:id="rId2"/>
-              </a:rPr>
-              <a:t>https://arxiv.org/abs/2211.09110</a:t>
-            </a:r>
-          </a:p>
-        </p:txBody>
-      </p:sp>
-    </p:spTree>
-  </p:cSld>
-  <p:clrMapOvr>
-    <a:masterClrMapping/>
-  </p:clrMapOvr>
-</p:sld>
-</file>
-
-<file path=ppt/slides/slide21.xml><?xml version="1.0" encoding="utf-8"?>
-<p:sld xmlns:a="http://schemas.openxmlformats.org/drawingml/2006/main" xmlns:p="http://schemas.openxmlformats.org/presentationml/2006/main" xmlns:r="http://schemas.openxmlformats.org/officeDocument/2006/relationships">
-  <p:cSld>
-    <p:spTree>
-      <p:nvGrpSpPr>
-        <p:cNvPr id="1" name=""/>
-        <p:cNvGrpSpPr/>
-        <p:nvPr/>
-      </p:nvGrpSpPr>
-      <p:grpSpPr/>
-      <p:sp>
-        <p:nvSpPr>
-          <p:cNvPr id="2" name="Title 1"/>
-          <p:cNvSpPr>
-            <a:spLocks noGrp="1"/>
-          </p:cNvSpPr>
-          <p:nvPr>
-            <p:ph type="title"/>
-          </p:nvPr>
-        </p:nvSpPr>
-        <p:spPr>
-          <a:xfrm>
-            <a:off x="468172" y="650138"/>
-            <a:ext cx="8206740" cy="616305"/>
-          </a:xfrm>
-        </p:spPr>
-        <p:txBody>
-          <a:bodyPr wrap="square" lIns="0" rIns="0" tIns="0" bIns="0">
-            <a:noAutofit/>
-          </a:bodyPr>
-          <a:lstStyle/>
-          <a:p>
-            <a:pPr algn="l">
-              <a:lnSpc>
-                <a:spcPct val="110000"/>
-              </a:lnSpc>
-              <a:buNone/>
-              <a:defRPr sz="2800" b="0">
-                <a:solidFill>
-                  <a:srgbClr val="303437"/>
-                </a:solidFill>
-                <a:latin typeface="Noto Sans"/>
-              </a:defRPr>
-            </a:pPr>
-            <a:r>
-              <a:rPr sz="2800" b="1" lang="ja-JP" altLang="en-US">
-                <a:solidFill>
-                  <a:srgbClr val="303437"/>
-                </a:solidFill>
-                <a:latin typeface="Noto Sans"/>
-                <a:ea typeface="Noto Sans CJK JP"/>
-                <a:cs typeface="Noto Sans"/>
-              </a:rPr>
-              <a:t>自然言語版は、導いた属性の集合を採点する</a:t>
-            </a:r>
-          </a:p>
-        </p:txBody>
-      </p:sp>
-      <p:sp>
-        <p:nvSpPr>
-          <p:cNvPr id="3" name="Text Placeholder 2"/>
-          <p:cNvSpPr>
-            <a:spLocks noGrp="1"/>
-          </p:cNvSpPr>
-          <p:nvPr>
-            <p:ph type="body" idx="1"/>
-          </p:nvPr>
-        </p:nvSpPr>
-        <p:spPr>
-          <a:xfrm>
-            <a:off x="594360" y="1463040"/>
-            <a:ext cx="7955279" cy="3044952"/>
-          </a:xfrm>
-        </p:spPr>
-        <p:txBody>
-          <a:bodyPr wrap="square" tIns="91440" bIns="91440">
-            <a:noAutofit/>
-          </a:bodyPr>
-          <a:lstStyle/>
-          <a:p>
-            <a:pPr marL="457200" indent="-355600">
-              <a:lnSpc>
-                <a:spcPts val="2379"/>
-              </a:lnSpc>
-              <a:spcAft>
-                <a:spcPts val="700"/>
-              </a:spcAft>
-              <a:buSzPct val="66500"/>
-              <a:buFont typeface="Noto Sans CJK JP"/>
-              <a:buChar char="●"/>
-              <a:defRPr sz="2000" b="0">
-                <a:solidFill>
-                  <a:srgbClr val="303437"/>
-                </a:solidFill>
-                <a:latin typeface="Noto Sans"/>
-              </a:defRPr>
-            </a:pPr>
-            <a:r>
-              <a:rPr sz="2000" b="0" lang="ja-JP" altLang="en-US">
-                <a:solidFill>
-                  <a:srgbClr val="303437"/>
-                </a:solidFill>
-                <a:latin typeface="Noto Sans"/>
-                <a:ea typeface="Noto Sans CJK JP"/>
-                <a:cs typeface="Noto Sans"/>
-              </a:rPr>
-              <a:t>自然言語版の主指標は属性集合のF1。出力のisより後をandで分け、ピリオドを除いて集合にする。予測と正解で重なる属性数からF1を求める。</a:t>
-            </a:r>
-          </a:p>
-          <a:p>
-            <a:pPr marL="457200" indent="-355600">
-              <a:lnSpc>
-                <a:spcPts val="2379"/>
-              </a:lnSpc>
-              <a:spcAft>
-                <a:spcPts val="700"/>
-              </a:spcAft>
-              <a:buSzPct val="66500"/>
-              <a:buFont typeface="Noto Sans CJK JP"/>
-              <a:buChar char="●"/>
-              <a:defRPr sz="2000" b="0">
-                <a:solidFill>
-                  <a:srgbClr val="303437"/>
-                </a:solidFill>
-                <a:latin typeface="Noto Sans"/>
-              </a:defRPr>
-            </a:pPr>
-            <a:r>
-              <a:rPr sz="2000" b="0" lang="ja-JP" altLang="en-US">
-                <a:solidFill>
-                  <a:srgbClr val="303437"/>
-                </a:solidFill>
-                <a:latin typeface="Noto Sans"/>
-                <a:ea typeface="Noto Sans CJK JP"/>
-                <a:cs typeface="Noto Sans"/>
-              </a:rPr>
-              <a:t>正解が{red, happy}、予測が{red}なら、集合F1は2/3、積集合を和集合で割るIoUは1/2。集合が完全一致する割合も別に集計される。</a:t>
-            </a:r>
-          </a:p>
-          <a:p>
-            <a:pPr marL="457200" indent="-355600">
-              <a:lnSpc>
-                <a:spcPts val="2379"/>
-              </a:lnSpc>
-              <a:spcAft>
-                <a:spcPts val="0"/>
-              </a:spcAft>
-              <a:buSzPct val="66500"/>
-              <a:buFont typeface="Noto Sans CJK JP"/>
-              <a:buChar char="●"/>
-              <a:defRPr sz="2000" b="0">
-                <a:solidFill>
-                  <a:srgbClr val="303437"/>
-                </a:solidFill>
-                <a:latin typeface="Noto Sans"/>
-              </a:defRPr>
-            </a:pPr>
-            <a:r>
-              <a:rPr sz="2000" b="0" lang="ja-JP" altLang="en-US">
-                <a:solidFill>
-                  <a:srgbClr val="303437"/>
-                </a:solidFill>
-                <a:latin typeface="Noto Sans"/>
-                <a:ea typeface="Noto Sans CJK JP"/>
-                <a:cs typeface="Noto Sans"/>
-              </a:rPr>
-              <a:t>主語は属性集合へ含まれない。Nothing.は空集合として扱い、正解・予測がともに空なら1点。HELMの説明にはIoUも登場するが、v0.4.0の主指標はF1である。</a:t>
-            </a:r>
-          </a:p>
-        </p:txBody>
-      </p:sp>
-      <p:sp>
-        <p:nvSpPr>
-          <p:cNvPr id="4" name="Title 3"/>
-          <p:cNvSpPr>
-            <a:spLocks noGrp="1"/>
-          </p:cNvSpPr>
-          <p:nvPr>
-            <p:ph type="title" idx="2"/>
-          </p:nvPr>
-        </p:nvSpPr>
-        <p:spPr>
-          <a:xfrm>
-            <a:off x="75895" y="0"/>
-            <a:ext cx="8115300" cy="480060"/>
-          </a:xfrm>
-        </p:spPr>
-        <p:txBody>
-          <a:bodyPr wrap="square" lIns="0" rIns="0" tIns="0" bIns="0" anchor="ctr">
-            <a:noAutofit/>
-          </a:bodyPr>
-          <a:lstStyle/>
-          <a:p>
-            <a:pPr algn="l">
-              <a:lnSpc>
-                <a:spcPct val="110000"/>
-              </a:lnSpc>
-              <a:buNone/>
-              <a:defRPr sz="1400" b="0">
-                <a:solidFill>
-                  <a:srgbClr val="303437"/>
-                </a:solidFill>
-                <a:latin typeface="Noto Sans"/>
-              </a:defRPr>
-            </a:pPr>
-            <a:r>
-              <a:rPr sz="1400" b="1" lang="ja-JP" altLang="en-US">
-                <a:solidFill>
-                  <a:srgbClr val="FFFEF8"/>
-                </a:solidFill>
-                <a:latin typeface="Noto Sans"/>
-                <a:ea typeface="Noto Sans CJK JP"/>
-                <a:cs typeface="Noto Sans"/>
-              </a:rPr>
-              <a:t>3. 採点方法とモデルの到達水準</a:t>
-            </a:r>
-          </a:p>
-        </p:txBody>
-      </p:sp>
-      <p:sp>
-        <p:nvSpPr>
-          <p:cNvPr id="5" name="sources"/>
-          <p:cNvSpPr txBox="1"/>
-          <p:nvPr/>
-        </p:nvSpPr>
-        <p:spPr>
-          <a:xfrm>
-            <a:off x="502920" y="4700016"/>
-            <a:ext cx="8183879" cy="530352"/>
-          </a:xfrm>
-          <a:prstGeom prst="rect">
-            <a:avLst/>
-          </a:prstGeom>
-          <a:noFill/>
-        </p:spPr>
-        <p:txBody>
-          <a:bodyPr wrap="square" lIns="0" rIns="0" tIns="0" bIns="0">
-            <a:noAutofit/>
-          </a:bodyPr>
-          <a:lstStyle/>
-          <a:p>
-            <a:pPr algn="l">
-              <a:lnSpc>
-                <a:spcPts val="940"/>
-              </a:lnSpc>
-              <a:spcBef>
-                <a:spcPts val="0"/>
-              </a:spcBef>
-              <a:spcAft>
-                <a:spcPts val="140"/>
-              </a:spcAft>
-              <a:buNone/>
-              <a:defRPr sz="810" b="0">
-                <a:solidFill>
-                  <a:srgbClr val="303437"/>
-                </a:solidFill>
-                <a:latin typeface="Noto Sans"/>
-              </a:defRPr>
-            </a:pPr>
-            <a:r>
-              <a:rPr sz="810" b="0" lang="ja-JP" altLang="en-US">
-                <a:solidFill>
-                  <a:srgbClr val="626669"/>
-                </a:solidFill>
-                <a:latin typeface="Noto Sans"/>
-                <a:ea typeface="Noto Sans CJK JP"/>
-                <a:cs typeface="Noto Sans"/>
-              </a:rPr>
-              <a:t>[1] Stanford CRFM. BasicMetric, HELM v0.4.0.</a:t>
-            </a:r>
-            <a:r>
-              <a:rPr sz="810" b="0" lang="ja-JP" altLang="en-US">
-                <a:solidFill>
-                  <a:srgbClr val="626669"/>
-                </a:solidFill>
-                <a:latin typeface="Noto Sans"/>
-                <a:ea typeface="Noto Sans CJK JP"/>
-                <a:cs typeface="Noto Sans"/>
-              </a:rPr>
-              <a:t>  </a:t>
-            </a:r>
-            <a:r>
-              <a:rPr sz="810" b="0" lang="ja-JP" altLang="en-US">
-                <a:solidFill>
-                  <a:srgbClr val="626669"/>
-                </a:solidFill>
-                <a:latin typeface="Noto Sans"/>
-                <a:ea typeface="Noto Sans CJK JP"/>
-                <a:cs typeface="Noto Sans"/>
-                <a:hlinkClick r:id="rId2"/>
-              </a:rPr>
-              <a:t>https://github.com/stanford-crfm/helm/blob/v0.4.0/src/helm/benchmark/metrics/basic_metrics.py</a:t>
+                <a:hlinkClick r:id="rId3"/>
+              </a:rPr>
+              <a:t>https://storage.googleapis.com/crfm-helm-public/classic/benchmark_output/runs/v0.3.0/synthetic_reasoning%3Amode%3Dinduction%2Cmodel%3Dmeta_llama-2-70b/stats.json</a:t>
             </a:r>
           </a:p>
         </p:txBody>
@@ -14292,7 +12562,7 @@
                 <a:ea typeface="Noto Sans CJK JP"/>
                 <a:cs typeface="Noto Sans"/>
               </a:rPr>
-              <a:t>自然言語版：属性集合F1</a:t>
+              <a:t>自然言語版：導いた属性集合のF1</a:t>
             </a:r>
           </a:p>
         </p:txBody>
@@ -14340,7 +12610,7 @@
                 <a:ea typeface="Noto Sans CJK JP"/>
                 <a:cs typeface="Noto Sans"/>
               </a:rPr>
-              <a:t>3. 採点方法とモデルの到達水準</a:t>
+              <a:t>3. 答えの形式と問題の特徴</a:t>
             </a:r>
           </a:p>
         </p:txBody>
@@ -15023,7 +13293,7 @@
         <p:spPr>
           <a:xfrm>
             <a:off x="594360" y="3392424"/>
-            <a:ext cx="7955279" cy="658368"/>
+            <a:ext cx="7955279" cy="914400"/>
           </a:xfrm>
           <a:prstGeom prst="rect">
             <a:avLst/>
@@ -15063,7 +13333,7 @@
                 <a:ea typeface="Noto Sans CJK JP"/>
                 <a:cs typeface="Noto Sans"/>
               </a:rPr>
-              <a:t>test 515例の例ごとのF1を平均し、100倍して表示。text-davinci-003・OPTは3試行、Llama 2は1試行。</a:t>
+              <a:t>2023年公開の成績。各難度のtest 515問で、属性の過不足を測るF1を、各問で求め平均する。text-davinci-003・OPTは3試行、Llama 2は1試行。hardでは全モデルで低下する。</a:t>
             </a:r>
           </a:p>
         </p:txBody>
@@ -15076,8 +13346,8 @@
         </p:nvSpPr>
         <p:spPr>
           <a:xfrm>
-            <a:off x="502920" y="4700016"/>
-            <a:ext cx="8183879" cy="530352"/>
+            <a:off x="502920" y="4406900"/>
+            <a:ext cx="8183879" cy="723900"/>
           </a:xfrm>
           <a:prstGeom prst="rect">
             <a:avLst/>
@@ -15117,8 +13387,28 @@
                 <a:ea typeface="Noto Sans CJK JP"/>
                 <a:cs typeface="Noto Sans"/>
               </a:rPr>
-              <a:t>[1] Liang et al. (2023). Holistic Evaluation of Language Models. TMLR.</a:t>
-            </a:r>
+              <a:t>[1] Stanford CRFM (2023). 公開成績（2023年11月公開版）。</a:t>
+            </a:r>
+          </a:p>
+          <a:p>
+            <a:pPr algn="l">
+              <a:lnSpc>
+                <a:spcPts val="940"/>
+              </a:lnSpc>
+              <a:spcBef>
+                <a:spcPts val="0"/>
+              </a:spcBef>
+              <a:spcAft>
+                <a:spcPts val="140"/>
+              </a:spcAft>
+              <a:buNone/>
+              <a:defRPr sz="810" b="0">
+                <a:solidFill>
+                  <a:srgbClr val="303437"/>
+                </a:solidFill>
+                <a:latin typeface="Noto Sans"/>
+              </a:defRPr>
+            </a:pPr>
             <a:r>
               <a:rPr sz="810" b="0" lang="ja-JP" altLang="en-US">
                 <a:solidFill>
@@ -15127,1086 +13417,9 @@
                 <a:latin typeface="Noto Sans"/>
                 <a:ea typeface="Noto Sans CJK JP"/>
                 <a:cs typeface="Noto Sans"/>
-              </a:rPr>
-              <a:t>  </a:t>
-            </a:r>
-            <a:r>
-              <a:rPr sz="810" b="0" lang="ja-JP" altLang="en-US">
-                <a:solidFill>
-                  <a:srgbClr val="626669"/>
-                </a:solidFill>
-                <a:latin typeface="Noto Sans"/>
-                <a:ea typeface="Noto Sans CJK JP"/>
-                <a:cs typeface="Noto Sans"/>
-                <a:hlinkClick r:id="rId2"/>
-              </a:rPr>
-              <a:t>https://arxiv.org/abs/2211.09110</a:t>
-            </a:r>
-          </a:p>
-        </p:txBody>
-      </p:sp>
-    </p:spTree>
-  </p:cSld>
-  <p:clrMapOvr>
-    <a:masterClrMapping/>
-  </p:clrMapOvr>
-</p:sld>
-</file>
-
-<file path=ppt/slides/slide23.xml><?xml version="1.0" encoding="utf-8"?>
-<p:sld xmlns:a="http://schemas.openxmlformats.org/drawingml/2006/main" xmlns:p="http://schemas.openxmlformats.org/presentationml/2006/main" xmlns:r="http://schemas.openxmlformats.org/officeDocument/2006/relationships">
-  <p:cSld>
-    <p:spTree>
-      <p:nvGrpSpPr>
-        <p:cNvPr id="1" name=""/>
-        <p:cNvGrpSpPr/>
-        <p:nvPr/>
-      </p:nvGrpSpPr>
-      <p:grpSpPr/>
-      <p:sp>
-        <p:nvSpPr>
-          <p:cNvPr id="2" name="Title 1"/>
-          <p:cNvSpPr>
-            <a:spLocks noGrp="1"/>
-          </p:cNvSpPr>
-          <p:nvPr>
-            <p:ph type="title"/>
-          </p:nvPr>
-        </p:nvSpPr>
-        <p:spPr>
-          <a:xfrm>
-            <a:off x="468172" y="650138"/>
-            <a:ext cx="8206740" cy="616305"/>
-          </a:xfrm>
-        </p:spPr>
-        <p:txBody>
-          <a:bodyPr wrap="square" lIns="0" rIns="0" tIns="0" bIns="0">
-            <a:noAutofit/>
-          </a:bodyPr>
-          <a:lstStyle/>
-          <a:p>
-            <a:pPr algn="l">
-              <a:lnSpc>
-                <a:spcPct val="110000"/>
-              </a:lnSpc>
-              <a:buNone/>
-              <a:defRPr sz="2800" b="0">
-                <a:solidFill>
-                  <a:srgbClr val="303437"/>
-                </a:solidFill>
-                <a:latin typeface="Noto Sans"/>
-              </a:defRPr>
-            </a:pPr>
-            <a:r>
-              <a:rPr sz="2800" b="1" lang="ja-JP" altLang="en-US">
-                <a:solidFill>
-                  <a:srgbClr val="303437"/>
-                </a:solidFill>
-                <a:latin typeface="Noto Sans"/>
-                <a:ea typeface="Noto Sans CJK JP"/>
-                <a:cs typeface="Noto Sans"/>
-              </a:rPr>
-              <a:t>提示例と出力条件も、形式に合わせて変わる</a:t>
-            </a:r>
-          </a:p>
-        </p:txBody>
-      </p:sp>
-      <p:sp>
-        <p:nvSpPr>
-          <p:cNvPr id="3" name="Title 2"/>
-          <p:cNvSpPr>
-            <a:spLocks noGrp="1"/>
-          </p:cNvSpPr>
-          <p:nvPr>
-            <p:ph type="title" idx="2"/>
-          </p:nvPr>
-        </p:nvSpPr>
-        <p:spPr>
-          <a:xfrm>
-            <a:off x="75895" y="0"/>
-            <a:ext cx="8115300" cy="480060"/>
-          </a:xfrm>
-        </p:spPr>
-        <p:txBody>
-          <a:bodyPr wrap="square" lIns="0" rIns="0" tIns="0" bIns="0" anchor="ctr">
-            <a:noAutofit/>
-          </a:bodyPr>
-          <a:lstStyle/>
-          <a:p>
-            <a:pPr algn="l">
-              <a:lnSpc>
-                <a:spcPct val="110000"/>
-              </a:lnSpc>
-              <a:buNone/>
-              <a:defRPr sz="1400" b="0">
-                <a:solidFill>
-                  <a:srgbClr val="303437"/>
-                </a:solidFill>
-                <a:latin typeface="Noto Sans"/>
-              </a:defRPr>
-            </a:pPr>
-            <a:r>
-              <a:rPr sz="1400" b="1" lang="ja-JP" altLang="en-US">
-                <a:solidFill>
-                  <a:srgbClr val="FFFEF8"/>
-                </a:solidFill>
-                <a:latin typeface="Noto Sans"/>
-                <a:ea typeface="Noto Sans CJK JP"/>
-                <a:cs typeface="Noto Sans"/>
-              </a:rPr>
-              <a:t>3. 採点方法とモデルの到達水準</a:t>
-            </a:r>
-          </a:p>
-        </p:txBody>
-      </p:sp>
-      <p:graphicFrame>
-        <p:nvGraphicFramePr>
-          <p:cNvPr id="4" name="Table 3"/>
-          <p:cNvGraphicFramePr>
-            <a:graphicFrameLocks noGrp="1"/>
-          </p:cNvGraphicFramePr>
-          <p:nvPr/>
-        </p:nvGraphicFramePr>
-        <p:xfrm>
-          <a:off x="548640" y="1508760"/>
-          <a:ext cx="8046720" cy="2103120"/>
-        </p:xfrm>
-        <a:graphic>
-          <a:graphicData uri="http://schemas.openxmlformats.org/drawingml/2006/table">
-            <a:tbl>
-              <a:tblPr firstRow="0" bandRow="0"/>
-              <a:tblGrid>
-                <a:gridCol w="2743200"/>
-                <a:gridCol w="2651760"/>
-                <a:gridCol w="2651760"/>
-              </a:tblGrid>
-              <a:tr h="420624">
-                <a:tc>
-                  <a:txBody>
-                    <a:bodyPr wrap="square">
-                      <a:noAutofit/>
-                    </a:bodyPr>
-                    <a:lstStyle/>
-                    <a:p>
-                      <a:pPr algn="l">
-                        <a:lnSpc>
-                          <a:spcPts val="2185"/>
-                        </a:lnSpc>
-                        <a:buNone/>
-                        <a:defRPr sz="1900" b="0">
-                          <a:solidFill>
-                            <a:srgbClr val="303437"/>
-                          </a:solidFill>
-                          <a:latin typeface="Noto Sans"/>
-                        </a:defRPr>
-                      </a:pPr>
-                      <a:r>
-                        <a:rPr sz="1900" b="0" lang="ja-JP" altLang="en-US">
-                          <a:solidFill>
-                            <a:srgbClr val="303437"/>
-                          </a:solidFill>
-                          <a:latin typeface="Noto Sans"/>
-                          <a:ea typeface="Noto Sans CJK JP"/>
-                          <a:cs typeface="Noto Sans"/>
-                        </a:rPr>
-                        <a:t>条件</a:t>
-                      </a:r>
-                    </a:p>
-                  </a:txBody>
-                  <a:tcPr marL="63500" marR="63500" marT="38100" marB="38100" anchor="ctr">
-                    <a:lnL w="7620">
-                      <a:noFill/>
-                    </a:lnL>
-                    <a:lnR w="7620">
-                      <a:noFill/>
-                    </a:lnR>
-                    <a:lnT w="15240">
-                      <a:solidFill>
-                        <a:srgbClr val="626669"/>
-                      </a:solidFill>
-                      <a:prstDash val="solid"/>
-                    </a:lnT>
-                    <a:lnB w="7620">
-                      <a:solidFill>
-                        <a:srgbClr val="626669"/>
-                      </a:solidFill>
-                      <a:prstDash val="solid"/>
-                    </a:lnB>
-                    <a:solidFill>
-                      <a:srgbClr val="FFFEF8"/>
-                    </a:solidFill>
-                  </a:tcPr>
-                </a:tc>
-                <a:tc>
-                  <a:txBody>
-                    <a:bodyPr wrap="square">
-                      <a:noAutofit/>
-                    </a:bodyPr>
-                    <a:lstStyle/>
-                    <a:p>
-                      <a:pPr algn="l">
-                        <a:lnSpc>
-                          <a:spcPts val="2185"/>
-                        </a:lnSpc>
-                        <a:buNone/>
-                        <a:defRPr sz="1900" b="0">
-                          <a:solidFill>
-                            <a:srgbClr val="303437"/>
-                          </a:solidFill>
-                          <a:latin typeface="Noto Sans"/>
-                        </a:defRPr>
-                      </a:pPr>
-                      <a:r>
-                        <a:rPr sz="1900" b="0" lang="ja-JP" altLang="en-US">
-                          <a:solidFill>
-                            <a:srgbClr val="303437"/>
-                          </a:solidFill>
-                          <a:latin typeface="Noto Sans"/>
-                          <a:ea typeface="Noto Sans CJK JP"/>
-                          <a:cs typeface="Noto Sans"/>
-                        </a:rPr>
-                        <a:t>抽象版</a:t>
-                      </a:r>
-                    </a:p>
-                  </a:txBody>
-                  <a:tcPr marL="63500" marR="63500" marT="38100" marB="38100" anchor="ctr">
-                    <a:lnL w="7620">
-                      <a:noFill/>
-                    </a:lnL>
-                    <a:lnR w="7620">
-                      <a:noFill/>
-                    </a:lnR>
-                    <a:lnT w="15240">
-                      <a:solidFill>
-                        <a:srgbClr val="626669"/>
-                      </a:solidFill>
-                      <a:prstDash val="solid"/>
-                    </a:lnT>
-                    <a:lnB w="7620">
-                      <a:solidFill>
-                        <a:srgbClr val="626669"/>
-                      </a:solidFill>
-                      <a:prstDash val="solid"/>
-                    </a:lnB>
-                    <a:solidFill>
-                      <a:srgbClr val="FFFEF8"/>
-                    </a:solidFill>
-                  </a:tcPr>
-                </a:tc>
-                <a:tc>
-                  <a:txBody>
-                    <a:bodyPr wrap="square">
-                      <a:noAutofit/>
-                    </a:bodyPr>
-                    <a:lstStyle/>
-                    <a:p>
-                      <a:pPr algn="l">
-                        <a:lnSpc>
-                          <a:spcPts val="2185"/>
-                        </a:lnSpc>
-                        <a:buNone/>
-                        <a:defRPr sz="1900" b="0">
-                          <a:solidFill>
-                            <a:srgbClr val="303437"/>
-                          </a:solidFill>
-                          <a:latin typeface="Noto Sans"/>
-                        </a:defRPr>
-                      </a:pPr>
-                      <a:r>
-                        <a:rPr sz="1900" b="0" lang="ja-JP" altLang="en-US">
-                          <a:solidFill>
-                            <a:srgbClr val="303437"/>
-                          </a:solidFill>
-                          <a:latin typeface="Noto Sans"/>
-                          <a:ea typeface="Noto Sans CJK JP"/>
-                          <a:cs typeface="Noto Sans"/>
-                        </a:rPr>
-                        <a:t>自然言語版</a:t>
-                      </a:r>
-                    </a:p>
-                  </a:txBody>
-                  <a:tcPr marL="63500" marR="63500" marT="38100" marB="38100" anchor="ctr">
-                    <a:lnL w="7620">
-                      <a:noFill/>
-                    </a:lnL>
-                    <a:lnR w="7620">
-                      <a:noFill/>
-                    </a:lnR>
-                    <a:lnT w="15240">
-                      <a:solidFill>
-                        <a:srgbClr val="626669"/>
-                      </a:solidFill>
-                      <a:prstDash val="solid"/>
-                    </a:lnT>
-                    <a:lnB w="7620">
-                      <a:solidFill>
-                        <a:srgbClr val="626669"/>
-                      </a:solidFill>
-                      <a:prstDash val="solid"/>
-                    </a:lnB>
-                    <a:solidFill>
-                      <a:srgbClr val="FFFEF8"/>
-                    </a:solidFill>
-                  </a:tcPr>
-                </a:tc>
-              </a:tr>
-              <a:tr h="420624">
-                <a:tc>
-                  <a:txBody>
-                    <a:bodyPr wrap="square">
-                      <a:noAutofit/>
-                    </a:bodyPr>
-                    <a:lstStyle/>
-                    <a:p>
-                      <a:pPr algn="l">
-                        <a:lnSpc>
-                          <a:spcPts val="2185"/>
-                        </a:lnSpc>
-                        <a:buNone/>
-                        <a:defRPr sz="1900" b="0">
-                          <a:solidFill>
-                            <a:srgbClr val="303437"/>
-                          </a:solidFill>
-                          <a:latin typeface="Noto Sans"/>
-                        </a:defRPr>
-                      </a:pPr>
-                      <a:r>
-                        <a:rPr sz="1900" b="0" lang="ja-JP" altLang="en-US">
-                          <a:solidFill>
-                            <a:srgbClr val="303437"/>
-                          </a:solidFill>
-                          <a:latin typeface="Noto Sans"/>
-                          <a:ea typeface="Noto Sans CJK JP"/>
-                          <a:cs typeface="Noto Sans"/>
-                        </a:rPr>
-                        <a:t>提示例</a:t>
-                      </a:r>
-                    </a:p>
-                  </a:txBody>
-                  <a:tcPr marL="63500" marR="63500" marT="38100" marB="38100" anchor="ctr">
-                    <a:lnL w="7620">
-                      <a:noFill/>
-                    </a:lnL>
-                    <a:lnR w="7620">
-                      <a:noFill/>
-                    </a:lnR>
-                    <a:lnT w="7620">
-                      <a:solidFill>
-                        <a:srgbClr val="626669"/>
-                      </a:solidFill>
-                      <a:prstDash val="solid"/>
-                    </a:lnT>
-                    <a:lnB w="7620">
-                      <a:noFill/>
-                    </a:lnB>
-                    <a:solidFill>
-                      <a:srgbClr val="FFFEF8"/>
-                    </a:solidFill>
-                  </a:tcPr>
-                </a:tc>
-                <a:tc>
-                  <a:txBody>
-                    <a:bodyPr wrap="square">
-                      <a:noAutofit/>
-                    </a:bodyPr>
-                    <a:lstStyle/>
-                    <a:p>
-                      <a:pPr algn="l">
-                        <a:lnSpc>
-                          <a:spcPts val="2185"/>
-                        </a:lnSpc>
-                        <a:buNone/>
-                        <a:defRPr sz="1900" b="0">
-                          <a:solidFill>
-                            <a:srgbClr val="303437"/>
-                          </a:solidFill>
-                          <a:latin typeface="Noto Sans"/>
-                        </a:defRPr>
-                      </a:pPr>
-                      <a:r>
-                        <a:rPr sz="1900" b="0" lang="ja-JP" altLang="en-US">
-                          <a:solidFill>
-                            <a:srgbClr val="303437"/>
-                          </a:solidFill>
-                          <a:latin typeface="Noto Sans"/>
-                          <a:ea typeface="Noto Sans CJK JP"/>
-                          <a:cs typeface="Noto Sans"/>
-                        </a:rPr>
-                        <a:t>5例</a:t>
-                      </a:r>
-                    </a:p>
-                  </a:txBody>
-                  <a:tcPr marL="63500" marR="63500" marT="38100" marB="38100" anchor="ctr">
-                    <a:lnL w="7620">
-                      <a:noFill/>
-                    </a:lnL>
-                    <a:lnR w="7620">
-                      <a:noFill/>
-                    </a:lnR>
-                    <a:lnT w="7620">
-                      <a:solidFill>
-                        <a:srgbClr val="626669"/>
-                      </a:solidFill>
-                      <a:prstDash val="solid"/>
-                    </a:lnT>
-                    <a:lnB w="7620">
-                      <a:noFill/>
-                    </a:lnB>
-                    <a:solidFill>
-                      <a:srgbClr val="FFFEF8"/>
-                    </a:solidFill>
-                  </a:tcPr>
-                </a:tc>
-                <a:tc>
-                  <a:txBody>
-                    <a:bodyPr wrap="square">
-                      <a:noAutofit/>
-                    </a:bodyPr>
-                    <a:lstStyle/>
-                    <a:p>
-                      <a:pPr algn="l">
-                        <a:lnSpc>
-                          <a:spcPts val="2185"/>
-                        </a:lnSpc>
-                        <a:buNone/>
-                        <a:defRPr sz="1900" b="0">
-                          <a:solidFill>
-                            <a:srgbClr val="303437"/>
-                          </a:solidFill>
-                          <a:latin typeface="Noto Sans"/>
-                        </a:defRPr>
-                      </a:pPr>
-                      <a:r>
-                        <a:rPr sz="1900" b="0" lang="ja-JP" altLang="en-US">
-                          <a:solidFill>
-                            <a:srgbClr val="303437"/>
-                          </a:solidFill>
-                          <a:latin typeface="Noto Sans"/>
-                          <a:ea typeface="Noto Sans CJK JP"/>
-                          <a:cs typeface="Noto Sans"/>
-                        </a:rPr>
-                        <a:t>3例</a:t>
-                      </a:r>
-                    </a:p>
-                  </a:txBody>
-                  <a:tcPr marL="63500" marR="63500" marT="38100" marB="38100" anchor="ctr">
-                    <a:lnL w="7620">
-                      <a:noFill/>
-                    </a:lnL>
-                    <a:lnR w="7620">
-                      <a:noFill/>
-                    </a:lnR>
-                    <a:lnT w="7620">
-                      <a:solidFill>
-                        <a:srgbClr val="626669"/>
-                      </a:solidFill>
-                      <a:prstDash val="solid"/>
-                    </a:lnT>
-                    <a:lnB w="7620">
-                      <a:noFill/>
-                    </a:lnB>
-                    <a:solidFill>
-                      <a:srgbClr val="FFFEF8"/>
-                    </a:solidFill>
-                  </a:tcPr>
-                </a:tc>
-              </a:tr>
-              <a:tr h="420624">
-                <a:tc>
-                  <a:txBody>
-                    <a:bodyPr wrap="square">
-                      <a:noAutofit/>
-                    </a:bodyPr>
-                    <a:lstStyle/>
-                    <a:p>
-                      <a:pPr algn="l">
-                        <a:lnSpc>
-                          <a:spcPts val="2185"/>
-                        </a:lnSpc>
-                        <a:buNone/>
-                        <a:defRPr sz="1900" b="0">
-                          <a:solidFill>
-                            <a:srgbClr val="303437"/>
-                          </a:solidFill>
-                          <a:latin typeface="Noto Sans"/>
-                        </a:defRPr>
-                      </a:pPr>
-                      <a:r>
-                        <a:rPr sz="1900" b="0" lang="ja-JP" altLang="en-US">
-                          <a:solidFill>
-                            <a:srgbClr val="303437"/>
-                          </a:solidFill>
-                          <a:latin typeface="Noto Sans"/>
-                          <a:ea typeface="Noto Sans CJK JP"/>
-                          <a:cs typeface="Noto Sans"/>
-                        </a:rPr>
-                        <a:t>最大出力</a:t>
-                      </a:r>
-                    </a:p>
-                  </a:txBody>
-                  <a:tcPr marL="63500" marR="63500" marT="38100" marB="38100" anchor="ctr">
-                    <a:lnL w="7620">
-                      <a:noFill/>
-                    </a:lnL>
-                    <a:lnR w="7620">
-                      <a:noFill/>
-                    </a:lnR>
-                    <a:lnT w="7620">
-                      <a:noFill/>
-                    </a:lnT>
-                    <a:lnB w="7620">
-                      <a:noFill/>
-                    </a:lnB>
-                    <a:solidFill>
-                      <a:srgbClr val="FFFEF8"/>
-                    </a:solidFill>
-                  </a:tcPr>
-                </a:tc>
-                <a:tc>
-                  <a:txBody>
-                    <a:bodyPr wrap="square">
-                      <a:noAutofit/>
-                    </a:bodyPr>
-                    <a:lstStyle/>
-                    <a:p>
-                      <a:pPr algn="l">
-                        <a:lnSpc>
-                          <a:spcPts val="2185"/>
-                        </a:lnSpc>
-                        <a:buNone/>
-                        <a:defRPr sz="1900" b="0">
-                          <a:solidFill>
-                            <a:srgbClr val="303437"/>
-                          </a:solidFill>
-                          <a:latin typeface="Noto Sans"/>
-                        </a:defRPr>
-                      </a:pPr>
-                      <a:r>
-                        <a:rPr sz="1900" b="0" lang="ja-JP" altLang="en-US">
-                          <a:solidFill>
-                            <a:srgbClr val="303437"/>
-                          </a:solidFill>
-                          <a:latin typeface="Noto Sans"/>
-                          <a:ea typeface="Noto Sans CJK JP"/>
-                          <a:cs typeface="Noto Sans"/>
-                        </a:rPr>
-                        <a:t>50トークン</a:t>
-                      </a:r>
-                    </a:p>
-                  </a:txBody>
-                  <a:tcPr marL="63500" marR="63500" marT="38100" marB="38100" anchor="ctr">
-                    <a:lnL w="7620">
-                      <a:noFill/>
-                    </a:lnL>
-                    <a:lnR w="7620">
-                      <a:noFill/>
-                    </a:lnR>
-                    <a:lnT w="7620">
-                      <a:noFill/>
-                    </a:lnT>
-                    <a:lnB w="7620">
-                      <a:noFill/>
-                    </a:lnB>
-                    <a:solidFill>
-                      <a:srgbClr val="FFFEF8"/>
-                    </a:solidFill>
-                  </a:tcPr>
-                </a:tc>
-                <a:tc>
-                  <a:txBody>
-                    <a:bodyPr wrap="square">
-                      <a:noAutofit/>
-                    </a:bodyPr>
-                    <a:lstStyle/>
-                    <a:p>
-                      <a:pPr algn="l">
-                        <a:lnSpc>
-                          <a:spcPts val="2185"/>
-                        </a:lnSpc>
-                        <a:buNone/>
-                        <a:defRPr sz="1900" b="0">
-                          <a:solidFill>
-                            <a:srgbClr val="303437"/>
-                          </a:solidFill>
-                          <a:latin typeface="Noto Sans"/>
-                        </a:defRPr>
-                      </a:pPr>
-                      <a:r>
-                        <a:rPr sz="1900" b="0" lang="ja-JP" altLang="en-US">
-                          <a:solidFill>
-                            <a:srgbClr val="303437"/>
-                          </a:solidFill>
-                          <a:latin typeface="Noto Sans"/>
-                          <a:ea typeface="Noto Sans CJK JP"/>
-                          <a:cs typeface="Noto Sans"/>
-                        </a:rPr>
-                        <a:t>20トークン</a:t>
-                      </a:r>
-                    </a:p>
-                  </a:txBody>
-                  <a:tcPr marL="63500" marR="63500" marT="38100" marB="38100" anchor="ctr">
-                    <a:lnL w="7620">
-                      <a:noFill/>
-                    </a:lnL>
-                    <a:lnR w="7620">
-                      <a:noFill/>
-                    </a:lnR>
-                    <a:lnT w="7620">
-                      <a:noFill/>
-                    </a:lnT>
-                    <a:lnB w="7620">
-                      <a:noFill/>
-                    </a:lnB>
-                    <a:solidFill>
-                      <a:srgbClr val="FFFEF8"/>
-                    </a:solidFill>
-                  </a:tcPr>
-                </a:tc>
-              </a:tr>
-              <a:tr h="420624">
-                <a:tc>
-                  <a:txBody>
-                    <a:bodyPr wrap="square">
-                      <a:noAutofit/>
-                    </a:bodyPr>
-                    <a:lstStyle/>
-                    <a:p>
-                      <a:pPr algn="l">
-                        <a:lnSpc>
-                          <a:spcPts val="2185"/>
-                        </a:lnSpc>
-                        <a:buNone/>
-                        <a:defRPr sz="1900" b="0">
-                          <a:solidFill>
-                            <a:srgbClr val="303437"/>
-                          </a:solidFill>
-                          <a:latin typeface="Noto Sans"/>
-                        </a:defRPr>
-                      </a:pPr>
-                      <a:r>
-                        <a:rPr sz="1900" b="0" lang="ja-JP" altLang="en-US">
-                          <a:solidFill>
-                            <a:srgbClr val="303437"/>
-                          </a:solidFill>
-                          <a:latin typeface="Noto Sans"/>
-                          <a:ea typeface="Noto Sans CJK JP"/>
-                          <a:cs typeface="Noto Sans"/>
-                        </a:rPr>
-                        <a:t>候補数 / 温度</a:t>
-                      </a:r>
-                    </a:p>
-                  </a:txBody>
-                  <a:tcPr marL="63500" marR="63500" marT="38100" marB="38100" anchor="ctr">
-                    <a:lnL w="7620">
-                      <a:noFill/>
-                    </a:lnL>
-                    <a:lnR w="7620">
-                      <a:noFill/>
-                    </a:lnR>
-                    <a:lnT w="7620">
-                      <a:noFill/>
-                    </a:lnT>
-                    <a:lnB w="7620">
-                      <a:noFill/>
-                    </a:lnB>
-                    <a:solidFill>
-                      <a:srgbClr val="FFFEF8"/>
-                    </a:solidFill>
-                  </a:tcPr>
-                </a:tc>
-                <a:tc>
-                  <a:txBody>
-                    <a:bodyPr wrap="square">
-                      <a:noAutofit/>
-                    </a:bodyPr>
-                    <a:lstStyle/>
-                    <a:p>
-                      <a:pPr algn="l">
-                        <a:lnSpc>
-                          <a:spcPts val="2185"/>
-                        </a:lnSpc>
-                        <a:buNone/>
-                        <a:defRPr sz="1900" b="0">
-                          <a:solidFill>
-                            <a:srgbClr val="303437"/>
-                          </a:solidFill>
-                          <a:latin typeface="Noto Sans"/>
-                        </a:defRPr>
-                      </a:pPr>
-                      <a:r>
-                        <a:rPr sz="1900" b="0" lang="ja-JP" altLang="en-US">
-                          <a:solidFill>
-                            <a:srgbClr val="303437"/>
-                          </a:solidFill>
-                          <a:latin typeface="Noto Sans"/>
-                          <a:ea typeface="Noto Sans CJK JP"/>
-                          <a:cs typeface="Noto Sans"/>
-                        </a:rPr>
-                        <a:t>1候補 / 0</a:t>
-                      </a:r>
-                    </a:p>
-                  </a:txBody>
-                  <a:tcPr marL="63500" marR="63500" marT="38100" marB="38100" anchor="ctr">
-                    <a:lnL w="7620">
-                      <a:noFill/>
-                    </a:lnL>
-                    <a:lnR w="7620">
-                      <a:noFill/>
-                    </a:lnR>
-                    <a:lnT w="7620">
-                      <a:noFill/>
-                    </a:lnT>
-                    <a:lnB w="7620">
-                      <a:noFill/>
-                    </a:lnB>
-                    <a:solidFill>
-                      <a:srgbClr val="FFFEF8"/>
-                    </a:solidFill>
-                  </a:tcPr>
-                </a:tc>
-                <a:tc>
-                  <a:txBody>
-                    <a:bodyPr wrap="square">
-                      <a:noAutofit/>
-                    </a:bodyPr>
-                    <a:lstStyle/>
-                    <a:p>
-                      <a:pPr algn="l">
-                        <a:lnSpc>
-                          <a:spcPts val="2185"/>
-                        </a:lnSpc>
-                        <a:buNone/>
-                        <a:defRPr sz="1900" b="0">
-                          <a:solidFill>
-                            <a:srgbClr val="303437"/>
-                          </a:solidFill>
-                          <a:latin typeface="Noto Sans"/>
-                        </a:defRPr>
-                      </a:pPr>
-                      <a:r>
-                        <a:rPr sz="1900" b="0" lang="ja-JP" altLang="en-US">
-                          <a:solidFill>
-                            <a:srgbClr val="303437"/>
-                          </a:solidFill>
-                          <a:latin typeface="Noto Sans"/>
-                          <a:ea typeface="Noto Sans CJK JP"/>
-                          <a:cs typeface="Noto Sans"/>
-                        </a:rPr>
-                        <a:t>1候補 / 0</a:t>
-                      </a:r>
-                    </a:p>
-                  </a:txBody>
-                  <a:tcPr marL="63500" marR="63500" marT="38100" marB="38100" anchor="ctr">
-                    <a:lnL w="7620">
-                      <a:noFill/>
-                    </a:lnL>
-                    <a:lnR w="7620">
-                      <a:noFill/>
-                    </a:lnR>
-                    <a:lnT w="7620">
-                      <a:noFill/>
-                    </a:lnT>
-                    <a:lnB w="7620">
-                      <a:noFill/>
-                    </a:lnB>
-                    <a:solidFill>
-                      <a:srgbClr val="FFFEF8"/>
-                    </a:solidFill>
-                  </a:tcPr>
-                </a:tc>
-              </a:tr>
-              <a:tr h="420624">
-                <a:tc>
-                  <a:txBody>
-                    <a:bodyPr wrap="square">
-                      <a:noAutofit/>
-                    </a:bodyPr>
-                    <a:lstStyle/>
-                    <a:p>
-                      <a:pPr algn="l">
-                        <a:lnSpc>
-                          <a:spcPts val="2185"/>
-                        </a:lnSpc>
-                        <a:buNone/>
-                        <a:defRPr sz="1900" b="0">
-                          <a:solidFill>
-                            <a:srgbClr val="303437"/>
-                          </a:solidFill>
-                          <a:latin typeface="Noto Sans"/>
-                        </a:defRPr>
-                      </a:pPr>
-                      <a:r>
-                        <a:rPr sz="1900" b="0" lang="ja-JP" altLang="en-US">
-                          <a:solidFill>
-                            <a:srgbClr val="303437"/>
-                          </a:solidFill>
-                          <a:latin typeface="Noto Sans"/>
-                          <a:ea typeface="Noto Sans CJK JP"/>
-                          <a:cs typeface="Noto Sans"/>
-                        </a:rPr>
-                        <a:t>停止条件</a:t>
-                      </a:r>
-                    </a:p>
-                  </a:txBody>
-                  <a:tcPr marL="63500" marR="63500" marT="38100" marB="38100" anchor="ctr">
-                    <a:lnL w="7620">
-                      <a:noFill/>
-                    </a:lnL>
-                    <a:lnR w="7620">
-                      <a:noFill/>
-                    </a:lnR>
-                    <a:lnT w="7620">
-                      <a:noFill/>
-                    </a:lnT>
-                    <a:lnB w="15240">
-                      <a:solidFill>
-                        <a:srgbClr val="626669"/>
-                      </a:solidFill>
-                      <a:prstDash val="solid"/>
-                    </a:lnB>
-                    <a:solidFill>
-                      <a:srgbClr val="FFFEF8"/>
-                    </a:solidFill>
-                  </a:tcPr>
-                </a:tc>
-                <a:tc>
-                  <a:txBody>
-                    <a:bodyPr wrap="square">
-                      <a:noAutofit/>
-                    </a:bodyPr>
-                    <a:lstStyle/>
-                    <a:p>
-                      <a:pPr algn="l">
-                        <a:lnSpc>
-                          <a:spcPts val="2185"/>
-                        </a:lnSpc>
-                        <a:buNone/>
-                        <a:defRPr sz="1900" b="0">
-                          <a:solidFill>
-                            <a:srgbClr val="303437"/>
-                          </a:solidFill>
-                          <a:latin typeface="Noto Sans"/>
-                        </a:defRPr>
-                      </a:pPr>
-                      <a:r>
-                        <a:rPr sz="1900" b="0" lang="ja-JP" altLang="en-US">
-                          <a:solidFill>
-                            <a:srgbClr val="303437"/>
-                          </a:solidFill>
-                          <a:latin typeface="Noto Sans"/>
-                          <a:ea typeface="Noto Sans CJK JP"/>
-                          <a:cs typeface="Noto Sans"/>
-                        </a:rPr>
-                        <a:t>改行</a:t>
-                      </a:r>
-                    </a:p>
-                  </a:txBody>
-                  <a:tcPr marL="63500" marR="63500" marT="38100" marB="38100" anchor="ctr">
-                    <a:lnL w="7620">
-                      <a:noFill/>
-                    </a:lnL>
-                    <a:lnR w="7620">
-                      <a:noFill/>
-                    </a:lnR>
-                    <a:lnT w="7620">
-                      <a:noFill/>
-                    </a:lnT>
-                    <a:lnB w="15240">
-                      <a:solidFill>
-                        <a:srgbClr val="626669"/>
-                      </a:solidFill>
-                      <a:prstDash val="solid"/>
-                    </a:lnB>
-                    <a:solidFill>
-                      <a:srgbClr val="FFFEF8"/>
-                    </a:solidFill>
-                  </a:tcPr>
-                </a:tc>
-                <a:tc>
-                  <a:txBody>
-                    <a:bodyPr wrap="square">
-                      <a:noAutofit/>
-                    </a:bodyPr>
-                    <a:lstStyle/>
-                    <a:p>
-                      <a:pPr algn="l">
-                        <a:lnSpc>
-                          <a:spcPts val="2185"/>
-                        </a:lnSpc>
-                        <a:buNone/>
-                        <a:defRPr sz="1900" b="0">
-                          <a:solidFill>
-                            <a:srgbClr val="303437"/>
-                          </a:solidFill>
-                          <a:latin typeface="Noto Sans"/>
-                        </a:defRPr>
-                      </a:pPr>
-                      <a:r>
-                        <a:rPr sz="1900" b="0" lang="ja-JP" altLang="en-US">
-                          <a:solidFill>
-                            <a:srgbClr val="303437"/>
-                          </a:solidFill>
-                          <a:latin typeface="Noto Sans"/>
-                          <a:ea typeface="Noto Sans CJK JP"/>
-                          <a:cs typeface="Noto Sans"/>
-                        </a:rPr>
-                        <a:t>改行</a:t>
-                      </a:r>
-                    </a:p>
-                  </a:txBody>
-                  <a:tcPr marL="63500" marR="63500" marT="38100" marB="38100" anchor="ctr">
-                    <a:lnL w="7620">
-                      <a:noFill/>
-                    </a:lnL>
-                    <a:lnR w="7620">
-                      <a:noFill/>
-                    </a:lnR>
-                    <a:lnT w="7620">
-                      <a:noFill/>
-                    </a:lnT>
-                    <a:lnB w="15240">
-                      <a:solidFill>
-                        <a:srgbClr val="626669"/>
-                      </a:solidFill>
-                      <a:prstDash val="solid"/>
-                    </a:lnB>
-                    <a:solidFill>
-                      <a:srgbClr val="FFFEF8"/>
-                    </a:solidFill>
-                  </a:tcPr>
-                </a:tc>
-              </a:tr>
-            </a:tbl>
-          </a:graphicData>
-        </a:graphic>
-      </p:graphicFrame>
-      <p:sp>
-        <p:nvSpPr>
-          <p:cNvPr id="5" name="TextBox 4"/>
-          <p:cNvSpPr txBox="1"/>
-          <p:nvPr/>
-        </p:nvSpPr>
-        <p:spPr>
-          <a:xfrm>
-            <a:off x="594360" y="3813048"/>
-            <a:ext cx="7955279" cy="658368"/>
-          </a:xfrm>
-          <a:prstGeom prst="rect">
-            <a:avLst/>
-          </a:prstGeom>
-          <a:noFill/>
-        </p:spPr>
-        <p:txBody>
-          <a:bodyPr wrap="square" lIns="0" rIns="0" tIns="0" bIns="0">
-            <a:noAutofit/>
-          </a:bodyPr>
-          <a:lstStyle/>
-          <a:p>
-            <a:pPr algn="l">
-              <a:lnSpc>
-                <a:spcPts val="2047"/>
-              </a:lnSpc>
-              <a:spcBef>
-                <a:spcPts val="0"/>
-              </a:spcBef>
-              <a:spcAft>
-                <a:spcPts val="0"/>
-              </a:spcAft>
-              <a:buNone/>
-              <a:defRPr sz="1750" b="0">
-                <a:solidFill>
-                  <a:srgbClr val="303437"/>
-                </a:solidFill>
-                <a:latin typeface="Noto Sans"/>
-              </a:defRPr>
-            </a:pPr>
-            <a:r>
-              <a:rPr sz="1750" b="0" lang="ja-JP" altLang="en-US">
-                <a:solidFill>
-                  <a:srgbClr val="303437"/>
-                </a:solidFill>
-                <a:latin typeface="Noto Sans"/>
-                <a:ea typeface="Noto Sans CJK JP"/>
-                <a:cs typeface="Noto Sans"/>
-              </a:rPr>
-              <a:t>各試行は最大1,000例：valid 485 + test 515。比較した15実行は、実提示数5/3、prompt_truncated=0。</a:t>
-            </a:r>
-          </a:p>
-        </p:txBody>
-      </p:sp>
-      <p:sp>
-        <p:nvSpPr>
-          <p:cNvPr id="6" name="sources"/>
-          <p:cNvSpPr txBox="1"/>
-          <p:nvPr/>
-        </p:nvSpPr>
-        <p:spPr>
-          <a:xfrm>
-            <a:off x="502920" y="4700016"/>
-            <a:ext cx="8183879" cy="530352"/>
-          </a:xfrm>
-          <a:prstGeom prst="rect">
-            <a:avLst/>
-          </a:prstGeom>
-          <a:noFill/>
-        </p:spPr>
-        <p:txBody>
-          <a:bodyPr wrap="square" lIns="0" rIns="0" tIns="0" bIns="0">
-            <a:noAutofit/>
-          </a:bodyPr>
-          <a:lstStyle/>
-          <a:p>
-            <a:pPr algn="l">
-              <a:lnSpc>
-                <a:spcPts val="940"/>
-              </a:lnSpc>
-              <a:spcBef>
-                <a:spcPts val="0"/>
-              </a:spcBef>
-              <a:spcAft>
-                <a:spcPts val="140"/>
-              </a:spcAft>
-              <a:buNone/>
-              <a:defRPr sz="810" b="0">
-                <a:solidFill>
-                  <a:srgbClr val="303437"/>
-                </a:solidFill>
-                <a:latin typeface="Noto Sans"/>
-              </a:defRPr>
-            </a:pPr>
-            <a:r>
-              <a:rPr sz="810" b="0" lang="ja-JP" altLang="en-US">
-                <a:solidFill>
-                  <a:srgbClr val="626669"/>
-                </a:solidFill>
-                <a:latin typeface="Noto Sans"/>
-                <a:ea typeface="Noto Sans CJK JP"/>
-                <a:cs typeface="Noto Sans"/>
-              </a:rPr>
-              <a:t>[1] Stanford CRFM. HELM v0.4.0 公式生成器。</a:t>
-            </a:r>
-            <a:r>
-              <a:rPr sz="810" b="0" lang="ja-JP" altLang="en-US">
-                <a:solidFill>
-                  <a:srgbClr val="626669"/>
-                </a:solidFill>
-                <a:latin typeface="Noto Sans"/>
-                <a:ea typeface="Noto Sans CJK JP"/>
-                <a:cs typeface="Noto Sans"/>
-              </a:rPr>
-              <a:t>  </a:t>
-            </a:r>
-            <a:r>
-              <a:rPr sz="810" b="0" lang="ja-JP" altLang="en-US">
-                <a:solidFill>
-                  <a:srgbClr val="626669"/>
-                </a:solidFill>
-                <a:latin typeface="Noto Sans"/>
-                <a:ea typeface="Noto Sans CJK JP"/>
-                <a:cs typeface="Noto Sans"/>
-                <a:hlinkClick r:id="rId2"/>
-              </a:rPr>
-              <a:t>https://github.com/stanford-crfm/helm/tree/v0.4.0</a:t>
+                <a:hlinkClick r:id="rId3"/>
+              </a:rPr>
+              <a:t>https://storage.googleapis.com/crfm-helm-public/classic/benchmark_output/runs/v0.3.0/synthetic_reasoning_natural%3Adifficulty%3Dhard%2Cmodel%3Dmeta_llama-2-70b/stats.json</a:t>
             </a:r>
           </a:p>
         </p:txBody>
@@ -16272,7 +13485,7 @@
                 <a:ea typeface="Noto Sans CJK JP"/>
                 <a:cs typeface="Noto Sans"/>
               </a:rPr>
-              <a:t>規則の適用と、採点・生成の癖を分けて読む</a:t>
+              <a:t>候補の重複や、変数名も問題の特徴になる</a:t>
             </a:r>
           </a:p>
         </p:txBody>
@@ -16325,7 +13538,7 @@
                 <a:ea typeface="Noto Sans CJK JP"/>
                 <a:cs typeface="Noto Sans"/>
               </a:rPr>
-              <a:t>置換は高得点でも、規則の帰納では低い一致率が残る。帰納の参照正解は生成器が選んだ変数名で、名前を入れ替えた同値な規則を同一視しない。</a:t>
+              <a:t>帰納問題の参照正解は、生成器が付けた変数名を使う。同じ置換関係でも、変数名を入れ替えると表記が変わる。</a:t>
             </a:r>
           </a:p>
           <a:p>
@@ -16355,7 +13568,7 @@
                 <a:ea typeface="Noto Sans CJK JP"/>
                 <a:cs typeface="Noto Sans"/>
               </a:rPr>
-              <a:t>照合の妨害候補は、重複を除いた変数集合から作られる。正解列で変数が反復すると正解だけが長くなり、長さから候補を絞れる例が生まれる。</a:t>
+              <a:t>照合候補には、同じ規則列が重なることや、正解だけが長くなることがある。こうした生成方法から、推論以外の手掛かりが生まれる。</a:t>
             </a:r>
           </a:p>
           <a:p>
@@ -16385,7 +13598,7 @@
                 <a:ea typeface="Noto Sans CJK JP"/>
                 <a:cs typeface="Noto Sans"/>
               </a:rPr>
-              <a:t>自然言語版が測るのは、定義した語彙対応と1段の条件適用である。世界の事実を判断する課題や、長い証明の構築とは対象が異なる。</a:t>
+              <a:t>自然言語版は、定めた語彙対応と1段の条件適用を扱う。</a:t>
             </a:r>
           </a:p>
         </p:txBody>
@@ -16433,7 +13646,7 @@
                 <a:ea typeface="Noto Sans CJK JP"/>
                 <a:cs typeface="Noto Sans"/>
               </a:rPr>
-              <a:t>3. 採点方法とモデルの到達水準</a:t>
+              <a:t>3. 答えの形式と問題の特徴</a:t>
             </a:r>
           </a:p>
         </p:txBody>
@@ -16447,7 +13660,7 @@
         <p:spPr>
           <a:xfrm>
             <a:off x="502920" y="4517136"/>
-            <a:ext cx="8183879" cy="530352"/>
+            <a:ext cx="8183879" cy="621792"/>
           </a:xfrm>
           <a:prstGeom prst="rect">
             <a:avLst/>
@@ -16487,7 +13700,7 @@
                 <a:ea typeface="Noto Sans CJK JP"/>
                 <a:cs typeface="Noto Sans"/>
               </a:rPr>
-              <a:t>[1] Stanford CRFM. SyntheticReasoningScenario, HELM v0.4.0.</a:t>
+              <a:t>[1] Stanford CRFM. SyntheticReasoningScenario — 記号列の合成課題。</a:t>
             </a:r>
           </a:p>
           <a:p>
@@ -16541,7 +13754,7 @@
                 <a:ea typeface="Noto Sans CJK JP"/>
                 <a:cs typeface="Noto Sans"/>
               </a:rPr>
-              <a:t>[2] Stanford CRFM. SRNScenario, HELM v0.4.0.</a:t>
+              <a:t>[2] Stanford CRFM. SRNScenario — 自然言語の合成課題。</a:t>
             </a:r>
           </a:p>
           <a:p>
@@ -16633,7 +13846,7 @@
                 <a:ea typeface="Noto Sans CJK JP"/>
                 <a:cs typeface="Noto Sans"/>
               </a:rPr>
-              <a:t>4. 研究上の位置付けと再現方法</a:t>
+              <a:t>先行研究と公開生成器</a:t>
             </a:r>
           </a:p>
         </p:txBody>
@@ -16681,7 +13894,7 @@
                 <a:ea typeface="Noto Sans CJK JP"/>
                 <a:cs typeface="Noto Sans"/>
               </a:rPr>
-              <a:t>4. 研究上の位置付けと再現方法</a:t>
+              <a:t>4. 先行研究と公開生成器</a:t>
             </a:r>
           </a:p>
         </p:txBody>
@@ -16747,7 +13960,7 @@
                 <a:ea typeface="Noto Sans CJK JP"/>
                 <a:cs typeface="Noto Sans"/>
               </a:rPr>
-              <a:t>LIMEと自然言語の規則推論を、HELMへ取り込む</a:t>
+              <a:t>記号操作と、自然言語の規則推論を合成する</a:t>
             </a:r>
           </a:p>
         </p:txBody>
@@ -16800,7 +14013,7 @@
                 <a:ea typeface="Noto Sans CJK JP"/>
                 <a:cs typeface="Noto Sans"/>
               </a:rPr>
-              <a:t>LIME（2021）は、合成した演繹・帰納・仮説推論の課題で事前学習し、数学的推論に役立つ帰納バイアスを学ばせる研究である。HELMの抽象課題は、この基本操作の考え方に着想を得た。</a:t>
+              <a:t>LIME（2021）は、合成した演繹・帰納・仮説推論の課題で事前学習し、数学的推論に役立つ帰納バイアスを学ばせる研究。基本操作を合成する発想が、抽象版の出発点となった。</a:t>
             </a:r>
           </a:p>
           <a:p>
@@ -16830,37 +14043,7 @@
                 <a:ea typeface="Noto Sans CJK JP"/>
                 <a:cs typeface="Noto Sans"/>
               </a:rPr>
-              <a:t>Clarkら（2020）は、自然言語で書いた規則と事実から結論を導く研究を行った。HELMの自然言語版は、その考え方を簡単な語と文型で実装した。</a:t>
-            </a:r>
-          </a:p>
-          <a:p>
-            <a:pPr marL="457200" indent="-355600">
-              <a:lnSpc>
-                <a:spcPts val="2379"/>
-              </a:lnSpc>
-              <a:spcAft>
-                <a:spcPts val="0"/>
-              </a:spcAft>
-              <a:buSzPct val="66500"/>
-              <a:buFont typeface="Noto Sans CJK JP"/>
-              <a:buChar char="●"/>
-              <a:defRPr sz="2000" b="0">
-                <a:solidFill>
-                  <a:srgbClr val="303437"/>
-                </a:solidFill>
-                <a:latin typeface="Noto Sans"/>
-              </a:defRPr>
-            </a:pPr>
-            <a:r>
-              <a:rPr sz="2000" b="0" lang="ja-JP" altLang="en-US">
-                <a:solidFill>
-                  <a:srgbClr val="303437"/>
-                </a:solidFill>
-                <a:latin typeface="Noto Sans"/>
-                <a:ea typeface="Noto Sans CJK JP"/>
-                <a:cs typeface="Noto Sans"/>
-              </a:rPr>
-              <a:t>本資料はHELMの生成器と評価結果を扱う。LIMEの事前学習データや、先行研究の規則推論課題の全体とは範囲が異なる。</a:t>
+              <a:t>Clarkら（2020）は、自然言語で書いた規則と事実から結論を導く研究を行った。自然言語版は、その考え方を短い語彙と文型で実装した。</a:t>
             </a:r>
           </a:p>
         </p:txBody>
@@ -16908,7 +14091,7 @@
                 <a:ea typeface="Noto Sans CJK JP"/>
                 <a:cs typeface="Noto Sans"/>
               </a:rPr>
-              <a:t>4. 研究上の位置付けと再現方法</a:t>
+              <a:t>4. 先行研究と公開生成器</a:t>
             </a:r>
           </a:p>
         </p:txBody>
@@ -17102,7 +14285,7 @@
                 <a:ea typeface="Noto Sans CJK JP"/>
                 <a:cs typeface="Noto Sans"/>
               </a:rPr>
-              <a:t>バージョンとseedを固定し、課題別に再現する</a:t>
+              <a:t>公開生成器で、課題や難度を選ぶ</a:t>
             </a:r>
           </a:p>
         </p:txBody>
@@ -17155,7 +14338,7 @@
                 <a:ea typeface="Noto Sans CJK JP"/>
                 <a:cs typeface="Noto Sans"/>
               </a:rPr>
-              <a:t>公式配布元はStanford CRFMのHELMリポジトリ。抽象版はSyntheticReasoningScenario、自然言語版はSRNScenarioの実装を使う。</a:t>
+              <a:t>抽象版はSyntheticReasoningScenarioで、置換・照合・帰納のモードを選ぶ。自然言語版はSRNScenarioで、easyまたはhardを選べる。</a:t>
             </a:r>
           </a:p>
           <a:p>
@@ -17185,7 +14368,7 @@
                 <a:ea typeface="Noto Sans CJK JP"/>
                 <a:cs typeface="Noto Sans"/>
               </a:rPr>
-              <a:t>再現時にはタグv0.4.0、seed42、抽象版のmodeまたは自然言語版のdifficultyを指定する。生成順で分割が決まり、testの最初の例は全体index6000となる。</a:t>
+              <a:t>どちらも短い語彙表とテンプレートから、問題文と正解を生成する。コードはApache-2.0で公開されている。</a:t>
             </a:r>
           </a:p>
           <a:p>
@@ -17215,7 +14398,7 @@
                 <a:ea typeface="Noto Sans CJK JP"/>
                 <a:cs typeface="Noto Sans"/>
               </a:rPr>
-              <a:t>2026-10-18時点で公式実装とClassic v0.4.0の公開結果を取得した。コードはApache-2.0。短い語彙表とテンプレートから生成する。</a:t>
+              <a:t>乱数seedを変えると、同じ形式で異なる規則や事実を持つ問題を作れる。</a:t>
             </a:r>
           </a:p>
         </p:txBody>
@@ -17263,7 +14446,7 @@
                 <a:ea typeface="Noto Sans CJK JP"/>
                 <a:cs typeface="Noto Sans"/>
               </a:rPr>
-              <a:t>4. 研究上の位置付けと再現方法</a:t>
+              <a:t>4. 先行研究と公開生成器</a:t>
             </a:r>
           </a:p>
         </p:txBody>
@@ -17276,8 +14459,8 @@
         </p:nvSpPr>
         <p:spPr>
           <a:xfrm>
-            <a:off x="502920" y="4700016"/>
-            <a:ext cx="8183879" cy="530352"/>
+            <a:off x="502920" y="4517136"/>
+            <a:ext cx="8183879" cy="621792"/>
           </a:xfrm>
           <a:prstGeom prst="rect">
             <a:avLst/>
@@ -17317,8 +14500,28 @@
                 <a:ea typeface="Noto Sans CJK JP"/>
                 <a:cs typeface="Noto Sans"/>
               </a:rPr>
-              <a:t>[1] Stanford CRFM. HELM v0.4.0 公式生成器。</a:t>
-            </a:r>
+              <a:t>[1] Stanford CRFM. SyntheticReasoningScenario — 記号列の合成課題。</a:t>
+            </a:r>
+          </a:p>
+          <a:p>
+            <a:pPr algn="l">
+              <a:lnSpc>
+                <a:spcPts val="940"/>
+              </a:lnSpc>
+              <a:spcBef>
+                <a:spcPts val="0"/>
+              </a:spcBef>
+              <a:spcAft>
+                <a:spcPts val="140"/>
+              </a:spcAft>
+              <a:buNone/>
+              <a:defRPr sz="810" b="0">
+                <a:solidFill>
+                  <a:srgbClr val="303437"/>
+                </a:solidFill>
+                <a:latin typeface="Noto Sans"/>
+              </a:defRPr>
+            </a:pPr>
             <a:r>
               <a:rPr sz="810" b="0" lang="ja-JP" altLang="en-US">
                 <a:solidFill>
@@ -17327,9 +14530,30 @@
                 <a:latin typeface="Noto Sans"/>
                 <a:ea typeface="Noto Sans CJK JP"/>
                 <a:cs typeface="Noto Sans"/>
-              </a:rPr>
-              <a:t>  </a:t>
-            </a:r>
+                <a:hlinkClick r:id="rId3"/>
+              </a:rPr>
+              <a:t>https://github.com/stanford-crfm/helm/blob/v0.4.0/src/helm/benchmark/scenarios/synthetic_reasoning_scenario.py</a:t>
+            </a:r>
+          </a:p>
+          <a:p>
+            <a:pPr algn="l">
+              <a:lnSpc>
+                <a:spcPts val="940"/>
+              </a:lnSpc>
+              <a:spcBef>
+                <a:spcPts val="0"/>
+              </a:spcBef>
+              <a:spcAft>
+                <a:spcPts val="140"/>
+              </a:spcAft>
+              <a:buNone/>
+              <a:defRPr sz="810" b="0">
+                <a:solidFill>
+                  <a:srgbClr val="303437"/>
+                </a:solidFill>
+                <a:latin typeface="Noto Sans"/>
+              </a:defRPr>
+            </a:pPr>
             <a:r>
               <a:rPr sz="810" b="0" lang="ja-JP" altLang="en-US">
                 <a:solidFill>
@@ -17338,9 +14562,40 @@
                 <a:latin typeface="Noto Sans"/>
                 <a:ea typeface="Noto Sans CJK JP"/>
                 <a:cs typeface="Noto Sans"/>
-                <a:hlinkClick r:id="rId2"/>
-              </a:rPr>
-              <a:t>https://github.com/stanford-crfm/helm/tree/v0.4.0</a:t>
+              </a:rPr>
+              <a:t>[2] Stanford CRFM. SRNScenario — 自然言語の合成課題。</a:t>
+            </a:r>
+          </a:p>
+          <a:p>
+            <a:pPr algn="l">
+              <a:lnSpc>
+                <a:spcPts val="940"/>
+              </a:lnSpc>
+              <a:spcBef>
+                <a:spcPts val="0"/>
+              </a:spcBef>
+              <a:spcAft>
+                <a:spcPts val="140"/>
+              </a:spcAft>
+              <a:buNone/>
+              <a:defRPr sz="810" b="0">
+                <a:solidFill>
+                  <a:srgbClr val="303437"/>
+                </a:solidFill>
+                <a:latin typeface="Noto Sans"/>
+              </a:defRPr>
+            </a:pPr>
+            <a:r>
+              <a:rPr sz="810" b="0" lang="ja-JP" altLang="en-US">
+                <a:solidFill>
+                  <a:srgbClr val="626669"/>
+                </a:solidFill>
+                <a:latin typeface="Noto Sans"/>
+                <a:ea typeface="Noto Sans CJK JP"/>
+                <a:cs typeface="Noto Sans"/>
+                <a:hlinkClick r:id="rId4"/>
+              </a:rPr>
+              <a:t>https://github.com/stanford-crfm/helm/blob/v0.4.0/src/helm/benchmark/scenarios/synthetic_reasoning_natural_scenario.py</a:t>
             </a:r>
           </a:p>
         </p:txBody>
@@ -17406,7 +14661,7 @@
                 <a:ea typeface="Noto Sans CJK JP"/>
                 <a:cs typeface="Noto Sans"/>
               </a:rPr>
-              <a:t>何を推論し、何を一致と呼ぶかを対応させる</a:t>
+              <a:t>短い規則と事実で、推論の基本操作を試す</a:t>
             </a:r>
           </a:p>
         </p:txBody>
@@ -17459,7 +14714,7 @@
                 <a:ea typeface="Noto Sans CJK JP"/>
                 <a:cs typeface="Noto Sans"/>
               </a:rPr>
-              <a:t>Synthetic Reasoningは、短い記号列の照合・置換・帰納と、自然言語の1段の規則適用を、再生成可能な課題として用意する。</a:t>
+              <a:t>Synthetic Reasoningは、短い記号列の照合・置換・帰納と、自然言語の1段の規則適用を扱う。</a:t>
             </a:r>
           </a:p>
           <a:p>
@@ -17489,7 +14744,7 @@
                 <a:ea typeface="Noto Sans CJK JP"/>
                 <a:cs typeface="Noto Sans"/>
               </a:rPr>
-              <a:t>抽象版は文字列一致、自然言語版は属性集合の比較で採点する。正規化の有無、変数名、出力の主語をどう扱うかが、得点の意味を変える。</a:t>
+              <a:t>抽象版は規則や置換後の文字列、自然言語版は新たに導ける属性を答える。与えられる情報が変わると、必要な操作も変わる。</a:t>
             </a:r>
           </a:p>
           <a:p>
@@ -17519,7 +14774,7 @@
                 <a:ea typeface="Noto Sans CJK JP"/>
                 <a:cs typeface="Noto Sans"/>
               </a:rPr>
-              <a:t>生成器のバージョンとseedだけでなく、提示例数、出力上限、評価集合、試行数と指標を合わせることで、モデルの得意・不得意を具体的に比較できる。</a:t>
+              <a:t>語彙と文型が定められているため、形式や難度をそろえ、多数の問題で基本操作を調べられる。</a:t>
             </a:r>
           </a:p>
         </p:txBody>
@@ -17567,7 +14822,7 @@
                 <a:ea typeface="Noto Sans CJK JP"/>
                 <a:cs typeface="Noto Sans"/>
               </a:rPr>
-              <a:t>4. 研究上の位置付けと再現方法</a:t>
+              <a:t>4. 先行研究と公開生成器</a:t>
             </a:r>
           </a:p>
         </p:txBody>
@@ -17680,11 +14935,11 @@
         <p:spPr>
           <a:xfrm>
             <a:off x="548640" y="2484835"/>
-            <a:ext cx="8046720" cy="585216"/>
+            <a:ext cx="8046720" cy="686816"/>
           </a:xfrm>
         </p:spPr>
         <p:txBody>
-          <a:bodyPr wrap="square" lIns="0" rIns="0" tIns="0" bIns="0" anchor="ctr">
+          <a:bodyPr wrap="square" lIns="0" rIns="0" tIns="0" bIns="101600" anchor="ctr">
             <a:noAutofit/>
           </a:bodyPr>
           <a:lstStyle/>
@@ -17841,7 +15096,7 @@
         </p:nvSpPr>
         <p:spPr>
           <a:xfrm>
-            <a:off x="640080" y="1663901"/>
+            <a:off x="640080" y="1639771"/>
             <a:ext cx="7863840" cy="2362199"/>
           </a:xfrm>
         </p:spPr>
@@ -17907,7 +15162,7 @@
                 <a:ea typeface="Noto Sans CJK JP"/>
                 <a:cs typeface="Noto Sans"/>
               </a:rPr>
-              <a:t>生成器と固定seedの設計</a:t>
+              <a:t>生成方法と問題の構成</a:t>
             </a:r>
           </a:p>
           <a:p>
@@ -17937,7 +15192,7 @@
                 <a:ea typeface="Noto Sans CJK JP"/>
                 <a:cs typeface="Noto Sans"/>
               </a:rPr>
-              <a:t>採点方法とモデルの到達水準</a:t>
+              <a:t>答えの形式と問題の特徴</a:t>
             </a:r>
           </a:p>
           <a:p>
@@ -17967,7 +15222,7 @@
                 <a:ea typeface="Noto Sans CJK JP"/>
                 <a:cs typeface="Noto Sans"/>
               </a:rPr>
-              <a:t>研究上の位置付けと再現方法</a:t>
+              <a:t>先行研究と公開生成器</a:t>
             </a:r>
           </a:p>
         </p:txBody>
@@ -18098,7 +15353,7 @@
         </p:nvSpPr>
         <p:spPr>
           <a:xfrm>
-            <a:off x="640080" y="1972511"/>
+            <a:off x="640080" y="1948381"/>
             <a:ext cx="7863840" cy="1744980"/>
           </a:xfrm>
         </p:spPr>
@@ -18164,7 +15419,7 @@
                 <a:ea typeface="Noto Sans CJK JP"/>
                 <a:cs typeface="Noto Sans"/>
               </a:rPr>
-              <a:t>採点と生成の詳細</a:t>
+              <a:t>語彙と生成の補足</a:t>
             </a:r>
           </a:p>
           <a:p>
@@ -18194,7 +15449,7 @@
                 <a:ea typeface="Noto Sans CJK JP"/>
                 <a:cs typeface="Noto Sans"/>
               </a:rPr>
-              <a:t>制作・関連研究と参考文献</a:t>
+              <a:t>関連研究と参考文献</a:t>
             </a:r>
           </a:p>
         </p:txBody>
@@ -18410,7 +15665,7 @@
                 <a:ea typeface="Noto Sans CJK JP"/>
                 <a:cs typeface="Noto Sans"/>
               </a:rPr>
-              <a:t>公式生成器 / seed 42 / test index 1 / 問題全文</a:t>
+              <a:t>問題（全文）</a:t>
             </a:r>
           </a:p>
         </p:txBody>
@@ -18691,7 +15946,7 @@
         <p:spPr>
           <a:xfrm>
             <a:off x="502920" y="4700016"/>
-            <a:ext cx="8183879" cy="530352"/>
+            <a:ext cx="8183879" cy="621792"/>
           </a:xfrm>
           <a:prstGeom prst="rect">
             <a:avLst/>
@@ -18731,8 +15986,28 @@
                 <a:ea typeface="Noto Sans CJK JP"/>
                 <a:cs typeface="Noto Sans"/>
               </a:rPr>
-              <a:t>[1] Stanford CRFM. HELM v0.4.0 公式生成器。 変数置換 / index 6001</a:t>
-            </a:r>
+              <a:t>[1] Stanford CRFM. SyntheticReasoningScenario — 記号列の合成課題。</a:t>
+            </a:r>
+          </a:p>
+          <a:p>
+            <a:pPr algn="l">
+              <a:lnSpc>
+                <a:spcPts val="940"/>
+              </a:lnSpc>
+              <a:spcBef>
+                <a:spcPts val="0"/>
+              </a:spcBef>
+              <a:spcAft>
+                <a:spcPts val="140"/>
+              </a:spcAft>
+              <a:buNone/>
+              <a:defRPr sz="810" b="0">
+                <a:solidFill>
+                  <a:srgbClr val="303437"/>
+                </a:solidFill>
+                <a:latin typeface="Noto Sans"/>
+              </a:defRPr>
+            </a:pPr>
             <a:r>
               <a:rPr sz="810" b="0" lang="ja-JP" altLang="en-US">
                 <a:solidFill>
@@ -18741,20 +16016,9 @@
                 <a:latin typeface="Noto Sans"/>
                 <a:ea typeface="Noto Sans CJK JP"/>
                 <a:cs typeface="Noto Sans"/>
-              </a:rPr>
-              <a:t>  </a:t>
-            </a:r>
-            <a:r>
-              <a:rPr sz="810" b="0" lang="ja-JP" altLang="en-US">
-                <a:solidFill>
-                  <a:srgbClr val="626669"/>
-                </a:solidFill>
-                <a:latin typeface="Noto Sans"/>
-                <a:ea typeface="Noto Sans CJK JP"/>
-                <a:cs typeface="Noto Sans"/>
-                <a:hlinkClick r:id="rId2"/>
-              </a:rPr>
-              <a:t>https://github.com/stanford-crfm/helm/tree/v0.4.0</a:t>
+                <a:hlinkClick r:id="rId3"/>
+              </a:rPr>
+              <a:t>https://github.com/stanford-crfm/helm/blob/v0.4.0/src/helm/benchmark/scenarios/synthetic_reasoning_scenario.py</a:t>
             </a:r>
           </a:p>
         </p:txBody>
@@ -18922,7 +16186,7 @@
                 <a:ea typeface="Noto Sans CJK JP"/>
                 <a:cs typeface="Noto Sans"/>
               </a:rPr>
-              <a:t>公式生成器 / seed 42 / test index 2 / 問題全文</a:t>
+              <a:t>問題（全文）</a:t>
             </a:r>
           </a:p>
         </p:txBody>
@@ -19203,7 +16467,7 @@
         <p:spPr>
           <a:xfrm>
             <a:off x="502920" y="4700016"/>
-            <a:ext cx="8183879" cy="530352"/>
+            <a:ext cx="8183879" cy="621792"/>
           </a:xfrm>
           <a:prstGeom prst="rect">
             <a:avLst/>
@@ -19243,8 +16507,28 @@
                 <a:ea typeface="Noto Sans CJK JP"/>
                 <a:cs typeface="Noto Sans"/>
               </a:rPr>
-              <a:t>[1] Stanford CRFM. HELM v0.4.0 公式生成器。 変数置換 / index 6002</a:t>
-            </a:r>
+              <a:t>[1] Stanford CRFM. SyntheticReasoningScenario — 記号列の合成課題。</a:t>
+            </a:r>
+          </a:p>
+          <a:p>
+            <a:pPr algn="l">
+              <a:lnSpc>
+                <a:spcPts val="940"/>
+              </a:lnSpc>
+              <a:spcBef>
+                <a:spcPts val="0"/>
+              </a:spcBef>
+              <a:spcAft>
+                <a:spcPts val="140"/>
+              </a:spcAft>
+              <a:buNone/>
+              <a:defRPr sz="810" b="0">
+                <a:solidFill>
+                  <a:srgbClr val="303437"/>
+                </a:solidFill>
+                <a:latin typeface="Noto Sans"/>
+              </a:defRPr>
+            </a:pPr>
             <a:r>
               <a:rPr sz="810" b="0" lang="ja-JP" altLang="en-US">
                 <a:solidFill>
@@ -19253,20 +16537,9 @@
                 <a:latin typeface="Noto Sans"/>
                 <a:ea typeface="Noto Sans CJK JP"/>
                 <a:cs typeface="Noto Sans"/>
-              </a:rPr>
-              <a:t>  </a:t>
-            </a:r>
-            <a:r>
-              <a:rPr sz="810" b="0" lang="ja-JP" altLang="en-US">
-                <a:solidFill>
-                  <a:srgbClr val="626669"/>
-                </a:solidFill>
-                <a:latin typeface="Noto Sans"/>
-                <a:ea typeface="Noto Sans CJK JP"/>
-                <a:cs typeface="Noto Sans"/>
-                <a:hlinkClick r:id="rId2"/>
-              </a:rPr>
-              <a:t>https://github.com/stanford-crfm/helm/tree/v0.4.0</a:t>
+                <a:hlinkClick r:id="rId3"/>
+              </a:rPr>
+              <a:t>https://github.com/stanford-crfm/helm/blob/v0.4.0/src/helm/benchmark/scenarios/synthetic_reasoning_scenario.py</a:t>
             </a:r>
           </a:p>
         </p:txBody>
@@ -19434,7 +16707,7 @@
                 <a:ea typeface="Noto Sans CJK JP"/>
                 <a:cs typeface="Noto Sans"/>
               </a:rPr>
-              <a:t>公式生成器 / seed 42 / test index 1 / 問題全文</a:t>
+              <a:t>問題（全文）</a:t>
             </a:r>
           </a:p>
         </p:txBody>
@@ -19715,7 +16988,7 @@
         <p:spPr>
           <a:xfrm>
             <a:off x="502920" y="4700016"/>
-            <a:ext cx="8183879" cy="530352"/>
+            <a:ext cx="8183879" cy="621792"/>
           </a:xfrm>
           <a:prstGeom prst="rect">
             <a:avLst/>
@@ -19755,8 +17028,28 @@
                 <a:ea typeface="Noto Sans CJK JP"/>
                 <a:cs typeface="Noto Sans"/>
               </a:rPr>
-              <a:t>[1] Stanford CRFM. HELM v0.4.0 公式生成器。 規則の照合 / index 6001</a:t>
-            </a:r>
+              <a:t>[1] Stanford CRFM. SyntheticReasoningScenario — 記号列の合成課題。</a:t>
+            </a:r>
+          </a:p>
+          <a:p>
+            <a:pPr algn="l">
+              <a:lnSpc>
+                <a:spcPts val="940"/>
+              </a:lnSpc>
+              <a:spcBef>
+                <a:spcPts val="0"/>
+              </a:spcBef>
+              <a:spcAft>
+                <a:spcPts val="140"/>
+              </a:spcAft>
+              <a:buNone/>
+              <a:defRPr sz="810" b="0">
+                <a:solidFill>
+                  <a:srgbClr val="303437"/>
+                </a:solidFill>
+                <a:latin typeface="Noto Sans"/>
+              </a:defRPr>
+            </a:pPr>
             <a:r>
               <a:rPr sz="810" b="0" lang="ja-JP" altLang="en-US">
                 <a:solidFill>
@@ -19765,20 +17058,9 @@
                 <a:latin typeface="Noto Sans"/>
                 <a:ea typeface="Noto Sans CJK JP"/>
                 <a:cs typeface="Noto Sans"/>
-              </a:rPr>
-              <a:t>  </a:t>
-            </a:r>
-            <a:r>
-              <a:rPr sz="810" b="0" lang="ja-JP" altLang="en-US">
-                <a:solidFill>
-                  <a:srgbClr val="626669"/>
-                </a:solidFill>
-                <a:latin typeface="Noto Sans"/>
-                <a:ea typeface="Noto Sans CJK JP"/>
-                <a:cs typeface="Noto Sans"/>
-                <a:hlinkClick r:id="rId2"/>
-              </a:rPr>
-              <a:t>https://github.com/stanford-crfm/helm/tree/v0.4.0</a:t>
+                <a:hlinkClick r:id="rId3"/>
+              </a:rPr>
+              <a:t>https://github.com/stanford-crfm/helm/blob/v0.4.0/src/helm/benchmark/scenarios/synthetic_reasoning_scenario.py</a:t>
             </a:r>
           </a:p>
         </p:txBody>
@@ -19946,7 +17228,7 @@
                 <a:ea typeface="Noto Sans CJK JP"/>
                 <a:cs typeface="Noto Sans"/>
               </a:rPr>
-              <a:t>公式生成器 / seed 42 / test index 2 / 問題全文</a:t>
+              <a:t>問題（全文）</a:t>
             </a:r>
           </a:p>
         </p:txBody>
@@ -20227,7 +17509,7 @@
         <p:spPr>
           <a:xfrm>
             <a:off x="502920" y="4700016"/>
-            <a:ext cx="8183879" cy="530352"/>
+            <a:ext cx="8183879" cy="621792"/>
           </a:xfrm>
           <a:prstGeom prst="rect">
             <a:avLst/>
@@ -20267,8 +17549,28 @@
                 <a:ea typeface="Noto Sans CJK JP"/>
                 <a:cs typeface="Noto Sans"/>
               </a:rPr>
-              <a:t>[1] Stanford CRFM. HELM v0.4.0 公式生成器。 規則の照合 / index 6002</a:t>
-            </a:r>
+              <a:t>[1] Stanford CRFM. SyntheticReasoningScenario — 記号列の合成課題。</a:t>
+            </a:r>
+          </a:p>
+          <a:p>
+            <a:pPr algn="l">
+              <a:lnSpc>
+                <a:spcPts val="940"/>
+              </a:lnSpc>
+              <a:spcBef>
+                <a:spcPts val="0"/>
+              </a:spcBef>
+              <a:spcAft>
+                <a:spcPts val="140"/>
+              </a:spcAft>
+              <a:buNone/>
+              <a:defRPr sz="810" b="0">
+                <a:solidFill>
+                  <a:srgbClr val="303437"/>
+                </a:solidFill>
+                <a:latin typeface="Noto Sans"/>
+              </a:defRPr>
+            </a:pPr>
             <a:r>
               <a:rPr sz="810" b="0" lang="ja-JP" altLang="en-US">
                 <a:solidFill>
@@ -20277,20 +17579,9 @@
                 <a:latin typeface="Noto Sans"/>
                 <a:ea typeface="Noto Sans CJK JP"/>
                 <a:cs typeface="Noto Sans"/>
-              </a:rPr>
-              <a:t>  </a:t>
-            </a:r>
-            <a:r>
-              <a:rPr sz="810" b="0" lang="ja-JP" altLang="en-US">
-                <a:solidFill>
-                  <a:srgbClr val="626669"/>
-                </a:solidFill>
-                <a:latin typeface="Noto Sans"/>
-                <a:ea typeface="Noto Sans CJK JP"/>
-                <a:cs typeface="Noto Sans"/>
-                <a:hlinkClick r:id="rId2"/>
-              </a:rPr>
-              <a:t>https://github.com/stanford-crfm/helm/tree/v0.4.0</a:t>
+                <a:hlinkClick r:id="rId3"/>
+              </a:rPr>
+              <a:t>https://github.com/stanford-crfm/helm/blob/v0.4.0/src/helm/benchmark/scenarios/synthetic_reasoning_scenario.py</a:t>
             </a:r>
           </a:p>
         </p:txBody>
@@ -20458,7 +17749,7 @@
                 <a:ea typeface="Noto Sans CJK JP"/>
                 <a:cs typeface="Noto Sans"/>
               </a:rPr>
-              <a:t>公式生成器 / seed 42 / test index 0 / 問題全文</a:t>
+              <a:t>問題（全文）</a:t>
             </a:r>
           </a:p>
         </p:txBody>
@@ -20708,7 +17999,7 @@
         <p:spPr>
           <a:xfrm>
             <a:off x="502920" y="4700016"/>
-            <a:ext cx="8183879" cy="530352"/>
+            <a:ext cx="8183879" cy="621792"/>
           </a:xfrm>
           <a:prstGeom prst="rect">
             <a:avLst/>
@@ -20748,8 +18039,28 @@
                 <a:ea typeface="Noto Sans CJK JP"/>
                 <a:cs typeface="Noto Sans"/>
               </a:rPr>
-              <a:t>[1] Stanford CRFM. HELM v0.4.0 公式生成器。 規則の帰納 / index 6000</a:t>
-            </a:r>
+              <a:t>[1] Stanford CRFM. SyntheticReasoningScenario — 記号列の合成課題。</a:t>
+            </a:r>
+          </a:p>
+          <a:p>
+            <a:pPr algn="l">
+              <a:lnSpc>
+                <a:spcPts val="940"/>
+              </a:lnSpc>
+              <a:spcBef>
+                <a:spcPts val="0"/>
+              </a:spcBef>
+              <a:spcAft>
+                <a:spcPts val="140"/>
+              </a:spcAft>
+              <a:buNone/>
+              <a:defRPr sz="810" b="0">
+                <a:solidFill>
+                  <a:srgbClr val="303437"/>
+                </a:solidFill>
+                <a:latin typeface="Noto Sans"/>
+              </a:defRPr>
+            </a:pPr>
             <a:r>
               <a:rPr sz="810" b="0" lang="ja-JP" altLang="en-US">
                 <a:solidFill>
@@ -20758,20 +18069,9 @@
                 <a:latin typeface="Noto Sans"/>
                 <a:ea typeface="Noto Sans CJK JP"/>
                 <a:cs typeface="Noto Sans"/>
-              </a:rPr>
-              <a:t>  </a:t>
-            </a:r>
-            <a:r>
-              <a:rPr sz="810" b="0" lang="ja-JP" altLang="en-US">
-                <a:solidFill>
-                  <a:srgbClr val="626669"/>
-                </a:solidFill>
-                <a:latin typeface="Noto Sans"/>
-                <a:ea typeface="Noto Sans CJK JP"/>
-                <a:cs typeface="Noto Sans"/>
-                <a:hlinkClick r:id="rId2"/>
-              </a:rPr>
-              <a:t>https://github.com/stanford-crfm/helm/tree/v0.4.0</a:t>
+                <a:hlinkClick r:id="rId3"/>
+              </a:rPr>
+              <a:t>https://github.com/stanford-crfm/helm/blob/v0.4.0/src/helm/benchmark/scenarios/synthetic_reasoning_scenario.py</a:t>
             </a:r>
           </a:p>
         </p:txBody>
@@ -20939,7 +18239,7 @@
                 <a:ea typeface="Noto Sans CJK JP"/>
                 <a:cs typeface="Noto Sans"/>
               </a:rPr>
-              <a:t>公式生成器 / seed 42 / test index 1 / 問題全文</a:t>
+              <a:t>問題（全文）</a:t>
             </a:r>
           </a:p>
         </p:txBody>
@@ -21189,7 +18489,7 @@
         <p:spPr>
           <a:xfrm>
             <a:off x="502920" y="4700016"/>
-            <a:ext cx="8183879" cy="530352"/>
+            <a:ext cx="8183879" cy="621792"/>
           </a:xfrm>
           <a:prstGeom prst="rect">
             <a:avLst/>
@@ -21229,8 +18529,28 @@
                 <a:ea typeface="Noto Sans CJK JP"/>
                 <a:cs typeface="Noto Sans"/>
               </a:rPr>
-              <a:t>[1] Stanford CRFM. HELM v0.4.0 公式生成器。 規則の帰納 / index 6001</a:t>
-            </a:r>
+              <a:t>[1] Stanford CRFM. SyntheticReasoningScenario — 記号列の合成課題。</a:t>
+            </a:r>
+          </a:p>
+          <a:p>
+            <a:pPr algn="l">
+              <a:lnSpc>
+                <a:spcPts val="940"/>
+              </a:lnSpc>
+              <a:spcBef>
+                <a:spcPts val="0"/>
+              </a:spcBef>
+              <a:spcAft>
+                <a:spcPts val="140"/>
+              </a:spcAft>
+              <a:buNone/>
+              <a:defRPr sz="810" b="0">
+                <a:solidFill>
+                  <a:srgbClr val="303437"/>
+                </a:solidFill>
+                <a:latin typeface="Noto Sans"/>
+              </a:defRPr>
+            </a:pPr>
             <a:r>
               <a:rPr sz="810" b="0" lang="ja-JP" altLang="en-US">
                 <a:solidFill>
@@ -21239,20 +18559,9 @@
                 <a:latin typeface="Noto Sans"/>
                 <a:ea typeface="Noto Sans CJK JP"/>
                 <a:cs typeface="Noto Sans"/>
-              </a:rPr>
-              <a:t>  </a:t>
-            </a:r>
-            <a:r>
-              <a:rPr sz="810" b="0" lang="ja-JP" altLang="en-US">
-                <a:solidFill>
-                  <a:srgbClr val="626669"/>
-                </a:solidFill>
-                <a:latin typeface="Noto Sans"/>
-                <a:ea typeface="Noto Sans CJK JP"/>
-                <a:cs typeface="Noto Sans"/>
-                <a:hlinkClick r:id="rId2"/>
-              </a:rPr>
-              <a:t>https://github.com/stanford-crfm/helm/tree/v0.4.0</a:t>
+                <a:hlinkClick r:id="rId3"/>
+              </a:rPr>
+              <a:t>https://github.com/stanford-crfm/helm/blob/v0.4.0/src/helm/benchmark/scenarios/synthetic_reasoning_scenario.py</a:t>
             </a:r>
           </a:p>
         </p:txBody>
@@ -21420,7 +18729,7 @@
                 <a:ea typeface="Noto Sans CJK JP"/>
                 <a:cs typeface="Noto Sans"/>
               </a:rPr>
-              <a:t>公式生成器 / seed 42 / test index 0 / 問題全文</a:t>
+              <a:t>問題（全文）</a:t>
             </a:r>
           </a:p>
         </p:txBody>
@@ -21779,7 +19088,7 @@
         <p:spPr>
           <a:xfrm>
             <a:off x="502920" y="4700016"/>
-            <a:ext cx="8183879" cy="530352"/>
+            <a:ext cx="8183879" cy="621792"/>
           </a:xfrm>
           <a:prstGeom prst="rect">
             <a:avLst/>
@@ -21819,8 +19128,28 @@
                 <a:ea typeface="Noto Sans CJK JP"/>
                 <a:cs typeface="Noto Sans"/>
               </a:rPr>
-              <a:t>[1] Stanford CRFM. HELM v0.4.0 公式生成器。 自然言語・easy / index 6000</a:t>
-            </a:r>
+              <a:t>[1] Stanford CRFM. SRNScenario — 自然言語の合成課題。</a:t>
+            </a:r>
+          </a:p>
+          <a:p>
+            <a:pPr algn="l">
+              <a:lnSpc>
+                <a:spcPts val="940"/>
+              </a:lnSpc>
+              <a:spcBef>
+                <a:spcPts val="0"/>
+              </a:spcBef>
+              <a:spcAft>
+                <a:spcPts val="140"/>
+              </a:spcAft>
+              <a:buNone/>
+              <a:defRPr sz="810" b="0">
+                <a:solidFill>
+                  <a:srgbClr val="303437"/>
+                </a:solidFill>
+                <a:latin typeface="Noto Sans"/>
+              </a:defRPr>
+            </a:pPr>
             <a:r>
               <a:rPr sz="810" b="0" lang="ja-JP" altLang="en-US">
                 <a:solidFill>
@@ -21829,20 +19158,9 @@
                 <a:latin typeface="Noto Sans"/>
                 <a:ea typeface="Noto Sans CJK JP"/>
                 <a:cs typeface="Noto Sans"/>
-              </a:rPr>
-              <a:t>  </a:t>
-            </a:r>
-            <a:r>
-              <a:rPr sz="810" b="0" lang="ja-JP" altLang="en-US">
-                <a:solidFill>
-                  <a:srgbClr val="626669"/>
-                </a:solidFill>
-                <a:latin typeface="Noto Sans"/>
-                <a:ea typeface="Noto Sans CJK JP"/>
-                <a:cs typeface="Noto Sans"/>
-                <a:hlinkClick r:id="rId2"/>
-              </a:rPr>
-              <a:t>https://github.com/stanford-crfm/helm/tree/v0.4.0</a:t>
+                <a:hlinkClick r:id="rId3"/>
+              </a:rPr>
+              <a:t>https://github.com/stanford-crfm/helm/blob/v0.4.0/src/helm/benchmark/scenarios/synthetic_reasoning_natural_scenario.py</a:t>
             </a:r>
           </a:p>
         </p:txBody>
@@ -22010,7 +19328,7 @@
                 <a:ea typeface="Noto Sans CJK JP"/>
                 <a:cs typeface="Noto Sans"/>
               </a:rPr>
-              <a:t>問題全文の日本語訳 / 同じseed・index</a:t>
+              <a:t>問題（全文）の日本語訳</a:t>
             </a:r>
           </a:p>
         </p:txBody>
@@ -22146,7 +19464,7 @@
                 <a:ea typeface="Noto Sans CJK JP"/>
                 <a:cs typeface="Noto Sans"/>
               </a:rPr>
-              <a:t>タンポポが大きく、かつ柔らかいなら、そのタンポポは退屈。</a:t>
+              <a:t>タンポポが大きく、かつ柔らかいなら、そのタンポポは退屈なものだ。</a:t>
             </a:r>
           </a:p>
           <a:p>
@@ -22270,7 +19588,7 @@
                 <a:ea typeface="Noto Sans CJK JP"/>
                 <a:cs typeface="Noto Sans"/>
               </a:rPr>
-              <a:t>そのタンポポは紫色で、退屈。</a:t>
+              <a:t>そのタンポポは紫色で、退屈なものだ。</a:t>
             </a:r>
           </a:p>
           <a:p>
@@ -22369,7 +19687,7 @@
         <p:spPr>
           <a:xfrm>
             <a:off x="502920" y="4700016"/>
-            <a:ext cx="8183879" cy="530352"/>
+            <a:ext cx="8183879" cy="621792"/>
           </a:xfrm>
           <a:prstGeom prst="rect">
             <a:avLst/>
@@ -22409,8 +19727,28 @@
                 <a:ea typeface="Noto Sans CJK JP"/>
                 <a:cs typeface="Noto Sans"/>
               </a:rPr>
-              <a:t>[1] Stanford CRFM. HELM v0.4.0 公式生成器。 自然言語・easy / index 6000</a:t>
-            </a:r>
+              <a:t>[1] Stanford CRFM. SRNScenario — 自然言語の合成課題。</a:t>
+            </a:r>
+          </a:p>
+          <a:p>
+            <a:pPr algn="l">
+              <a:lnSpc>
+                <a:spcPts val="940"/>
+              </a:lnSpc>
+              <a:spcBef>
+                <a:spcPts val="0"/>
+              </a:spcBef>
+              <a:spcAft>
+                <a:spcPts val="140"/>
+              </a:spcAft>
+              <a:buNone/>
+              <a:defRPr sz="810" b="0">
+                <a:solidFill>
+                  <a:srgbClr val="303437"/>
+                </a:solidFill>
+                <a:latin typeface="Noto Sans"/>
+              </a:defRPr>
+            </a:pPr>
             <a:r>
               <a:rPr sz="810" b="0" lang="ja-JP" altLang="en-US">
                 <a:solidFill>
@@ -22419,20 +19757,9 @@
                 <a:latin typeface="Noto Sans"/>
                 <a:ea typeface="Noto Sans CJK JP"/>
                 <a:cs typeface="Noto Sans"/>
-              </a:rPr>
-              <a:t>  </a:t>
-            </a:r>
-            <a:r>
-              <a:rPr sz="810" b="0" lang="ja-JP" altLang="en-US">
-                <a:solidFill>
-                  <a:srgbClr val="626669"/>
-                </a:solidFill>
-                <a:latin typeface="Noto Sans"/>
-                <a:ea typeface="Noto Sans CJK JP"/>
-                <a:cs typeface="Noto Sans"/>
-                <a:hlinkClick r:id="rId2"/>
-              </a:rPr>
-              <a:t>https://github.com/stanford-crfm/helm/tree/v0.4.0</a:t>
+                <a:hlinkClick r:id="rId3"/>
+              </a:rPr>
+              <a:t>https://github.com/stanford-crfm/helm/blob/v0.4.0/src/helm/benchmark/scenarios/synthetic_reasoning_natural_scenario.py</a:t>
             </a:r>
           </a:p>
         </p:txBody>
@@ -22600,7 +19927,7 @@
                 <a:ea typeface="Noto Sans CJK JP"/>
                 <a:cs typeface="Noto Sans"/>
               </a:rPr>
-              <a:t>公式生成器 / seed 42 / test index 1 / 問題全文・日本語訳</a:t>
+              <a:t>問題（全文）と日本語訳</a:t>
             </a:r>
           </a:p>
         </p:txBody>
@@ -23304,7 +20631,7 @@
         <p:spPr>
           <a:xfrm>
             <a:off x="502920" y="4818888"/>
-            <a:ext cx="8183879" cy="530352"/>
+            <a:ext cx="8183879" cy="621792"/>
           </a:xfrm>
           <a:prstGeom prst="rect">
             <a:avLst/>
@@ -23344,8 +20671,28 @@
                 <a:ea typeface="Noto Sans CJK JP"/>
                 <a:cs typeface="Noto Sans"/>
               </a:rPr>
-              <a:t>[1] Stanford CRFM. HELM v0.4.0 公式生成器。 自然言語・easy / index 6001</a:t>
-            </a:r>
+              <a:t>[1] Stanford CRFM. SRNScenario — 自然言語の合成課題。</a:t>
+            </a:r>
+          </a:p>
+          <a:p>
+            <a:pPr algn="l">
+              <a:lnSpc>
+                <a:spcPts val="940"/>
+              </a:lnSpc>
+              <a:spcBef>
+                <a:spcPts val="0"/>
+              </a:spcBef>
+              <a:spcAft>
+                <a:spcPts val="140"/>
+              </a:spcAft>
+              <a:buNone/>
+              <a:defRPr sz="810" b="0">
+                <a:solidFill>
+                  <a:srgbClr val="303437"/>
+                </a:solidFill>
+                <a:latin typeface="Noto Sans"/>
+              </a:defRPr>
+            </a:pPr>
             <a:r>
               <a:rPr sz="810" b="0" lang="ja-JP" altLang="en-US">
                 <a:solidFill>
@@ -23354,20 +20701,9 @@
                 <a:latin typeface="Noto Sans"/>
                 <a:ea typeface="Noto Sans CJK JP"/>
                 <a:cs typeface="Noto Sans"/>
-              </a:rPr>
-              <a:t>  </a:t>
-            </a:r>
-            <a:r>
-              <a:rPr sz="810" b="0" lang="ja-JP" altLang="en-US">
-                <a:solidFill>
-                  <a:srgbClr val="626669"/>
-                </a:solidFill>
-                <a:latin typeface="Noto Sans"/>
-                <a:ea typeface="Noto Sans CJK JP"/>
-                <a:cs typeface="Noto Sans"/>
-                <a:hlinkClick r:id="rId2"/>
-              </a:rPr>
-              <a:t>https://github.com/stanford-crfm/helm/tree/v0.4.0</a:t>
+                <a:hlinkClick r:id="rId3"/>
+              </a:rPr>
+              <a:t>https://github.com/stanford-crfm/helm/blob/v0.4.0/src/helm/benchmark/scenarios/synthetic_reasoning_natural_scenario.py</a:t>
             </a:r>
           </a:p>
         </p:txBody>
@@ -23433,7 +20769,7 @@
                 <a:ea typeface="Noto Sans CJK JP"/>
                 <a:cs typeface="Noto Sans"/>
               </a:rPr>
-              <a:t>1. 記号列と自然言語の実例</a:t>
+              <a:t>記号列と自然言語の実例</a:t>
             </a:r>
           </a:p>
         </p:txBody>
@@ -23649,7 +20985,7 @@
                 <a:ea typeface="Noto Sans CJK JP"/>
                 <a:cs typeface="Noto Sans"/>
               </a:rPr>
-              <a:t>公式生成器 / seed 42 / test index 1 / 問題全文・日本語訳</a:t>
+              <a:t>問題（全文）と日本語訳</a:t>
             </a:r>
           </a:p>
         </p:txBody>
@@ -24353,7 +21689,7 @@
         <p:spPr>
           <a:xfrm>
             <a:off x="502920" y="4818888"/>
-            <a:ext cx="8183879" cy="530352"/>
+            <a:ext cx="8183879" cy="621792"/>
           </a:xfrm>
           <a:prstGeom prst="rect">
             <a:avLst/>
@@ -24393,8 +21729,28 @@
                 <a:ea typeface="Noto Sans CJK JP"/>
                 <a:cs typeface="Noto Sans"/>
               </a:rPr>
-              <a:t>[1] Stanford CRFM. HELM v0.4.0 公式生成器。 自然言語・hard / index 6001</a:t>
-            </a:r>
+              <a:t>[1] Stanford CRFM. SRNScenario — 自然言語の合成課題。</a:t>
+            </a:r>
+          </a:p>
+          <a:p>
+            <a:pPr algn="l">
+              <a:lnSpc>
+                <a:spcPts val="940"/>
+              </a:lnSpc>
+              <a:spcBef>
+                <a:spcPts val="0"/>
+              </a:spcBef>
+              <a:spcAft>
+                <a:spcPts val="140"/>
+              </a:spcAft>
+              <a:buNone/>
+              <a:defRPr sz="810" b="0">
+                <a:solidFill>
+                  <a:srgbClr val="303437"/>
+                </a:solidFill>
+                <a:latin typeface="Noto Sans"/>
+              </a:defRPr>
+            </a:pPr>
             <a:r>
               <a:rPr sz="810" b="0" lang="ja-JP" altLang="en-US">
                 <a:solidFill>
@@ -24403,20 +21759,9 @@
                 <a:latin typeface="Noto Sans"/>
                 <a:ea typeface="Noto Sans CJK JP"/>
                 <a:cs typeface="Noto Sans"/>
-              </a:rPr>
-              <a:t>  </a:t>
-            </a:r>
-            <a:r>
-              <a:rPr sz="810" b="0" lang="ja-JP" altLang="en-US">
-                <a:solidFill>
-                  <a:srgbClr val="626669"/>
-                </a:solidFill>
-                <a:latin typeface="Noto Sans"/>
-                <a:ea typeface="Noto Sans CJK JP"/>
-                <a:cs typeface="Noto Sans"/>
-                <a:hlinkClick r:id="rId2"/>
-              </a:rPr>
-              <a:t>https://github.com/stanford-crfm/helm/tree/v0.4.0</a:t>
+                <a:hlinkClick r:id="rId3"/>
+              </a:rPr>
+              <a:t>https://github.com/stanford-crfm/helm/blob/v0.4.0/src/helm/benchmark/scenarios/synthetic_reasoning_natural_scenario.py</a:t>
             </a:r>
           </a:p>
         </p:txBody>
@@ -24584,7 +21929,7 @@
                 <a:ea typeface="Noto Sans CJK JP"/>
                 <a:cs typeface="Noto Sans"/>
               </a:rPr>
-              <a:t>公式生成器 / seed 42 / test index 2 / 問題全文</a:t>
+              <a:t>問題（全文）</a:t>
             </a:r>
           </a:p>
         </p:txBody>
@@ -24943,7 +22288,7 @@
         <p:spPr>
           <a:xfrm>
             <a:off x="502920" y="4700016"/>
-            <a:ext cx="8183879" cy="530352"/>
+            <a:ext cx="8183879" cy="621792"/>
           </a:xfrm>
           <a:prstGeom prst="rect">
             <a:avLst/>
@@ -24983,8 +22328,28 @@
                 <a:ea typeface="Noto Sans CJK JP"/>
                 <a:cs typeface="Noto Sans"/>
               </a:rPr>
-              <a:t>[1] Stanford CRFM. HELM v0.4.0 公式生成器。 自然言語・hard / index 6002</a:t>
-            </a:r>
+              <a:t>[1] Stanford CRFM. SRNScenario — 自然言語の合成課題。</a:t>
+            </a:r>
+          </a:p>
+          <a:p>
+            <a:pPr algn="l">
+              <a:lnSpc>
+                <a:spcPts val="940"/>
+              </a:lnSpc>
+              <a:spcBef>
+                <a:spcPts val="0"/>
+              </a:spcBef>
+              <a:spcAft>
+                <a:spcPts val="140"/>
+              </a:spcAft>
+              <a:buNone/>
+              <a:defRPr sz="810" b="0">
+                <a:solidFill>
+                  <a:srgbClr val="303437"/>
+                </a:solidFill>
+                <a:latin typeface="Noto Sans"/>
+              </a:defRPr>
+            </a:pPr>
             <a:r>
               <a:rPr sz="810" b="0" lang="ja-JP" altLang="en-US">
                 <a:solidFill>
@@ -24993,20 +22358,9 @@
                 <a:latin typeface="Noto Sans"/>
                 <a:ea typeface="Noto Sans CJK JP"/>
                 <a:cs typeface="Noto Sans"/>
-              </a:rPr>
-              <a:t>  </a:t>
-            </a:r>
-            <a:r>
-              <a:rPr sz="810" b="0" lang="ja-JP" altLang="en-US">
-                <a:solidFill>
-                  <a:srgbClr val="626669"/>
-                </a:solidFill>
-                <a:latin typeface="Noto Sans"/>
-                <a:ea typeface="Noto Sans CJK JP"/>
-                <a:cs typeface="Noto Sans"/>
-                <a:hlinkClick r:id="rId2"/>
-              </a:rPr>
-              <a:t>https://github.com/stanford-crfm/helm/tree/v0.4.0</a:t>
+                <a:hlinkClick r:id="rId3"/>
+              </a:rPr>
+              <a:t>https://github.com/stanford-crfm/helm/blob/v0.4.0/src/helm/benchmark/scenarios/synthetic_reasoning_natural_scenario.py</a:t>
             </a:r>
           </a:p>
         </p:txBody>
@@ -25174,7 +22528,7 @@
                 <a:ea typeface="Noto Sans CJK JP"/>
                 <a:cs typeface="Noto Sans"/>
               </a:rPr>
-              <a:t>問題全文の日本語訳 / 同じseed・index</a:t>
+              <a:t>問題（全文）の日本語訳</a:t>
             </a:r>
           </a:p>
         </p:txBody>
@@ -25279,7 +22633,7 @@
                 <a:ea typeface="Noto Sans CJK JP"/>
                 <a:cs typeface="Noto Sans"/>
               </a:rPr>
-              <a:t>ケシが紫色なら、そのケシは退屈。</a:t>
+              <a:t>ケシが紫色なら、そのケシは退屈なものだ。</a:t>
             </a:r>
           </a:p>
           <a:p>
@@ -25533,7 +22887,7 @@
         <p:spPr>
           <a:xfrm>
             <a:off x="502920" y="4700016"/>
-            <a:ext cx="8183879" cy="530352"/>
+            <a:ext cx="8183879" cy="621792"/>
           </a:xfrm>
           <a:prstGeom prst="rect">
             <a:avLst/>
@@ -25573,8 +22927,28 @@
                 <a:ea typeface="Noto Sans CJK JP"/>
                 <a:cs typeface="Noto Sans"/>
               </a:rPr>
-              <a:t>[1] Stanford CRFM. HELM v0.4.0 公式生成器。 自然言語・hard / index 6002</a:t>
-            </a:r>
+              <a:t>[1] Stanford CRFM. SRNScenario — 自然言語の合成課題。</a:t>
+            </a:r>
+          </a:p>
+          <a:p>
+            <a:pPr algn="l">
+              <a:lnSpc>
+                <a:spcPts val="940"/>
+              </a:lnSpc>
+              <a:spcBef>
+                <a:spcPts val="0"/>
+              </a:spcBef>
+              <a:spcAft>
+                <a:spcPts val="140"/>
+              </a:spcAft>
+              <a:buNone/>
+              <a:defRPr sz="810" b="0">
+                <a:solidFill>
+                  <a:srgbClr val="303437"/>
+                </a:solidFill>
+                <a:latin typeface="Noto Sans"/>
+              </a:defRPr>
+            </a:pPr>
             <a:r>
               <a:rPr sz="810" b="0" lang="ja-JP" altLang="en-US">
                 <a:solidFill>
@@ -25583,20 +22957,9 @@
                 <a:latin typeface="Noto Sans"/>
                 <a:ea typeface="Noto Sans CJK JP"/>
                 <a:cs typeface="Noto Sans"/>
-              </a:rPr>
-              <a:t>  </a:t>
-            </a:r>
-            <a:r>
-              <a:rPr sz="810" b="0" lang="ja-JP" altLang="en-US">
-                <a:solidFill>
-                  <a:srgbClr val="626669"/>
-                </a:solidFill>
-                <a:latin typeface="Noto Sans"/>
-                <a:ea typeface="Noto Sans CJK JP"/>
-                <a:cs typeface="Noto Sans"/>
-                <a:hlinkClick r:id="rId2"/>
-              </a:rPr>
-              <a:t>https://github.com/stanford-crfm/helm/tree/v0.4.0</a:t>
+                <a:hlinkClick r:id="rId3"/>
+              </a:rPr>
+              <a:t>https://github.com/stanford-crfm/helm/blob/v0.4.0/src/helm/benchmark/scenarios/synthetic_reasoning_natural_scenario.py</a:t>
             </a:r>
           </a:p>
         </p:txBody>
@@ -25662,7 +23025,7 @@
                 <a:ea typeface="Noto Sans CJK JP"/>
                 <a:cs typeface="Noto Sans"/>
               </a:rPr>
-              <a:t>採点と生成の詳細</a:t>
+              <a:t>語彙と生成の補足</a:t>
             </a:r>
           </a:p>
         </p:txBody>
@@ -25710,2439 +23073,7 @@
                 <a:ea typeface="Noto Sans CJK JP"/>
                 <a:cs typeface="Noto Sans"/>
               </a:rPr>
-              <a:t>Appendix: 2. 採点と生成の詳細</a:t>
-            </a:r>
-          </a:p>
-        </p:txBody>
-      </p:sp>
-    </p:spTree>
-  </p:cSld>
-  <p:clrMapOvr>
-    <a:masterClrMapping/>
-  </p:clrMapOvr>
-</p:sld>
-</file>
-
-<file path=ppt/slides/slide44.xml><?xml version="1.0" encoding="utf-8"?>
-<p:sld xmlns:a="http://schemas.openxmlformats.org/drawingml/2006/main" xmlns:p="http://schemas.openxmlformats.org/presentationml/2006/main" xmlns:r="http://schemas.openxmlformats.org/officeDocument/2006/relationships">
-  <p:cSld>
-    <p:spTree>
-      <p:nvGrpSpPr>
-        <p:cNvPr id="1" name=""/>
-        <p:cNvGrpSpPr/>
-        <p:nvPr/>
-      </p:nvGrpSpPr>
-      <p:grpSpPr/>
-      <p:sp>
-        <p:nvSpPr>
-          <p:cNvPr id="2" name="Title 1"/>
-          <p:cNvSpPr>
-            <a:spLocks noGrp="1"/>
-          </p:cNvSpPr>
-          <p:nvPr>
-            <p:ph type="title"/>
-          </p:nvPr>
-        </p:nvSpPr>
-        <p:spPr>
-          <a:xfrm>
-            <a:off x="468172" y="650138"/>
-            <a:ext cx="8206740" cy="616305"/>
-          </a:xfrm>
-        </p:spPr>
-        <p:txBody>
-          <a:bodyPr wrap="square" lIns="0" rIns="0" tIns="0" bIns="0">
-            <a:noAutofit/>
-          </a:bodyPr>
-          <a:lstStyle/>
-          <a:p>
-            <a:pPr algn="l">
-              <a:lnSpc>
-                <a:spcPct val="110000"/>
-              </a:lnSpc>
-              <a:buNone/>
-              <a:defRPr sz="2800" b="0">
-                <a:solidFill>
-                  <a:srgbClr val="303437"/>
-                </a:solidFill>
-                <a:latin typeface="Noto Sans"/>
-              </a:defRPr>
-            </a:pPr>
-            <a:r>
-              <a:rPr sz="2800" b="1" lang="ja-JP" altLang="en-US">
-                <a:solidFill>
-                  <a:srgbClr val="303437"/>
-                </a:solidFill>
-                <a:latin typeface="Noto Sans"/>
-                <a:ea typeface="Noto Sans CJK JP"/>
-                <a:cs typeface="Noto Sans"/>
-              </a:rPr>
-              <a:t>正規化すると、異なる記号列も一致する</a:t>
-            </a:r>
-          </a:p>
-        </p:txBody>
-      </p:sp>
-      <p:sp>
-        <p:nvSpPr>
-          <p:cNvPr id="3" name="Title 2"/>
-          <p:cNvSpPr>
-            <a:spLocks noGrp="1"/>
-          </p:cNvSpPr>
-          <p:nvPr>
-            <p:ph type="title" idx="2"/>
-          </p:nvPr>
-        </p:nvSpPr>
-        <p:spPr>
-          <a:xfrm>
-            <a:off x="75895" y="0"/>
-            <a:ext cx="8115300" cy="480060"/>
-          </a:xfrm>
-        </p:spPr>
-        <p:txBody>
-          <a:bodyPr wrap="square" lIns="0" rIns="0" tIns="0" bIns="0" anchor="ctr">
-            <a:noAutofit/>
-          </a:bodyPr>
-          <a:lstStyle/>
-          <a:p>
-            <a:pPr algn="l">
-              <a:lnSpc>
-                <a:spcPct val="110000"/>
-              </a:lnSpc>
-              <a:buNone/>
-              <a:defRPr sz="1400" b="0">
-                <a:solidFill>
-                  <a:srgbClr val="303437"/>
-                </a:solidFill>
-                <a:latin typeface="Noto Sans"/>
-              </a:defRPr>
-            </a:pPr>
-            <a:r>
-              <a:rPr sz="1400" b="1" lang="ja-JP" altLang="en-US">
-                <a:solidFill>
-                  <a:srgbClr val="FFFEF8"/>
-                </a:solidFill>
-                <a:latin typeface="Noto Sans"/>
-                <a:ea typeface="Noto Sans CJK JP"/>
-                <a:cs typeface="Noto Sans"/>
-              </a:rPr>
-              <a:t>Appendix: 2. 採点と生成の詳細</a:t>
-            </a:r>
-          </a:p>
-        </p:txBody>
-      </p:sp>
-      <p:sp>
-        <p:nvSpPr>
-          <p:cNvPr id="4" name="TextBox 3"/>
-          <p:cNvSpPr txBox="1"/>
-          <p:nvPr/>
-        </p:nvSpPr>
-        <p:spPr>
-          <a:xfrm>
-            <a:off x="548640" y="1316736"/>
-            <a:ext cx="8046720" cy="228600"/>
-          </a:xfrm>
-          <a:prstGeom prst="rect">
-            <a:avLst/>
-          </a:prstGeom>
-          <a:noFill/>
-        </p:spPr>
-        <p:txBody>
-          <a:bodyPr wrap="square" lIns="0" rIns="0" tIns="0" bIns="0">
-            <a:noAutofit/>
-          </a:bodyPr>
-          <a:lstStyle/>
-          <a:p>
-            <a:pPr algn="l">
-              <a:lnSpc>
-                <a:spcPts val="1404"/>
-              </a:lnSpc>
-              <a:spcBef>
-                <a:spcPts val="0"/>
-              </a:spcBef>
-              <a:spcAft>
-                <a:spcPts val="0"/>
-              </a:spcAft>
-              <a:buNone/>
-              <a:defRPr sz="1200" b="0">
-                <a:solidFill>
-                  <a:srgbClr val="303437"/>
-                </a:solidFill>
-                <a:latin typeface="Noto Sans"/>
-              </a:defRPr>
-            </a:pPr>
-            <a:r>
-              <a:rPr sz="1200" b="0" lang="ja-JP" altLang="en-US">
-                <a:solidFill>
-                  <a:srgbClr val="626669"/>
-                </a:solidFill>
-                <a:latin typeface="Noto Sans"/>
-                <a:ea typeface="Noto Sans CJK JP"/>
-                <a:cs typeface="Noto Sans"/>
-              </a:rPr>
-              <a:t>採点方法の説明例：実例1の正解を使い、比較用の予測を置く</a:t>
-            </a:r>
-          </a:p>
-        </p:txBody>
-      </p:sp>
-      <p:sp>
-        <p:nvSpPr>
-          <p:cNvPr id="5" name="quote-frame"/>
-          <p:cNvSpPr/>
-          <p:nvPr/>
-        </p:nvSpPr>
-        <p:spPr>
-          <a:xfrm>
-            <a:off x="548640" y="1673352"/>
-            <a:ext cx="8046720" cy="741946"/>
-          </a:xfrm>
-          <a:prstGeom prst="rect">
-            <a:avLst/>
-          </a:prstGeom>
-          <a:solidFill>
-            <a:srgbClr val="EBEDEB"/>
-          </a:solidFill>
-          <a:ln>
-            <a:noFill/>
-          </a:ln>
-          <a:effectLst/>
-        </p:spPr>
-        <p:style>
-          <a:lnRef idx="1">
-            <a:schemeClr val="accent1"/>
-          </a:lnRef>
-          <a:fillRef idx="3">
-            <a:schemeClr val="accent1"/>
-          </a:fillRef>
-          <a:effectRef idx="0">
-            <a:schemeClr val="accent1"/>
-          </a:effectRef>
-          <a:fontRef idx="minor">
-            <a:schemeClr val="lt1"/>
-          </a:fontRef>
-        </p:style>
-        <p:txBody>
-          <a:bodyPr rtlCol="0" anchor="t" wrap="square" lIns="177800" rIns="177800" tIns="63500" bIns="127000">
-            <a:noAutofit/>
-          </a:bodyPr>
-          <a:lstStyle/>
-          <a:p>
-            <a:pPr algn="l">
-              <a:lnSpc>
-                <a:spcPts val="2379"/>
-              </a:lnSpc>
-              <a:spcBef>
-                <a:spcPts val="0"/>
-              </a:spcBef>
-              <a:spcAft>
-                <a:spcPts val="0"/>
-              </a:spcAft>
-              <a:buNone/>
-              <a:defRPr sz="2000" b="0">
-                <a:solidFill>
-                  <a:srgbClr val="303437"/>
-                </a:solidFill>
-                <a:latin typeface="Noto Sans"/>
-              </a:defRPr>
-            </a:pPr>
-            <a:r>
-              <a:rPr sz="2000" b="0" lang="ja-JP" altLang="en-US">
-                <a:solidFill>
-                  <a:srgbClr val="303437"/>
-                </a:solidFill>
-                <a:latin typeface="Noto Sans"/>
-                <a:ea typeface="Noto Sans CJK JP"/>
-                <a:cs typeface="Noto Sans"/>
-              </a:rPr>
-              <a:t>参照正解：* stork - * shark stork</a:t>
-            </a:r>
-          </a:p>
-          <a:p>
-            <a:pPr algn="l">
-              <a:lnSpc>
-                <a:spcPts val="2379"/>
-              </a:lnSpc>
-              <a:spcBef>
-                <a:spcPts val="0"/>
-              </a:spcBef>
-              <a:spcAft>
-                <a:spcPts val="0"/>
-              </a:spcAft>
-              <a:buNone/>
-              <a:defRPr sz="2000" b="0">
-                <a:solidFill>
-                  <a:srgbClr val="303437"/>
-                </a:solidFill>
-                <a:latin typeface="Noto Sans"/>
-              </a:defRPr>
-            </a:pPr>
-            <a:r>
-              <a:rPr sz="2000" b="0" lang="ja-JP" altLang="en-US">
-                <a:solidFill>
-                  <a:srgbClr val="303437"/>
-                </a:solidFill>
-                <a:latin typeface="Noto Sans"/>
-                <a:ea typeface="Noto Sans CJK JP"/>
-                <a:cs typeface="Noto Sans"/>
-              </a:rPr>
-              <a:t>比較する予測：+ stork = + shark stork</a:t>
-            </a:r>
-          </a:p>
-        </p:txBody>
-      </p:sp>
-      <p:sp>
-        <p:nvSpPr>
-          <p:cNvPr id="6" name="TextBox 5"/>
-          <p:cNvSpPr txBox="1"/>
-          <p:nvPr/>
-        </p:nvSpPr>
-        <p:spPr>
-          <a:xfrm>
-            <a:off x="594360" y="2743200"/>
-            <a:ext cx="7955279" cy="411480"/>
-          </a:xfrm>
-          <a:prstGeom prst="rect">
-            <a:avLst/>
-          </a:prstGeom>
-          <a:noFill/>
-        </p:spPr>
-        <p:txBody>
-          <a:bodyPr wrap="square" lIns="0" rIns="0" tIns="0" bIns="0">
-            <a:noAutofit/>
-          </a:bodyPr>
-          <a:lstStyle/>
-          <a:p>
-            <a:pPr algn="l">
-              <a:lnSpc>
-                <a:spcPts val="2457"/>
-              </a:lnSpc>
-              <a:spcBef>
-                <a:spcPts val="0"/>
-              </a:spcBef>
-              <a:spcAft>
-                <a:spcPts val="0"/>
-              </a:spcAft>
-              <a:buNone/>
-              <a:defRPr sz="2100" b="0">
-                <a:solidFill>
-                  <a:srgbClr val="303437"/>
-                </a:solidFill>
-                <a:latin typeface="Noto Sans"/>
-              </a:defRPr>
-            </a:pPr>
-            <a:r>
-              <a:rPr sz="2100" b="1" lang="ja-JP" altLang="en-US">
-                <a:solidFill>
-                  <a:srgbClr val="303437"/>
-                </a:solidFill>
-                <a:latin typeface="Noto Sans"/>
-                <a:ea typeface="Noto Sans CJK JP"/>
-                <a:cs typeface="Noto Sans"/>
-              </a:rPr>
-              <a:t>正規化後はいずれも stork shark stork</a:t>
-            </a:r>
-          </a:p>
-        </p:txBody>
-      </p:sp>
-      <p:sp>
-        <p:nvSpPr>
-          <p:cNvPr id="7" name="TextBox 6"/>
-          <p:cNvSpPr txBox="1"/>
-          <p:nvPr/>
-        </p:nvSpPr>
-        <p:spPr>
-          <a:xfrm>
-            <a:off x="594360" y="3220988"/>
-            <a:ext cx="7955279" cy="411480"/>
-          </a:xfrm>
-          <a:prstGeom prst="rect">
-            <a:avLst/>
-          </a:prstGeom>
-          <a:noFill/>
-        </p:spPr>
-        <p:txBody>
-          <a:bodyPr wrap="square" lIns="0" rIns="0" tIns="0" bIns="0">
-            <a:noAutofit/>
-          </a:bodyPr>
-          <a:lstStyle/>
-          <a:p>
-            <a:pPr algn="l">
-              <a:lnSpc>
-                <a:spcPts val="2515"/>
-              </a:lnSpc>
-              <a:spcBef>
-                <a:spcPts val="0"/>
-              </a:spcBef>
-              <a:spcAft>
-                <a:spcPts val="0"/>
-              </a:spcAft>
-              <a:buNone/>
-              <a:defRPr sz="2150" b="0">
-                <a:solidFill>
-                  <a:srgbClr val="303437"/>
-                </a:solidFill>
-                <a:latin typeface="Noto Sans"/>
-              </a:defRPr>
-            </a:pPr>
-            <a:r>
-              <a:rPr sz="2150" b="1" lang="ja-JP" altLang="en-US">
-                <a:solidFill>
-                  <a:srgbClr val="B13731"/>
-                </a:solidFill>
-                <a:latin typeface="Noto Sans"/>
-                <a:ea typeface="Noto Sans CJK JP"/>
-                <a:cs typeface="Noto Sans"/>
-              </a:rPr>
-              <a:t>quasi_exact_match = 1 / exact_match = 0</a:t>
-            </a:r>
-          </a:p>
-        </p:txBody>
-      </p:sp>
-      <p:sp>
-        <p:nvSpPr>
-          <p:cNvPr id="8" name="sources"/>
-          <p:cNvSpPr txBox="1"/>
-          <p:nvPr/>
-        </p:nvSpPr>
-        <p:spPr>
-          <a:xfrm>
-            <a:off x="502920" y="4700016"/>
-            <a:ext cx="8183879" cy="530352"/>
-          </a:xfrm>
-          <a:prstGeom prst="rect">
-            <a:avLst/>
-          </a:prstGeom>
-          <a:noFill/>
-        </p:spPr>
-        <p:txBody>
-          <a:bodyPr wrap="square" lIns="0" rIns="0" tIns="0" bIns="0">
-            <a:noAutofit/>
-          </a:bodyPr>
-          <a:lstStyle/>
-          <a:p>
-            <a:pPr algn="l">
-              <a:lnSpc>
-                <a:spcPts val="940"/>
-              </a:lnSpc>
-              <a:spcBef>
-                <a:spcPts val="0"/>
-              </a:spcBef>
-              <a:spcAft>
-                <a:spcPts val="140"/>
-              </a:spcAft>
-              <a:buNone/>
-              <a:defRPr sz="810" b="0">
-                <a:solidFill>
-                  <a:srgbClr val="303437"/>
-                </a:solidFill>
-                <a:latin typeface="Noto Sans"/>
-              </a:defRPr>
-            </a:pPr>
-            <a:r>
-              <a:rPr sz="810" b="0" lang="ja-JP" altLang="en-US">
-                <a:solidFill>
-                  <a:srgbClr val="626669"/>
-                </a:solidFill>
-                <a:latin typeface="Noto Sans"/>
-                <a:ea typeface="Noto Sans CJK JP"/>
-                <a:cs typeface="Noto Sans"/>
-              </a:rPr>
-              <a:t>[1] Stanford CRFM. BasicMetric, HELM v0.4.0.</a:t>
-            </a:r>
-            <a:r>
-              <a:rPr sz="810" b="0" lang="ja-JP" altLang="en-US">
-                <a:solidFill>
-                  <a:srgbClr val="626669"/>
-                </a:solidFill>
-                <a:latin typeface="Noto Sans"/>
-                <a:ea typeface="Noto Sans CJK JP"/>
-                <a:cs typeface="Noto Sans"/>
-              </a:rPr>
-              <a:t>  </a:t>
-            </a:r>
-            <a:r>
-              <a:rPr sz="810" b="0" lang="ja-JP" altLang="en-US">
-                <a:solidFill>
-                  <a:srgbClr val="626669"/>
-                </a:solidFill>
-                <a:latin typeface="Noto Sans"/>
-                <a:ea typeface="Noto Sans CJK JP"/>
-                <a:cs typeface="Noto Sans"/>
-                <a:hlinkClick r:id="rId2"/>
-              </a:rPr>
-              <a:t>https://github.com/stanford-crfm/helm/blob/v0.4.0/src/helm/benchmark/metrics/basic_metrics.py</a:t>
-            </a:r>
-          </a:p>
-        </p:txBody>
-      </p:sp>
-    </p:spTree>
-  </p:cSld>
-  <p:clrMapOvr>
-    <a:masterClrMapping/>
-  </p:clrMapOvr>
-</p:sld>
-</file>
-
-<file path=ppt/slides/slide45.xml><?xml version="1.0" encoding="utf-8"?>
-<p:sld xmlns:a="http://schemas.openxmlformats.org/drawingml/2006/main" xmlns:p="http://schemas.openxmlformats.org/presentationml/2006/main" xmlns:r="http://schemas.openxmlformats.org/officeDocument/2006/relationships">
-  <p:cSld>
-    <p:spTree>
-      <p:nvGrpSpPr>
-        <p:cNvPr id="1" name=""/>
-        <p:cNvGrpSpPr/>
-        <p:nvPr/>
-      </p:nvGrpSpPr>
-      <p:grpSpPr/>
-      <p:sp>
-        <p:nvSpPr>
-          <p:cNvPr id="2" name="Title 1"/>
-          <p:cNvSpPr>
-            <a:spLocks noGrp="1"/>
-          </p:cNvSpPr>
-          <p:nvPr>
-            <p:ph type="title"/>
-          </p:nvPr>
-        </p:nvSpPr>
-        <p:spPr>
-          <a:xfrm>
-            <a:off x="468172" y="650138"/>
-            <a:ext cx="8206740" cy="616305"/>
-          </a:xfrm>
-        </p:spPr>
-        <p:txBody>
-          <a:bodyPr wrap="square" lIns="0" rIns="0" tIns="0" bIns="0">
-            <a:noAutofit/>
-          </a:bodyPr>
-          <a:lstStyle/>
-          <a:p>
-            <a:pPr algn="l">
-              <a:lnSpc>
-                <a:spcPct val="110000"/>
-              </a:lnSpc>
-              <a:buNone/>
-              <a:defRPr sz="2800" b="0">
-                <a:solidFill>
-                  <a:srgbClr val="303437"/>
-                </a:solidFill>
-                <a:latin typeface="Noto Sans"/>
-              </a:defRPr>
-            </a:pPr>
-            <a:r>
-              <a:rPr sz="2800" b="1" lang="ja-JP" altLang="en-US">
-                <a:solidFill>
-                  <a:srgbClr val="303437"/>
-                </a:solidFill>
-                <a:latin typeface="Noto Sans"/>
-                <a:ea typeface="Noto Sans CJK JP"/>
-                <a:cs typeface="Noto Sans"/>
-              </a:rPr>
-              <a:t>属性集合では、主語を比較しない</a:t>
-            </a:r>
-          </a:p>
-        </p:txBody>
-      </p:sp>
-      <p:sp>
-        <p:nvSpPr>
-          <p:cNvPr id="3" name="Title 2"/>
-          <p:cNvSpPr>
-            <a:spLocks noGrp="1"/>
-          </p:cNvSpPr>
-          <p:nvPr>
-            <p:ph type="title" idx="2"/>
-          </p:nvPr>
-        </p:nvSpPr>
-        <p:spPr>
-          <a:xfrm>
-            <a:off x="75895" y="0"/>
-            <a:ext cx="8115300" cy="480060"/>
-          </a:xfrm>
-        </p:spPr>
-        <p:txBody>
-          <a:bodyPr wrap="square" lIns="0" rIns="0" tIns="0" bIns="0" anchor="ctr">
-            <a:noAutofit/>
-          </a:bodyPr>
-          <a:lstStyle/>
-          <a:p>
-            <a:pPr algn="l">
-              <a:lnSpc>
-                <a:spcPct val="110000"/>
-              </a:lnSpc>
-              <a:buNone/>
-              <a:defRPr sz="1400" b="0">
-                <a:solidFill>
-                  <a:srgbClr val="303437"/>
-                </a:solidFill>
-                <a:latin typeface="Noto Sans"/>
-              </a:defRPr>
-            </a:pPr>
-            <a:r>
-              <a:rPr sz="1400" b="1" lang="ja-JP" altLang="en-US">
-                <a:solidFill>
-                  <a:srgbClr val="FFFEF8"/>
-                </a:solidFill>
-                <a:latin typeface="Noto Sans"/>
-                <a:ea typeface="Noto Sans CJK JP"/>
-                <a:cs typeface="Noto Sans"/>
-              </a:rPr>
-              <a:t>Appendix: 2. 採点と生成の詳細</a:t>
-            </a:r>
-          </a:p>
-        </p:txBody>
-      </p:sp>
-      <p:sp>
-        <p:nvSpPr>
-          <p:cNvPr id="4" name="TextBox 3"/>
-          <p:cNvSpPr txBox="1"/>
-          <p:nvPr/>
-        </p:nvSpPr>
-        <p:spPr>
-          <a:xfrm>
-            <a:off x="548640" y="1316736"/>
-            <a:ext cx="8046720" cy="228600"/>
-          </a:xfrm>
-          <a:prstGeom prst="rect">
-            <a:avLst/>
-          </a:prstGeom>
-          <a:noFill/>
-        </p:spPr>
-        <p:txBody>
-          <a:bodyPr wrap="square" lIns="0" rIns="0" tIns="0" bIns="0">
-            <a:noAutofit/>
-          </a:bodyPr>
-          <a:lstStyle/>
-          <a:p>
-            <a:pPr algn="l">
-              <a:lnSpc>
-                <a:spcPts val="1404"/>
-              </a:lnSpc>
-              <a:spcBef>
-                <a:spcPts val="0"/>
-              </a:spcBef>
-              <a:spcAft>
-                <a:spcPts val="0"/>
-              </a:spcAft>
-              <a:buNone/>
-              <a:defRPr sz="1200" b="0">
-                <a:solidFill>
-                  <a:srgbClr val="303437"/>
-                </a:solidFill>
-                <a:latin typeface="Noto Sans"/>
-              </a:defRPr>
-            </a:pPr>
-            <a:r>
-              <a:rPr sz="1200" b="0" lang="ja-JP" altLang="en-US">
-                <a:solidFill>
-                  <a:srgbClr val="626669"/>
-                </a:solidFill>
-                <a:latin typeface="Noto Sans"/>
-                <a:ea typeface="Noto Sans CJK JP"/>
-                <a:cs typeface="Noto Sans"/>
-              </a:rPr>
-              <a:t>採点方法の説明例：実例3の正解を使い、比較用の予測を置く</a:t>
-            </a:r>
-          </a:p>
-        </p:txBody>
-      </p:sp>
-      <p:sp>
-        <p:nvSpPr>
-          <p:cNvPr id="5" name="quote-frame"/>
-          <p:cNvSpPr/>
-          <p:nvPr/>
-        </p:nvSpPr>
-        <p:spPr>
-          <a:xfrm>
-            <a:off x="548640" y="1673352"/>
-            <a:ext cx="8046720" cy="741946"/>
-          </a:xfrm>
-          <a:prstGeom prst="rect">
-            <a:avLst/>
-          </a:prstGeom>
-          <a:solidFill>
-            <a:srgbClr val="EBEDEB"/>
-          </a:solidFill>
-          <a:ln>
-            <a:noFill/>
-          </a:ln>
-          <a:effectLst/>
-        </p:spPr>
-        <p:style>
-          <a:lnRef idx="1">
-            <a:schemeClr val="accent1"/>
-          </a:lnRef>
-          <a:fillRef idx="3">
-            <a:schemeClr val="accent1"/>
-          </a:fillRef>
-          <a:effectRef idx="0">
-            <a:schemeClr val="accent1"/>
-          </a:effectRef>
-          <a:fontRef idx="minor">
-            <a:schemeClr val="lt1"/>
-          </a:fontRef>
-        </p:style>
-        <p:txBody>
-          <a:bodyPr rtlCol="0" anchor="t" wrap="square" lIns="177800" rIns="177800" tIns="63500" bIns="127000">
-            <a:noAutofit/>
-          </a:bodyPr>
-          <a:lstStyle/>
-          <a:p>
-            <a:pPr algn="l">
-              <a:lnSpc>
-                <a:spcPts val="2379"/>
-              </a:lnSpc>
-              <a:spcBef>
-                <a:spcPts val="0"/>
-              </a:spcBef>
-              <a:spcAft>
-                <a:spcPts val="0"/>
-              </a:spcAft>
-              <a:buNone/>
-              <a:defRPr sz="2000" b="0">
-                <a:solidFill>
-                  <a:srgbClr val="303437"/>
-                </a:solidFill>
-                <a:latin typeface="Noto Sans"/>
-              </a:defRPr>
-            </a:pPr>
-            <a:r>
-              <a:rPr sz="2000" b="0" lang="ja-JP" altLang="en-US">
-                <a:solidFill>
-                  <a:srgbClr val="303437"/>
-                </a:solidFill>
-                <a:latin typeface="Noto Sans"/>
-                <a:ea typeface="Noto Sans CJK JP"/>
-                <a:cs typeface="Noto Sans"/>
-              </a:rPr>
-              <a:t>参照正解：Dan is beautiful.</a:t>
-            </a:r>
-          </a:p>
-          <a:p>
-            <a:pPr algn="l">
-              <a:lnSpc>
-                <a:spcPts val="2379"/>
-              </a:lnSpc>
-              <a:spcBef>
-                <a:spcPts val="0"/>
-              </a:spcBef>
-              <a:spcAft>
-                <a:spcPts val="0"/>
-              </a:spcAft>
-              <a:buNone/>
-              <a:defRPr sz="2000" b="0">
-                <a:solidFill>
-                  <a:srgbClr val="303437"/>
-                </a:solidFill>
-                <a:latin typeface="Noto Sans"/>
-              </a:defRPr>
-            </a:pPr>
-            <a:r>
-              <a:rPr sz="2000" b="0" lang="ja-JP" altLang="en-US">
-                <a:solidFill>
-                  <a:srgbClr val="303437"/>
-                </a:solidFill>
-                <a:latin typeface="Noto Sans"/>
-                <a:ea typeface="Noto Sans CJK JP"/>
-                <a:cs typeface="Noto Sans"/>
-              </a:rPr>
-              <a:t>比較する予測：Alice is beautiful.</a:t>
-            </a:r>
-          </a:p>
-        </p:txBody>
-      </p:sp>
-      <p:sp>
-        <p:nvSpPr>
-          <p:cNvPr id="6" name="TextBox 5"/>
-          <p:cNvSpPr txBox="1"/>
-          <p:nvPr/>
-        </p:nvSpPr>
-        <p:spPr>
-          <a:xfrm>
-            <a:off x="594360" y="2788920"/>
-            <a:ext cx="7955279" cy="393192"/>
-          </a:xfrm>
-          <a:prstGeom prst="rect">
-            <a:avLst/>
-          </a:prstGeom>
-          <a:noFill/>
-        </p:spPr>
-        <p:txBody>
-          <a:bodyPr wrap="square" lIns="0" rIns="0" tIns="0" bIns="0">
-            <a:noAutofit/>
-          </a:bodyPr>
-          <a:lstStyle/>
-          <a:p>
-            <a:pPr algn="l">
-              <a:lnSpc>
-                <a:spcPts val="2340"/>
-              </a:lnSpc>
-              <a:spcBef>
-                <a:spcPts val="0"/>
-              </a:spcBef>
-              <a:spcAft>
-                <a:spcPts val="0"/>
-              </a:spcAft>
-              <a:buNone/>
-              <a:defRPr sz="2000" b="0">
-                <a:solidFill>
-                  <a:srgbClr val="303437"/>
-                </a:solidFill>
-                <a:latin typeface="Noto Sans"/>
-              </a:defRPr>
-            </a:pPr>
-            <a:r>
-              <a:rPr sz="2000" b="0" lang="ja-JP" altLang="en-US">
-                <a:solidFill>
-                  <a:srgbClr val="303437"/>
-                </a:solidFill>
-                <a:latin typeface="Noto Sans"/>
-                <a:ea typeface="Noto Sans CJK JP"/>
-                <a:cs typeface="Noto Sans"/>
-              </a:rPr>
-              <a:t>両方から属性集合 {beautiful} を取り出す。</a:t>
-            </a:r>
-          </a:p>
-        </p:txBody>
-      </p:sp>
-      <p:sp>
-        <p:nvSpPr>
-          <p:cNvPr id="7" name="TextBox 6"/>
-          <p:cNvSpPr txBox="1"/>
-          <p:nvPr/>
-        </p:nvSpPr>
-        <p:spPr>
-          <a:xfrm>
-            <a:off x="594360" y="3230132"/>
-            <a:ext cx="7955279" cy="411480"/>
-          </a:xfrm>
-          <a:prstGeom prst="rect">
-            <a:avLst/>
-          </a:prstGeom>
-          <a:noFill/>
-        </p:spPr>
-        <p:txBody>
-          <a:bodyPr wrap="square" lIns="0" rIns="0" tIns="0" bIns="0">
-            <a:noAutofit/>
-          </a:bodyPr>
-          <a:lstStyle/>
-          <a:p>
-            <a:pPr algn="l">
-              <a:lnSpc>
-                <a:spcPts val="2515"/>
-              </a:lnSpc>
-              <a:spcBef>
-                <a:spcPts val="0"/>
-              </a:spcBef>
-              <a:spcAft>
-                <a:spcPts val="0"/>
-              </a:spcAft>
-              <a:buNone/>
-              <a:defRPr sz="2150" b="0">
-                <a:solidFill>
-                  <a:srgbClr val="303437"/>
-                </a:solidFill>
-                <a:latin typeface="Noto Sans"/>
-              </a:defRPr>
-            </a:pPr>
-            <a:r>
-              <a:rPr sz="2150" b="1" lang="ja-JP" altLang="en-US">
-                <a:solidFill>
-                  <a:srgbClr val="B13731"/>
-                </a:solidFill>
-                <a:latin typeface="Noto Sans"/>
-                <a:ea typeface="Noto Sans CJK JP"/>
-                <a:cs typeface="Noto Sans"/>
-              </a:rPr>
-              <a:t>属性集合F1 = 1 / 文字列の厳密一致 = 0</a:t>
-            </a:r>
-          </a:p>
-        </p:txBody>
-      </p:sp>
-      <p:sp>
-        <p:nvSpPr>
-          <p:cNvPr id="8" name="sources"/>
-          <p:cNvSpPr txBox="1"/>
-          <p:nvPr/>
-        </p:nvSpPr>
-        <p:spPr>
-          <a:xfrm>
-            <a:off x="502920" y="4700016"/>
-            <a:ext cx="8183879" cy="530352"/>
-          </a:xfrm>
-          <a:prstGeom prst="rect">
-            <a:avLst/>
-          </a:prstGeom>
-          <a:noFill/>
-        </p:spPr>
-        <p:txBody>
-          <a:bodyPr wrap="square" lIns="0" rIns="0" tIns="0" bIns="0">
-            <a:noAutofit/>
-          </a:bodyPr>
-          <a:lstStyle/>
-          <a:p>
-            <a:pPr algn="l">
-              <a:lnSpc>
-                <a:spcPts val="940"/>
-              </a:lnSpc>
-              <a:spcBef>
-                <a:spcPts val="0"/>
-              </a:spcBef>
-              <a:spcAft>
-                <a:spcPts val="140"/>
-              </a:spcAft>
-              <a:buNone/>
-              <a:defRPr sz="810" b="0">
-                <a:solidFill>
-                  <a:srgbClr val="303437"/>
-                </a:solidFill>
-                <a:latin typeface="Noto Sans"/>
-              </a:defRPr>
-            </a:pPr>
-            <a:r>
-              <a:rPr sz="810" b="0" lang="ja-JP" altLang="en-US">
-                <a:solidFill>
-                  <a:srgbClr val="626669"/>
-                </a:solidFill>
-                <a:latin typeface="Noto Sans"/>
-                <a:ea typeface="Noto Sans CJK JP"/>
-                <a:cs typeface="Noto Sans"/>
-              </a:rPr>
-              <a:t>[1] Stanford CRFM. BasicMetric, HELM v0.4.0.</a:t>
-            </a:r>
-            <a:r>
-              <a:rPr sz="810" b="0" lang="ja-JP" altLang="en-US">
-                <a:solidFill>
-                  <a:srgbClr val="626669"/>
-                </a:solidFill>
-                <a:latin typeface="Noto Sans"/>
-                <a:ea typeface="Noto Sans CJK JP"/>
-                <a:cs typeface="Noto Sans"/>
-              </a:rPr>
-              <a:t>  </a:t>
-            </a:r>
-            <a:r>
-              <a:rPr sz="810" b="0" lang="ja-JP" altLang="en-US">
-                <a:solidFill>
-                  <a:srgbClr val="626669"/>
-                </a:solidFill>
-                <a:latin typeface="Noto Sans"/>
-                <a:ea typeface="Noto Sans CJK JP"/>
-                <a:cs typeface="Noto Sans"/>
-                <a:hlinkClick r:id="rId2"/>
-              </a:rPr>
-              <a:t>https://github.com/stanford-crfm/helm/blob/v0.4.0/src/helm/benchmark/metrics/basic_metrics.py</a:t>
-            </a:r>
-          </a:p>
-        </p:txBody>
-      </p:sp>
-    </p:spTree>
-  </p:cSld>
-  <p:clrMapOvr>
-    <a:masterClrMapping/>
-  </p:clrMapOvr>
-</p:sld>
-</file>
-
-<file path=ppt/slides/slide46.xml><?xml version="1.0" encoding="utf-8"?>
-<p:sld xmlns:a="http://schemas.openxmlformats.org/drawingml/2006/main" xmlns:p="http://schemas.openxmlformats.org/presentationml/2006/main" xmlns:r="http://schemas.openxmlformats.org/officeDocument/2006/relationships">
-  <p:cSld>
-    <p:spTree>
-      <p:nvGrpSpPr>
-        <p:cNvPr id="1" name=""/>
-        <p:cNvGrpSpPr/>
-        <p:nvPr/>
-      </p:nvGrpSpPr>
-      <p:grpSpPr/>
-      <p:sp>
-        <p:nvSpPr>
-          <p:cNvPr id="2" name="Title 1"/>
-          <p:cNvSpPr>
-            <a:spLocks noGrp="1"/>
-          </p:cNvSpPr>
-          <p:nvPr>
-            <p:ph type="title"/>
-          </p:nvPr>
-        </p:nvSpPr>
-        <p:spPr>
-          <a:xfrm>
-            <a:off x="468172" y="650138"/>
-            <a:ext cx="8206740" cy="616305"/>
-          </a:xfrm>
-        </p:spPr>
-        <p:txBody>
-          <a:bodyPr wrap="square" lIns="0" rIns="0" tIns="0" bIns="0">
-            <a:noAutofit/>
-          </a:bodyPr>
-          <a:lstStyle/>
-          <a:p>
-            <a:pPr algn="l">
-              <a:lnSpc>
-                <a:spcPct val="110000"/>
-              </a:lnSpc>
-              <a:buNone/>
-              <a:defRPr sz="2800" b="0">
-                <a:solidFill>
-                  <a:srgbClr val="303437"/>
-                </a:solidFill>
-                <a:latin typeface="Noto Sans"/>
-              </a:defRPr>
-            </a:pPr>
-            <a:r>
-              <a:rPr sz="2800" b="1" lang="ja-JP" altLang="en-US">
-                <a:solidFill>
-                  <a:srgbClr val="303437"/>
-                </a:solidFill>
-                <a:latin typeface="Noto Sans"/>
-                <a:ea typeface="Noto Sans CJK JP"/>
-                <a:cs typeface="Noto Sans"/>
-              </a:rPr>
-              <a:t>自然言語版：属性集合IoU</a:t>
-            </a:r>
-          </a:p>
-        </p:txBody>
-      </p:sp>
-      <p:sp>
-        <p:nvSpPr>
-          <p:cNvPr id="3" name="Title 2"/>
-          <p:cNvSpPr>
-            <a:spLocks noGrp="1"/>
-          </p:cNvSpPr>
-          <p:nvPr>
-            <p:ph type="title" idx="2"/>
-          </p:nvPr>
-        </p:nvSpPr>
-        <p:spPr>
-          <a:xfrm>
-            <a:off x="75895" y="0"/>
-            <a:ext cx="8115300" cy="480060"/>
-          </a:xfrm>
-        </p:spPr>
-        <p:txBody>
-          <a:bodyPr wrap="square" lIns="0" rIns="0" tIns="0" bIns="0" anchor="ctr">
-            <a:noAutofit/>
-          </a:bodyPr>
-          <a:lstStyle/>
-          <a:p>
-            <a:pPr algn="l">
-              <a:lnSpc>
-                <a:spcPct val="110000"/>
-              </a:lnSpc>
-              <a:buNone/>
-              <a:defRPr sz="1400" b="0">
-                <a:solidFill>
-                  <a:srgbClr val="303437"/>
-                </a:solidFill>
-                <a:latin typeface="Noto Sans"/>
-              </a:defRPr>
-            </a:pPr>
-            <a:r>
-              <a:rPr sz="1400" b="1" lang="ja-JP" altLang="en-US">
-                <a:solidFill>
-                  <a:srgbClr val="FFFEF8"/>
-                </a:solidFill>
-                <a:latin typeface="Noto Sans"/>
-                <a:ea typeface="Noto Sans CJK JP"/>
-                <a:cs typeface="Noto Sans"/>
-              </a:rPr>
-              <a:t>Appendix: 2. 採点と生成の詳細</a:t>
-            </a:r>
-          </a:p>
-        </p:txBody>
-      </p:sp>
-      <p:graphicFrame>
-        <p:nvGraphicFramePr>
-          <p:cNvPr id="4" name="Table 3"/>
-          <p:cNvGraphicFramePr>
-            <a:graphicFrameLocks noGrp="1"/>
-          </p:cNvGraphicFramePr>
-          <p:nvPr/>
-        </p:nvGraphicFramePr>
-        <p:xfrm>
-          <a:off x="548640" y="1508760"/>
-          <a:ext cx="8046720" cy="1682496"/>
-        </p:xfrm>
-        <a:graphic>
-          <a:graphicData uri="http://schemas.openxmlformats.org/drawingml/2006/table">
-            <a:tbl>
-              <a:tblPr firstRow="0" bandRow="0"/>
-              <a:tblGrid>
-                <a:gridCol w="3474720"/>
-                <a:gridCol w="2286000"/>
-                <a:gridCol w="2286000"/>
-              </a:tblGrid>
-              <a:tr h="420624">
-                <a:tc>
-                  <a:txBody>
-                    <a:bodyPr wrap="square">
-                      <a:noAutofit/>
-                    </a:bodyPr>
-                    <a:lstStyle/>
-                    <a:p>
-                      <a:pPr algn="l">
-                        <a:lnSpc>
-                          <a:spcPts val="2070"/>
-                        </a:lnSpc>
-                        <a:buNone/>
-                        <a:defRPr sz="1800" b="0">
-                          <a:solidFill>
-                            <a:srgbClr val="303437"/>
-                          </a:solidFill>
-                          <a:latin typeface="Noto Sans"/>
-                        </a:defRPr>
-                      </a:pPr>
-                      <a:r>
-                        <a:rPr sz="1800" b="0" lang="ja-JP" altLang="en-US">
-                          <a:solidFill>
-                            <a:srgbClr val="303437"/>
-                          </a:solidFill>
-                          <a:latin typeface="Noto Sans"/>
-                          <a:ea typeface="Noto Sans CJK JP"/>
-                          <a:cs typeface="Noto Sans"/>
-                        </a:rPr>
-                        <a:t>モデル</a:t>
-                      </a:r>
-                    </a:p>
-                  </a:txBody>
-                  <a:tcPr marL="63500" marR="63500" marT="38100" marB="38100" anchor="ctr">
-                    <a:lnL w="7620">
-                      <a:noFill/>
-                    </a:lnL>
-                    <a:lnR w="7620">
-                      <a:noFill/>
-                    </a:lnR>
-                    <a:lnT w="15240">
-                      <a:solidFill>
-                        <a:srgbClr val="626669"/>
-                      </a:solidFill>
-                      <a:prstDash val="solid"/>
-                    </a:lnT>
-                    <a:lnB w="7620">
-                      <a:solidFill>
-                        <a:srgbClr val="626669"/>
-                      </a:solidFill>
-                      <a:prstDash val="solid"/>
-                    </a:lnB>
-                    <a:solidFill>
-                      <a:srgbClr val="FFFEF8"/>
-                    </a:solidFill>
-                  </a:tcPr>
-                </a:tc>
-                <a:tc>
-                  <a:txBody>
-                    <a:bodyPr wrap="square">
-                      <a:noAutofit/>
-                    </a:bodyPr>
-                    <a:lstStyle/>
-                    <a:p>
-                      <a:pPr algn="r">
-                        <a:lnSpc>
-                          <a:spcPts val="2070"/>
-                        </a:lnSpc>
-                        <a:buNone/>
-                        <a:defRPr sz="1800" b="0">
-                          <a:solidFill>
-                            <a:srgbClr val="303437"/>
-                          </a:solidFill>
-                          <a:latin typeface="Noto Sans"/>
-                        </a:defRPr>
-                      </a:pPr>
-                      <a:r>
-                        <a:rPr sz="1800" b="0" lang="ja-JP" altLang="en-US">
-                          <a:solidFill>
-                            <a:srgbClr val="303437"/>
-                          </a:solidFill>
-                          <a:latin typeface="Noto Sans"/>
-                          <a:ea typeface="Noto Sans CJK JP"/>
-                          <a:cs typeface="Noto Sans"/>
-                        </a:rPr>
-                        <a:t>easy %</a:t>
-                      </a:r>
-                    </a:p>
-                  </a:txBody>
-                  <a:tcPr marL="63500" marR="63500" marT="38100" marB="38100" anchor="ctr">
-                    <a:lnL w="7620">
-                      <a:noFill/>
-                    </a:lnL>
-                    <a:lnR w="7620">
-                      <a:noFill/>
-                    </a:lnR>
-                    <a:lnT w="15240">
-                      <a:solidFill>
-                        <a:srgbClr val="626669"/>
-                      </a:solidFill>
-                      <a:prstDash val="solid"/>
-                    </a:lnT>
-                    <a:lnB w="7620">
-                      <a:solidFill>
-                        <a:srgbClr val="626669"/>
-                      </a:solidFill>
-                      <a:prstDash val="solid"/>
-                    </a:lnB>
-                    <a:solidFill>
-                      <a:srgbClr val="FFFEF8"/>
-                    </a:solidFill>
-                  </a:tcPr>
-                </a:tc>
-                <a:tc>
-                  <a:txBody>
-                    <a:bodyPr wrap="square">
-                      <a:noAutofit/>
-                    </a:bodyPr>
-                    <a:lstStyle/>
-                    <a:p>
-                      <a:pPr algn="r">
-                        <a:lnSpc>
-                          <a:spcPts val="2070"/>
-                        </a:lnSpc>
-                        <a:buNone/>
-                        <a:defRPr sz="1800" b="0">
-                          <a:solidFill>
-                            <a:srgbClr val="303437"/>
-                          </a:solidFill>
-                          <a:latin typeface="Noto Sans"/>
-                        </a:defRPr>
-                      </a:pPr>
-                      <a:r>
-                        <a:rPr sz="1800" b="0" lang="ja-JP" altLang="en-US">
-                          <a:solidFill>
-                            <a:srgbClr val="303437"/>
-                          </a:solidFill>
-                          <a:latin typeface="Noto Sans"/>
-                          <a:ea typeface="Noto Sans CJK JP"/>
-                          <a:cs typeface="Noto Sans"/>
-                        </a:rPr>
-                        <a:t>hard %</a:t>
-                      </a:r>
-                    </a:p>
-                  </a:txBody>
-                  <a:tcPr marL="63500" marR="63500" marT="38100" marB="38100" anchor="ctr">
-                    <a:lnL w="7620">
-                      <a:noFill/>
-                    </a:lnL>
-                    <a:lnR w="7620">
-                      <a:noFill/>
-                    </a:lnR>
-                    <a:lnT w="15240">
-                      <a:solidFill>
-                        <a:srgbClr val="626669"/>
-                      </a:solidFill>
-                      <a:prstDash val="solid"/>
-                    </a:lnT>
-                    <a:lnB w="7620">
-                      <a:solidFill>
-                        <a:srgbClr val="626669"/>
-                      </a:solidFill>
-                      <a:prstDash val="solid"/>
-                    </a:lnB>
-                    <a:solidFill>
-                      <a:srgbClr val="FFFEF8"/>
-                    </a:solidFill>
-                  </a:tcPr>
-                </a:tc>
-              </a:tr>
-              <a:tr h="420624">
-                <a:tc>
-                  <a:txBody>
-                    <a:bodyPr wrap="square">
-                      <a:noAutofit/>
-                    </a:bodyPr>
-                    <a:lstStyle/>
-                    <a:p>
-                      <a:pPr algn="l">
-                        <a:lnSpc>
-                          <a:spcPts val="2070"/>
-                        </a:lnSpc>
-                        <a:buNone/>
-                        <a:defRPr sz="1800" b="0">
-                          <a:solidFill>
-                            <a:srgbClr val="303437"/>
-                          </a:solidFill>
-                          <a:latin typeface="Noto Sans"/>
-                        </a:defRPr>
-                      </a:pPr>
-                      <a:r>
-                        <a:rPr sz="1800" b="0" lang="ja-JP" altLang="en-US">
-                          <a:solidFill>
-                            <a:srgbClr val="303437"/>
-                          </a:solidFill>
-                          <a:latin typeface="Noto Sans"/>
-                          <a:ea typeface="Noto Sans CJK JP"/>
-                          <a:cs typeface="Noto Sans"/>
-                        </a:rPr>
-                        <a:t>text-davinci-003 (2022)</a:t>
-                      </a:r>
-                    </a:p>
-                  </a:txBody>
-                  <a:tcPr marL="63500" marR="63500" marT="38100" marB="38100" anchor="ctr">
-                    <a:lnL w="7620">
-                      <a:noFill/>
-                    </a:lnL>
-                    <a:lnR w="7620">
-                      <a:noFill/>
-                    </a:lnR>
-                    <a:lnT w="7620">
-                      <a:solidFill>
-                        <a:srgbClr val="626669"/>
-                      </a:solidFill>
-                      <a:prstDash val="solid"/>
-                    </a:lnT>
-                    <a:lnB w="7620">
-                      <a:noFill/>
-                    </a:lnB>
-                    <a:solidFill>
-                      <a:srgbClr val="FFFEF8"/>
-                    </a:solidFill>
-                  </a:tcPr>
-                </a:tc>
-                <a:tc>
-                  <a:txBody>
-                    <a:bodyPr wrap="square">
-                      <a:noAutofit/>
-                    </a:bodyPr>
-                    <a:lstStyle/>
-                    <a:p>
-                      <a:pPr algn="r">
-                        <a:lnSpc>
-                          <a:spcPts val="2070"/>
-                        </a:lnSpc>
-                        <a:buNone/>
-                        <a:defRPr sz="1800" b="0">
-                          <a:solidFill>
-                            <a:srgbClr val="303437"/>
-                          </a:solidFill>
-                          <a:latin typeface="Noto Sans"/>
-                        </a:defRPr>
-                      </a:pPr>
-                      <a:r>
-                        <a:rPr sz="1800" b="0" lang="ja-JP" altLang="en-US">
-                          <a:solidFill>
-                            <a:srgbClr val="303437"/>
-                          </a:solidFill>
-                          <a:latin typeface="Noto Sans"/>
-                          <a:ea typeface="Noto Sans CJK JP"/>
-                          <a:cs typeface="Noto Sans"/>
-                        </a:rPr>
-                        <a:t>80.69</a:t>
-                      </a:r>
-                    </a:p>
-                  </a:txBody>
-                  <a:tcPr marL="63500" marR="63500" marT="38100" marB="38100" anchor="ctr">
-                    <a:lnL w="7620">
-                      <a:noFill/>
-                    </a:lnL>
-                    <a:lnR w="7620">
-                      <a:noFill/>
-                    </a:lnR>
-                    <a:lnT w="7620">
-                      <a:solidFill>
-                        <a:srgbClr val="626669"/>
-                      </a:solidFill>
-                      <a:prstDash val="solid"/>
-                    </a:lnT>
-                    <a:lnB w="7620">
-                      <a:noFill/>
-                    </a:lnB>
-                    <a:solidFill>
-                      <a:srgbClr val="FFFEF8"/>
-                    </a:solidFill>
-                  </a:tcPr>
-                </a:tc>
-                <a:tc>
-                  <a:txBody>
-                    <a:bodyPr wrap="square">
-                      <a:noAutofit/>
-                    </a:bodyPr>
-                    <a:lstStyle/>
-                    <a:p>
-                      <a:pPr algn="r">
-                        <a:lnSpc>
-                          <a:spcPts val="2070"/>
-                        </a:lnSpc>
-                        <a:buNone/>
-                        <a:defRPr sz="1800" b="0">
-                          <a:solidFill>
-                            <a:srgbClr val="303437"/>
-                          </a:solidFill>
-                          <a:latin typeface="Noto Sans"/>
-                        </a:defRPr>
-                      </a:pPr>
-                      <a:r>
-                        <a:rPr sz="1800" b="0" lang="ja-JP" altLang="en-US">
-                          <a:solidFill>
-                            <a:srgbClr val="303437"/>
-                          </a:solidFill>
-                          <a:latin typeface="Noto Sans"/>
-                          <a:ea typeface="Noto Sans CJK JP"/>
-                          <a:cs typeface="Noto Sans"/>
-                        </a:rPr>
-                        <a:t>61.87</a:t>
-                      </a:r>
-                    </a:p>
-                  </a:txBody>
-                  <a:tcPr marL="63500" marR="63500" marT="38100" marB="38100" anchor="ctr">
-                    <a:lnL w="7620">
-                      <a:noFill/>
-                    </a:lnL>
-                    <a:lnR w="7620">
-                      <a:noFill/>
-                    </a:lnR>
-                    <a:lnT w="7620">
-                      <a:solidFill>
-                        <a:srgbClr val="626669"/>
-                      </a:solidFill>
-                      <a:prstDash val="solid"/>
-                    </a:lnT>
-                    <a:lnB w="7620">
-                      <a:noFill/>
-                    </a:lnB>
-                    <a:solidFill>
-                      <a:srgbClr val="FFFEF8"/>
-                    </a:solidFill>
-                  </a:tcPr>
-                </a:tc>
-              </a:tr>
-              <a:tr h="420624">
-                <a:tc>
-                  <a:txBody>
-                    <a:bodyPr wrap="square">
-                      <a:noAutofit/>
-                    </a:bodyPr>
-                    <a:lstStyle/>
-                    <a:p>
-                      <a:pPr algn="l">
-                        <a:lnSpc>
-                          <a:spcPts val="2070"/>
-                        </a:lnSpc>
-                        <a:buNone/>
-                        <a:defRPr sz="1800" b="0">
-                          <a:solidFill>
-                            <a:srgbClr val="303437"/>
-                          </a:solidFill>
-                          <a:latin typeface="Noto Sans"/>
-                        </a:defRPr>
-                      </a:pPr>
-                      <a:r>
-                        <a:rPr sz="1800" b="0" lang="ja-JP" altLang="en-US">
-                          <a:solidFill>
-                            <a:srgbClr val="303437"/>
-                          </a:solidFill>
-                          <a:latin typeface="Noto Sans"/>
-                          <a:ea typeface="Noto Sans CJK JP"/>
-                          <a:cs typeface="Noto Sans"/>
-                        </a:rPr>
-                        <a:t>OPT-175B (2022)</a:t>
-                      </a:r>
-                    </a:p>
-                  </a:txBody>
-                  <a:tcPr marL="63500" marR="63500" marT="38100" marB="38100" anchor="ctr">
-                    <a:lnL w="7620">
-                      <a:noFill/>
-                    </a:lnL>
-                    <a:lnR w="7620">
-                      <a:noFill/>
-                    </a:lnR>
-                    <a:lnT w="7620">
-                      <a:noFill/>
-                    </a:lnT>
-                    <a:lnB w="7620">
-                      <a:noFill/>
-                    </a:lnB>
-                    <a:solidFill>
-                      <a:srgbClr val="FFFEF8"/>
-                    </a:solidFill>
-                  </a:tcPr>
-                </a:tc>
-                <a:tc>
-                  <a:txBody>
-                    <a:bodyPr wrap="square">
-                      <a:noAutofit/>
-                    </a:bodyPr>
-                    <a:lstStyle/>
-                    <a:p>
-                      <a:pPr algn="r">
-                        <a:lnSpc>
-                          <a:spcPts val="2070"/>
-                        </a:lnSpc>
-                        <a:buNone/>
-                        <a:defRPr sz="1800" b="0">
-                          <a:solidFill>
-                            <a:srgbClr val="303437"/>
-                          </a:solidFill>
-                          <a:latin typeface="Noto Sans"/>
-                        </a:defRPr>
-                      </a:pPr>
-                      <a:r>
-                        <a:rPr sz="1800" b="0" lang="ja-JP" altLang="en-US">
-                          <a:solidFill>
-                            <a:srgbClr val="303437"/>
-                          </a:solidFill>
-                          <a:latin typeface="Noto Sans"/>
-                          <a:ea typeface="Noto Sans CJK JP"/>
-                          <a:cs typeface="Noto Sans"/>
-                        </a:rPr>
-                        <a:t>35.21</a:t>
-                      </a:r>
-                    </a:p>
-                  </a:txBody>
-                  <a:tcPr marL="63500" marR="63500" marT="38100" marB="38100" anchor="ctr">
-                    <a:lnL w="7620">
-                      <a:noFill/>
-                    </a:lnL>
-                    <a:lnR w="7620">
-                      <a:noFill/>
-                    </a:lnR>
-                    <a:lnT w="7620">
-                      <a:noFill/>
-                    </a:lnT>
-                    <a:lnB w="7620">
-                      <a:noFill/>
-                    </a:lnB>
-                    <a:solidFill>
-                      <a:srgbClr val="FFFEF8"/>
-                    </a:solidFill>
-                  </a:tcPr>
-                </a:tc>
-                <a:tc>
-                  <a:txBody>
-                    <a:bodyPr wrap="square">
-                      <a:noAutofit/>
-                    </a:bodyPr>
-                    <a:lstStyle/>
-                    <a:p>
-                      <a:pPr algn="r">
-                        <a:lnSpc>
-                          <a:spcPts val="2070"/>
-                        </a:lnSpc>
-                        <a:buNone/>
-                        <a:defRPr sz="1800" b="0">
-                          <a:solidFill>
-                            <a:srgbClr val="303437"/>
-                          </a:solidFill>
-                          <a:latin typeface="Noto Sans"/>
-                        </a:defRPr>
-                      </a:pPr>
-                      <a:r>
-                        <a:rPr sz="1800" b="0" lang="ja-JP" altLang="en-US">
-                          <a:solidFill>
-                            <a:srgbClr val="303437"/>
-                          </a:solidFill>
-                          <a:latin typeface="Noto Sans"/>
-                          <a:ea typeface="Noto Sans CJK JP"/>
-                          <a:cs typeface="Noto Sans"/>
-                        </a:rPr>
-                        <a:t>13.24</a:t>
-                      </a:r>
-                    </a:p>
-                  </a:txBody>
-                  <a:tcPr marL="63500" marR="63500" marT="38100" marB="38100" anchor="ctr">
-                    <a:lnL w="7620">
-                      <a:noFill/>
-                    </a:lnL>
-                    <a:lnR w="7620">
-                      <a:noFill/>
-                    </a:lnR>
-                    <a:lnT w="7620">
-                      <a:noFill/>
-                    </a:lnT>
-                    <a:lnB w="7620">
-                      <a:noFill/>
-                    </a:lnB>
-                    <a:solidFill>
-                      <a:srgbClr val="FFFEF8"/>
-                    </a:solidFill>
-                  </a:tcPr>
-                </a:tc>
-              </a:tr>
-              <a:tr h="420624">
-                <a:tc>
-                  <a:txBody>
-                    <a:bodyPr wrap="square">
-                      <a:noAutofit/>
-                    </a:bodyPr>
-                    <a:lstStyle/>
-                    <a:p>
-                      <a:pPr algn="l">
-                        <a:lnSpc>
-                          <a:spcPts val="2070"/>
-                        </a:lnSpc>
-                        <a:buNone/>
-                        <a:defRPr sz="1800" b="0">
-                          <a:solidFill>
-                            <a:srgbClr val="303437"/>
-                          </a:solidFill>
-                          <a:latin typeface="Noto Sans"/>
-                        </a:defRPr>
-                      </a:pPr>
-                      <a:r>
-                        <a:rPr sz="1800" b="0" lang="ja-JP" altLang="en-US">
-                          <a:solidFill>
-                            <a:srgbClr val="303437"/>
-                          </a:solidFill>
-                          <a:latin typeface="Noto Sans"/>
-                          <a:ea typeface="Noto Sans CJK JP"/>
-                          <a:cs typeface="Noto Sans"/>
-                        </a:rPr>
-                        <a:t>Llama 2 70B (2023)</a:t>
-                      </a:r>
-                    </a:p>
-                  </a:txBody>
-                  <a:tcPr marL="63500" marR="63500" marT="38100" marB="38100" anchor="ctr">
-                    <a:lnL w="7620">
-                      <a:noFill/>
-                    </a:lnL>
-                    <a:lnR w="7620">
-                      <a:noFill/>
-                    </a:lnR>
-                    <a:lnT w="7620">
-                      <a:noFill/>
-                    </a:lnT>
-                    <a:lnB w="15240">
-                      <a:solidFill>
-                        <a:srgbClr val="626669"/>
-                      </a:solidFill>
-                      <a:prstDash val="solid"/>
-                    </a:lnB>
-                    <a:solidFill>
-                      <a:srgbClr val="FFFEF8"/>
-                    </a:solidFill>
-                  </a:tcPr>
-                </a:tc>
-                <a:tc>
-                  <a:txBody>
-                    <a:bodyPr wrap="square">
-                      <a:noAutofit/>
-                    </a:bodyPr>
-                    <a:lstStyle/>
-                    <a:p>
-                      <a:pPr algn="r">
-                        <a:lnSpc>
-                          <a:spcPts val="2070"/>
-                        </a:lnSpc>
-                        <a:buNone/>
-                        <a:defRPr sz="1800" b="0">
-                          <a:solidFill>
-                            <a:srgbClr val="303437"/>
-                          </a:solidFill>
-                          <a:latin typeface="Noto Sans"/>
-                        </a:defRPr>
-                      </a:pPr>
-                      <a:r>
-                        <a:rPr sz="1800" b="0" lang="ja-JP" altLang="en-US">
-                          <a:solidFill>
-                            <a:srgbClr val="303437"/>
-                          </a:solidFill>
-                          <a:latin typeface="Noto Sans"/>
-                          <a:ea typeface="Noto Sans CJK JP"/>
-                          <a:cs typeface="Noto Sans"/>
-                        </a:rPr>
-                        <a:t>48.83</a:t>
-                      </a:r>
-                    </a:p>
-                  </a:txBody>
-                  <a:tcPr marL="63500" marR="63500" marT="38100" marB="38100" anchor="ctr">
-                    <a:lnL w="7620">
-                      <a:noFill/>
-                    </a:lnL>
-                    <a:lnR w="7620">
-                      <a:noFill/>
-                    </a:lnR>
-                    <a:lnT w="7620">
-                      <a:noFill/>
-                    </a:lnT>
-                    <a:lnB w="15240">
-                      <a:solidFill>
-                        <a:srgbClr val="626669"/>
-                      </a:solidFill>
-                      <a:prstDash val="solid"/>
-                    </a:lnB>
-                    <a:solidFill>
-                      <a:srgbClr val="FFFEF8"/>
-                    </a:solidFill>
-                  </a:tcPr>
-                </a:tc>
-                <a:tc>
-                  <a:txBody>
-                    <a:bodyPr wrap="square">
-                      <a:noAutofit/>
-                    </a:bodyPr>
-                    <a:lstStyle/>
-                    <a:p>
-                      <a:pPr algn="r">
-                        <a:lnSpc>
-                          <a:spcPts val="2070"/>
-                        </a:lnSpc>
-                        <a:buNone/>
-                        <a:defRPr sz="1800" b="0">
-                          <a:solidFill>
-                            <a:srgbClr val="303437"/>
-                          </a:solidFill>
-                          <a:latin typeface="Noto Sans"/>
-                        </a:defRPr>
-                      </a:pPr>
-                      <a:r>
-                        <a:rPr sz="1800" b="0" lang="ja-JP" altLang="en-US">
-                          <a:solidFill>
-                            <a:srgbClr val="303437"/>
-                          </a:solidFill>
-                          <a:latin typeface="Noto Sans"/>
-                          <a:ea typeface="Noto Sans CJK JP"/>
-                          <a:cs typeface="Noto Sans"/>
-                        </a:rPr>
-                        <a:t>43.79</a:t>
-                      </a:r>
-                    </a:p>
-                  </a:txBody>
-                  <a:tcPr marL="63500" marR="63500" marT="38100" marB="38100" anchor="ctr">
-                    <a:lnL w="7620">
-                      <a:noFill/>
-                    </a:lnL>
-                    <a:lnR w="7620">
-                      <a:noFill/>
-                    </a:lnR>
-                    <a:lnT w="7620">
-                      <a:noFill/>
-                    </a:lnT>
-                    <a:lnB w="15240">
-                      <a:solidFill>
-                        <a:srgbClr val="626669"/>
-                      </a:solidFill>
-                      <a:prstDash val="solid"/>
-                    </a:lnB>
-                    <a:solidFill>
-                      <a:srgbClr val="FFFEF8"/>
-                    </a:solidFill>
-                  </a:tcPr>
-                </a:tc>
-              </a:tr>
-            </a:tbl>
-          </a:graphicData>
-        </a:graphic>
-      </p:graphicFrame>
-      <p:sp>
-        <p:nvSpPr>
-          <p:cNvPr id="5" name="TextBox 4"/>
-          <p:cNvSpPr txBox="1"/>
-          <p:nvPr/>
-        </p:nvSpPr>
-        <p:spPr>
-          <a:xfrm>
-            <a:off x="594360" y="3392424"/>
-            <a:ext cx="7955279" cy="658368"/>
-          </a:xfrm>
-          <a:prstGeom prst="rect">
-            <a:avLst/>
-          </a:prstGeom>
-          <a:noFill/>
-        </p:spPr>
-        <p:txBody>
-          <a:bodyPr wrap="square" lIns="0" rIns="0" tIns="0" bIns="0">
-            <a:noAutofit/>
-          </a:bodyPr>
-          <a:lstStyle/>
-          <a:p>
-            <a:pPr algn="l">
-              <a:lnSpc>
-                <a:spcPts val="2047"/>
-              </a:lnSpc>
-              <a:spcBef>
-                <a:spcPts val="0"/>
-              </a:spcBef>
-              <a:spcAft>
-                <a:spcPts val="0"/>
-              </a:spcAft>
-              <a:buNone/>
-              <a:defRPr sz="1750" b="0">
-                <a:solidFill>
-                  <a:srgbClr val="303437"/>
-                </a:solidFill>
-                <a:latin typeface="Noto Sans"/>
-              </a:defRPr>
-            </a:pPr>
-            <a:r>
-              <a:rPr sz="1750" b="0" lang="ja-JP" altLang="en-US">
-                <a:solidFill>
-                  <a:srgbClr val="303437"/>
-                </a:solidFill>
-                <a:latin typeface="Noto Sans"/>
-                <a:ea typeface="Noto Sans CJK JP"/>
-                <a:cs typeface="Noto Sans"/>
-              </a:rPr>
-              <a:t>test 515例。F1と同じ予測を使う。text-davinci-003・OPTは3試行平均、Llama 2は1試行。</a:t>
-            </a:r>
-          </a:p>
-        </p:txBody>
-      </p:sp>
-      <p:sp>
-        <p:nvSpPr>
-          <p:cNvPr id="6" name="sources"/>
-          <p:cNvSpPr txBox="1"/>
-          <p:nvPr/>
-        </p:nvSpPr>
-        <p:spPr>
-          <a:xfrm>
-            <a:off x="502920" y="4700016"/>
-            <a:ext cx="8183879" cy="530352"/>
-          </a:xfrm>
-          <a:prstGeom prst="rect">
-            <a:avLst/>
-          </a:prstGeom>
-          <a:noFill/>
-        </p:spPr>
-        <p:txBody>
-          <a:bodyPr wrap="square" lIns="0" rIns="0" tIns="0" bIns="0">
-            <a:noAutofit/>
-          </a:bodyPr>
-          <a:lstStyle/>
-          <a:p>
-            <a:pPr algn="l">
-              <a:lnSpc>
-                <a:spcPts val="940"/>
-              </a:lnSpc>
-              <a:spcBef>
-                <a:spcPts val="0"/>
-              </a:spcBef>
-              <a:spcAft>
-                <a:spcPts val="140"/>
-              </a:spcAft>
-              <a:buNone/>
-              <a:defRPr sz="810" b="0">
-                <a:solidFill>
-                  <a:srgbClr val="303437"/>
-                </a:solidFill>
-                <a:latin typeface="Noto Sans"/>
-              </a:defRPr>
-            </a:pPr>
-            <a:r>
-              <a:rPr sz="810" b="0" lang="ja-JP" altLang="en-US">
-                <a:solidFill>
-                  <a:srgbClr val="626669"/>
-                </a:solidFill>
-                <a:latin typeface="Noto Sans"/>
-                <a:ea typeface="Noto Sans CJK JP"/>
-                <a:cs typeface="Noto Sans"/>
-              </a:rPr>
-              <a:t>[1] Liang et al. (2023). Holistic Evaluation of Language Models. TMLR.</a:t>
-            </a:r>
-            <a:r>
-              <a:rPr sz="810" b="0" lang="ja-JP" altLang="en-US">
-                <a:solidFill>
-                  <a:srgbClr val="626669"/>
-                </a:solidFill>
-                <a:latin typeface="Noto Sans"/>
-                <a:ea typeface="Noto Sans CJK JP"/>
-                <a:cs typeface="Noto Sans"/>
-              </a:rPr>
-              <a:t>  </a:t>
-            </a:r>
-            <a:r>
-              <a:rPr sz="810" b="0" lang="ja-JP" altLang="en-US">
-                <a:solidFill>
-                  <a:srgbClr val="626669"/>
-                </a:solidFill>
-                <a:latin typeface="Noto Sans"/>
-                <a:ea typeface="Noto Sans CJK JP"/>
-                <a:cs typeface="Noto Sans"/>
-                <a:hlinkClick r:id="rId2"/>
-              </a:rPr>
-              <a:t>https://arxiv.org/abs/2211.09110</a:t>
-            </a:r>
-          </a:p>
-        </p:txBody>
-      </p:sp>
-    </p:spTree>
-  </p:cSld>
-  <p:clrMapOvr>
-    <a:masterClrMapping/>
-  </p:clrMapOvr>
-</p:sld>
-</file>
-
-<file path=ppt/slides/slide47.xml><?xml version="1.0" encoding="utf-8"?>
-<p:sld xmlns:a="http://schemas.openxmlformats.org/drawingml/2006/main" xmlns:p="http://schemas.openxmlformats.org/presentationml/2006/main" xmlns:r="http://schemas.openxmlformats.org/officeDocument/2006/relationships">
-  <p:cSld>
-    <p:spTree>
-      <p:nvGrpSpPr>
-        <p:cNvPr id="1" name=""/>
-        <p:cNvGrpSpPr/>
-        <p:nvPr/>
-      </p:nvGrpSpPr>
-      <p:grpSpPr/>
-      <p:sp>
-        <p:nvSpPr>
-          <p:cNvPr id="2" name="Title 1"/>
-          <p:cNvSpPr>
-            <a:spLocks noGrp="1"/>
-          </p:cNvSpPr>
-          <p:nvPr>
-            <p:ph type="title"/>
-          </p:nvPr>
-        </p:nvSpPr>
-        <p:spPr>
-          <a:xfrm>
-            <a:off x="468172" y="650138"/>
-            <a:ext cx="8206740" cy="616305"/>
-          </a:xfrm>
-        </p:spPr>
-        <p:txBody>
-          <a:bodyPr wrap="square" lIns="0" rIns="0" tIns="0" bIns="0">
-            <a:noAutofit/>
-          </a:bodyPr>
-          <a:lstStyle/>
-          <a:p>
-            <a:pPr algn="l">
-              <a:lnSpc>
-                <a:spcPct val="110000"/>
-              </a:lnSpc>
-              <a:buNone/>
-              <a:defRPr sz="2800" b="0">
-                <a:solidFill>
-                  <a:srgbClr val="303437"/>
-                </a:solidFill>
-                <a:latin typeface="Noto Sans"/>
-              </a:defRPr>
-            </a:pPr>
-            <a:r>
-              <a:rPr sz="2800" b="1" lang="ja-JP" altLang="en-US">
-                <a:solidFill>
-                  <a:srgbClr val="303437"/>
-                </a:solidFill>
-                <a:latin typeface="Noto Sans"/>
-                <a:ea typeface="Noto Sans CJK JP"/>
-                <a:cs typeface="Noto Sans"/>
-              </a:rPr>
-              <a:t>照合候補の構造をtest全件で数える</a:t>
-            </a:r>
-          </a:p>
-        </p:txBody>
-      </p:sp>
-      <p:sp>
-        <p:nvSpPr>
-          <p:cNvPr id="3" name="Title 2"/>
-          <p:cNvSpPr>
-            <a:spLocks noGrp="1"/>
-          </p:cNvSpPr>
-          <p:nvPr>
-            <p:ph type="title" idx="2"/>
-          </p:nvPr>
-        </p:nvSpPr>
-        <p:spPr>
-          <a:xfrm>
-            <a:off x="75895" y="0"/>
-            <a:ext cx="8115300" cy="480060"/>
-          </a:xfrm>
-        </p:spPr>
-        <p:txBody>
-          <a:bodyPr wrap="square" lIns="0" rIns="0" tIns="0" bIns="0" anchor="ctr">
-            <a:noAutofit/>
-          </a:bodyPr>
-          <a:lstStyle/>
-          <a:p>
-            <a:pPr algn="l">
-              <a:lnSpc>
-                <a:spcPct val="110000"/>
-              </a:lnSpc>
-              <a:buNone/>
-              <a:defRPr sz="1400" b="0">
-                <a:solidFill>
-                  <a:srgbClr val="303437"/>
-                </a:solidFill>
-                <a:latin typeface="Noto Sans"/>
-              </a:defRPr>
-            </a:pPr>
-            <a:r>
-              <a:rPr sz="1400" b="1" lang="ja-JP" altLang="en-US">
-                <a:solidFill>
-                  <a:srgbClr val="FFFEF8"/>
-                </a:solidFill>
-                <a:latin typeface="Noto Sans"/>
-                <a:ea typeface="Noto Sans CJK JP"/>
-                <a:cs typeface="Noto Sans"/>
-              </a:rPr>
-              <a:t>Appendix: 2. 採点と生成の詳細</a:t>
-            </a:r>
-          </a:p>
-        </p:txBody>
-      </p:sp>
-      <p:graphicFrame>
-        <p:nvGraphicFramePr>
-          <p:cNvPr id="4" name="Table 3"/>
-          <p:cNvGraphicFramePr>
-            <a:graphicFrameLocks noGrp="1"/>
-          </p:cNvGraphicFramePr>
-          <p:nvPr/>
-        </p:nvGraphicFramePr>
-        <p:xfrm>
-          <a:off x="548640" y="1508760"/>
-          <a:ext cx="8046720" cy="1371600"/>
-        </p:xfrm>
-        <a:graphic>
-          <a:graphicData uri="http://schemas.openxmlformats.org/drawingml/2006/table">
-            <a:tbl>
-              <a:tblPr firstRow="0" bandRow="0"/>
-              <a:tblGrid>
-                <a:gridCol w="4846320"/>
-                <a:gridCol w="3200400"/>
-              </a:tblGrid>
-              <a:tr h="457200">
-                <a:tc>
-                  <a:txBody>
-                    <a:bodyPr wrap="square">
-                      <a:noAutofit/>
-                    </a:bodyPr>
-                    <a:lstStyle/>
-                    <a:p>
-                      <a:pPr algn="l">
-                        <a:lnSpc>
-                          <a:spcPts val="2300"/>
-                        </a:lnSpc>
-                        <a:buNone/>
-                        <a:defRPr sz="2000" b="0">
-                          <a:solidFill>
-                            <a:srgbClr val="303437"/>
-                          </a:solidFill>
-                          <a:latin typeface="Noto Sans"/>
-                        </a:defRPr>
-                      </a:pPr>
-                      <a:r>
-                        <a:rPr sz="2000" b="0" lang="ja-JP" altLang="en-US">
-                          <a:solidFill>
-                            <a:srgbClr val="303437"/>
-                          </a:solidFill>
-                          <a:latin typeface="Noto Sans"/>
-                          <a:ea typeface="Noto Sans CJK JP"/>
-                          <a:cs typeface="Noto Sans"/>
-                        </a:rPr>
-                        <a:t>特徴</a:t>
-                      </a:r>
-                    </a:p>
-                  </a:txBody>
-                  <a:tcPr marL="63500" marR="63500" marT="38100" marB="38100" anchor="ctr">
-                    <a:lnL w="7620">
-                      <a:noFill/>
-                    </a:lnL>
-                    <a:lnR w="7620">
-                      <a:noFill/>
-                    </a:lnR>
-                    <a:lnT w="15240">
-                      <a:solidFill>
-                        <a:srgbClr val="626669"/>
-                      </a:solidFill>
-                      <a:prstDash val="solid"/>
-                    </a:lnT>
-                    <a:lnB w="7620">
-                      <a:solidFill>
-                        <a:srgbClr val="626669"/>
-                      </a:solidFill>
-                      <a:prstDash val="solid"/>
-                    </a:lnB>
-                    <a:solidFill>
-                      <a:srgbClr val="FFFEF8"/>
-                    </a:solidFill>
-                  </a:tcPr>
-                </a:tc>
-                <a:tc>
-                  <a:txBody>
-                    <a:bodyPr wrap="square">
-                      <a:noAutofit/>
-                    </a:bodyPr>
-                    <a:lstStyle/>
-                    <a:p>
-                      <a:pPr algn="l">
-                        <a:lnSpc>
-                          <a:spcPts val="2300"/>
-                        </a:lnSpc>
-                        <a:buNone/>
-                        <a:defRPr sz="2000" b="0">
-                          <a:solidFill>
-                            <a:srgbClr val="303437"/>
-                          </a:solidFill>
-                          <a:latin typeface="Noto Sans"/>
-                        </a:defRPr>
-                      </a:pPr>
-                      <a:r>
-                        <a:rPr sz="2000" b="0" lang="ja-JP" altLang="en-US">
-                          <a:solidFill>
-                            <a:srgbClr val="303437"/>
-                          </a:solidFill>
-                          <a:latin typeface="Noto Sans"/>
-                          <a:ea typeface="Noto Sans CJK JP"/>
-                          <a:cs typeface="Noto Sans"/>
-                        </a:rPr>
-                        <a:t>seed42 / test 5,000例</a:t>
-                      </a:r>
-                    </a:p>
-                  </a:txBody>
-                  <a:tcPr marL="63500" marR="63500" marT="38100" marB="38100" anchor="ctr">
-                    <a:lnL w="7620">
-                      <a:noFill/>
-                    </a:lnL>
-                    <a:lnR w="7620">
-                      <a:noFill/>
-                    </a:lnR>
-                    <a:lnT w="15240">
-                      <a:solidFill>
-                        <a:srgbClr val="626669"/>
-                      </a:solidFill>
-                      <a:prstDash val="solid"/>
-                    </a:lnT>
-                    <a:lnB w="7620">
-                      <a:solidFill>
-                        <a:srgbClr val="626669"/>
-                      </a:solidFill>
-                      <a:prstDash val="solid"/>
-                    </a:lnB>
-                    <a:solidFill>
-                      <a:srgbClr val="FFFEF8"/>
-                    </a:solidFill>
-                  </a:tcPr>
-                </a:tc>
-              </a:tr>
-              <a:tr h="457200">
-                <a:tc>
-                  <a:txBody>
-                    <a:bodyPr wrap="square">
-                      <a:noAutofit/>
-                    </a:bodyPr>
-                    <a:lstStyle/>
-                    <a:p>
-                      <a:pPr algn="l">
-                        <a:lnSpc>
-                          <a:spcPts val="2300"/>
-                        </a:lnSpc>
-                        <a:buNone/>
-                        <a:defRPr sz="2000" b="0">
-                          <a:solidFill>
-                            <a:srgbClr val="303437"/>
-                          </a:solidFill>
-                          <a:latin typeface="Noto Sans"/>
-                        </a:defRPr>
-                      </a:pPr>
-                      <a:r>
-                        <a:rPr sz="2000" b="0" lang="ja-JP" altLang="en-US">
-                          <a:solidFill>
-                            <a:srgbClr val="303437"/>
-                          </a:solidFill>
-                          <a:latin typeface="Noto Sans"/>
-                          <a:ea typeface="Noto Sans CJK JP"/>
-                          <a:cs typeface="Noto Sans"/>
-                        </a:rPr>
-                        <a:t>候補の文字列に重複がある</a:t>
-                      </a:r>
-                    </a:p>
-                  </a:txBody>
-                  <a:tcPr marL="63500" marR="63500" marT="38100" marB="38100" anchor="ctr">
-                    <a:lnL w="7620">
-                      <a:noFill/>
-                    </a:lnL>
-                    <a:lnR w="7620">
-                      <a:noFill/>
-                    </a:lnR>
-                    <a:lnT w="7620">
-                      <a:solidFill>
-                        <a:srgbClr val="626669"/>
-                      </a:solidFill>
-                      <a:prstDash val="solid"/>
-                    </a:lnT>
-                    <a:lnB w="7620">
-                      <a:noFill/>
-                    </a:lnB>
-                    <a:solidFill>
-                      <a:srgbClr val="FFFEF8"/>
-                    </a:solidFill>
-                  </a:tcPr>
-                </a:tc>
-                <a:tc>
-                  <a:txBody>
-                    <a:bodyPr wrap="square">
-                      <a:noAutofit/>
-                    </a:bodyPr>
-                    <a:lstStyle/>
-                    <a:p>
-                      <a:pPr algn="l">
-                        <a:lnSpc>
-                          <a:spcPts val="2300"/>
-                        </a:lnSpc>
-                        <a:buNone/>
-                        <a:defRPr sz="2000" b="0">
-                          <a:solidFill>
-                            <a:srgbClr val="303437"/>
-                          </a:solidFill>
-                          <a:latin typeface="Noto Sans"/>
-                        </a:defRPr>
-                      </a:pPr>
-                      <a:r>
-                        <a:rPr sz="2000" b="0" lang="ja-JP" altLang="en-US">
-                          <a:solidFill>
-                            <a:srgbClr val="303437"/>
-                          </a:solidFill>
-                          <a:latin typeface="Noto Sans"/>
-                          <a:ea typeface="Noto Sans CJK JP"/>
-                          <a:cs typeface="Noto Sans"/>
-                        </a:rPr>
-                        <a:t>973例（19.46%）</a:t>
-                      </a:r>
-                    </a:p>
-                  </a:txBody>
-                  <a:tcPr marL="63500" marR="63500" marT="38100" marB="38100" anchor="ctr">
-                    <a:lnL w="7620">
-                      <a:noFill/>
-                    </a:lnL>
-                    <a:lnR w="7620">
-                      <a:noFill/>
-                    </a:lnR>
-                    <a:lnT w="7620">
-                      <a:solidFill>
-                        <a:srgbClr val="626669"/>
-                      </a:solidFill>
-                      <a:prstDash val="solid"/>
-                    </a:lnT>
-                    <a:lnB w="7620">
-                      <a:noFill/>
-                    </a:lnB>
-                    <a:solidFill>
-                      <a:srgbClr val="FFFEF8"/>
-                    </a:solidFill>
-                  </a:tcPr>
-                </a:tc>
-              </a:tr>
-              <a:tr h="457200">
-                <a:tc>
-                  <a:txBody>
-                    <a:bodyPr wrap="square">
-                      <a:noAutofit/>
-                    </a:bodyPr>
-                    <a:lstStyle/>
-                    <a:p>
-                      <a:pPr algn="l">
-                        <a:lnSpc>
-                          <a:spcPts val="2300"/>
-                        </a:lnSpc>
-                        <a:buNone/>
-                        <a:defRPr sz="2000" b="0">
-                          <a:solidFill>
-                            <a:srgbClr val="303437"/>
-                          </a:solidFill>
-                          <a:latin typeface="Noto Sans"/>
-                        </a:defRPr>
-                      </a:pPr>
-                      <a:r>
-                        <a:rPr sz="2000" b="0" lang="ja-JP" altLang="en-US">
-                          <a:solidFill>
-                            <a:srgbClr val="303437"/>
-                          </a:solidFill>
-                          <a:latin typeface="Noto Sans"/>
-                          <a:ea typeface="Noto Sans CJK JP"/>
-                          <a:cs typeface="Noto Sans"/>
-                        </a:rPr>
-                        <a:t>正解だけが最長の候補になる</a:t>
-                      </a:r>
-                    </a:p>
-                  </a:txBody>
-                  <a:tcPr marL="63500" marR="63500" marT="38100" marB="38100" anchor="ctr">
-                    <a:lnL w="7620">
-                      <a:noFill/>
-                    </a:lnL>
-                    <a:lnR w="7620">
-                      <a:noFill/>
-                    </a:lnR>
-                    <a:lnT w="7620">
-                      <a:noFill/>
-                    </a:lnT>
-                    <a:lnB w="15240">
-                      <a:solidFill>
-                        <a:srgbClr val="626669"/>
-                      </a:solidFill>
-                      <a:prstDash val="solid"/>
-                    </a:lnB>
-                    <a:solidFill>
-                      <a:srgbClr val="FFFEF8"/>
-                    </a:solidFill>
-                  </a:tcPr>
-                </a:tc>
-                <a:tc>
-                  <a:txBody>
-                    <a:bodyPr wrap="square">
-                      <a:noAutofit/>
-                    </a:bodyPr>
-                    <a:lstStyle/>
-                    <a:p>
-                      <a:pPr algn="l">
-                        <a:lnSpc>
-                          <a:spcPts val="2300"/>
-                        </a:lnSpc>
-                        <a:buNone/>
-                        <a:defRPr sz="2000" b="0">
-                          <a:solidFill>
-                            <a:srgbClr val="303437"/>
-                          </a:solidFill>
-                          <a:latin typeface="Noto Sans"/>
-                        </a:defRPr>
-                      </a:pPr>
-                      <a:r>
-                        <a:rPr sz="2000" b="0" lang="ja-JP" altLang="en-US">
-                          <a:solidFill>
-                            <a:srgbClr val="303437"/>
-                          </a:solidFill>
-                          <a:latin typeface="Noto Sans"/>
-                          <a:ea typeface="Noto Sans CJK JP"/>
-                          <a:cs typeface="Noto Sans"/>
-                        </a:rPr>
-                        <a:t>2,826例（56.52%）</a:t>
-                      </a:r>
-                    </a:p>
-                  </a:txBody>
-                  <a:tcPr marL="63500" marR="63500" marT="38100" marB="38100" anchor="ctr">
-                    <a:lnL w="7620">
-                      <a:noFill/>
-                    </a:lnL>
-                    <a:lnR w="7620">
-                      <a:noFill/>
-                    </a:lnR>
-                    <a:lnT w="7620">
-                      <a:noFill/>
-                    </a:lnT>
-                    <a:lnB w="15240">
-                      <a:solidFill>
-                        <a:srgbClr val="626669"/>
-                      </a:solidFill>
-                      <a:prstDash val="solid"/>
-                    </a:lnB>
-                    <a:solidFill>
-                      <a:srgbClr val="FFFEF8"/>
-                    </a:solidFill>
-                  </a:tcPr>
-                </a:tc>
-              </a:tr>
-            </a:tbl>
-          </a:graphicData>
-        </a:graphic>
-      </p:graphicFrame>
-      <p:sp>
-        <p:nvSpPr>
-          <p:cNvPr id="5" name="TextBox 4"/>
-          <p:cNvSpPr txBox="1"/>
-          <p:nvPr/>
-        </p:nvSpPr>
-        <p:spPr>
-          <a:xfrm>
-            <a:off x="594360" y="3081528"/>
-            <a:ext cx="7955279" cy="658368"/>
-          </a:xfrm>
-          <a:prstGeom prst="rect">
-            <a:avLst/>
-          </a:prstGeom>
-          <a:noFill/>
-        </p:spPr>
-        <p:txBody>
-          <a:bodyPr wrap="square" lIns="0" rIns="0" tIns="0" bIns="0">
-            <a:noAutofit/>
-          </a:bodyPr>
-          <a:lstStyle/>
-          <a:p>
-            <a:pPr algn="l">
-              <a:lnSpc>
-                <a:spcPts val="2047"/>
-              </a:lnSpc>
-              <a:spcBef>
-                <a:spcPts val="0"/>
-              </a:spcBef>
-              <a:spcAft>
-                <a:spcPts val="0"/>
-              </a:spcAft>
-              <a:buNone/>
-              <a:defRPr sz="1750" b="0">
-                <a:solidFill>
-                  <a:srgbClr val="303437"/>
-                </a:solidFill>
-                <a:latin typeface="Noto Sans"/>
-              </a:defRPr>
-            </a:pPr>
-            <a:r>
-              <a:rPr sz="1750" b="0" lang="ja-JP" altLang="en-US">
-                <a:solidFill>
-                  <a:srgbClr val="303437"/>
-                </a:solidFill>
-                <a:latin typeface="Noto Sans"/>
-                <a:ea typeface="Noto Sans CJK JP"/>
-                <a:cs typeface="Noto Sans"/>
-              </a:rPr>
-              <a:t>v0.4.0公式生成器の出力を独自集計。長さは空白で区切った要素数。正解と同じ候補文字列は1種類として扱う。</a:t>
-            </a:r>
-          </a:p>
-        </p:txBody>
-      </p:sp>
-      <p:sp>
-        <p:nvSpPr>
-          <p:cNvPr id="6" name="sources"/>
-          <p:cNvSpPr txBox="1"/>
-          <p:nvPr/>
-        </p:nvSpPr>
-        <p:spPr>
-          <a:xfrm>
-            <a:off x="502920" y="4700016"/>
-            <a:ext cx="8183879" cy="530352"/>
-          </a:xfrm>
-          <a:prstGeom prst="rect">
-            <a:avLst/>
-          </a:prstGeom>
-          <a:noFill/>
-        </p:spPr>
-        <p:txBody>
-          <a:bodyPr wrap="square" lIns="0" rIns="0" tIns="0" bIns="0">
-            <a:noAutofit/>
-          </a:bodyPr>
-          <a:lstStyle/>
-          <a:p>
-            <a:pPr algn="l">
-              <a:lnSpc>
-                <a:spcPts val="940"/>
-              </a:lnSpc>
-              <a:spcBef>
-                <a:spcPts val="0"/>
-              </a:spcBef>
-              <a:spcAft>
-                <a:spcPts val="140"/>
-              </a:spcAft>
-              <a:buNone/>
-              <a:defRPr sz="810" b="0">
-                <a:solidFill>
-                  <a:srgbClr val="303437"/>
-                </a:solidFill>
-                <a:latin typeface="Noto Sans"/>
-              </a:defRPr>
-            </a:pPr>
-            <a:r>
-              <a:rPr sz="810" b="0" lang="ja-JP" altLang="en-US">
-                <a:solidFill>
-                  <a:srgbClr val="626669"/>
-                </a:solidFill>
-                <a:latin typeface="Noto Sans"/>
-                <a:ea typeface="Noto Sans CJK JP"/>
-                <a:cs typeface="Noto Sans"/>
-              </a:rPr>
-              <a:t>[1] Stanford CRFM. SyntheticReasoningScenario, HELM v0.4.0.</a:t>
-            </a:r>
-          </a:p>
-          <a:p>
-            <a:pPr>
-              <a:lnSpc>
-                <a:spcPts val="940"/>
-              </a:lnSpc>
-              <a:buNone/>
-              <a:defRPr sz="810" b="0">
-                <a:solidFill>
-                  <a:srgbClr val="303437"/>
-                </a:solidFill>
-                <a:latin typeface="Noto Sans"/>
-              </a:defRPr>
-            </a:pPr>
-            <a:r>
-              <a:rPr sz="810" b="0" lang="ja-JP" altLang="en-US">
-                <a:solidFill>
-                  <a:srgbClr val="626669"/>
-                </a:solidFill>
-                <a:latin typeface="Noto Sans"/>
-                <a:ea typeface="Noto Sans CJK JP"/>
-                <a:cs typeface="Noto Sans"/>
-                <a:hlinkClick r:id="rId2"/>
-              </a:rPr>
-              <a:t>https://github.com/stanford-crfm/helm/blob/v0.4.0/src/helm/benchmark/scenarios/synthetic_reasoning_scenario.py</a:t>
+              <a:t>Appendix: 2. 語彙と生成の補足</a:t>
             </a:r>
           </a:p>
         </p:txBody>
@@ -28208,7 +23139,7 @@
                 <a:ea typeface="Noto Sans CJK JP"/>
                 <a:cs typeface="Noto Sans"/>
               </a:rPr>
-              <a:t>Nothing.の比率は生成結果から数える</a:t>
+              <a:t>新しい属性を導けない問題も含まれる</a:t>
             </a:r>
           </a:p>
         </p:txBody>
@@ -28256,7 +23187,7 @@
                 <a:ea typeface="Noto Sans CJK JP"/>
                 <a:cs typeface="Noto Sans"/>
               </a:rPr>
-              <a:t>Appendix: 2. 採点と生成の詳細</a:t>
+              <a:t>Appendix: 2. 語彙と生成の補足</a:t>
             </a:r>
           </a:p>
         </p:txBody>
@@ -28990,7 +23921,7 @@
                 <a:ea typeface="Noto Sans CJK JP"/>
                 <a:cs typeface="Noto Sans"/>
               </a:rPr>
-              <a:t>seed42、train/valid/testの合計。帰結が空のときに再抽選する処理を含むため、空の答えの割合は出力を数えて求めた。</a:t>
+              <a:t>既定設定で作った各11,000問を集計。規則を適用しても新しい属性が得られなければ、答えはNothing.となる。</a:t>
             </a:r>
           </a:p>
         </p:txBody>
@@ -29004,7 +23935,7 @@
         <p:spPr>
           <a:xfrm>
             <a:off x="502920" y="4700016"/>
-            <a:ext cx="8183879" cy="530352"/>
+            <a:ext cx="8183879" cy="621792"/>
           </a:xfrm>
           <a:prstGeom prst="rect">
             <a:avLst/>
@@ -29044,7 +23975,7 @@
                 <a:ea typeface="Noto Sans CJK JP"/>
                 <a:cs typeface="Noto Sans"/>
               </a:rPr>
-              <a:t>[1] Stanford CRFM. SRNScenario, HELM v0.4.0.</a:t>
+              <a:t>[1] Stanford CRFM. SRNScenario — 自然言語の合成課題。</a:t>
             </a:r>
           </a:p>
           <a:p>
@@ -29136,7 +24067,7 @@
                 <a:ea typeface="Noto Sans CJK JP"/>
                 <a:cs typeface="Noto Sans"/>
               </a:rPr>
-              <a:t>自然言語版は、語彙表で具体語を対応させる</a:t>
+              <a:t>hardは、具体語と一般語を対応させる</a:t>
             </a:r>
           </a:p>
         </p:txBody>
@@ -29189,7 +24120,7 @@
                 <a:ea typeface="Noto Sans CJK JP"/>
                 <a:cs typeface="Noto Sans"/>
               </a:rPr>
-              <a:t>一般属性25種の下に、big→huge / giant、small→tiny / little、old→ancient / antiqueなどの語を登録する。hardの事実は、この具体語で表現される。</a:t>
+              <a:t>一般属性25種に、big→huge / giant、small→tiny / little、old→ancient / antiqueなどの語を対応させる。hardの事実には、こうした具体語を使う。</a:t>
             </a:r>
           </a:p>
           <a:p>
@@ -29219,37 +24150,7 @@
                 <a:ea typeface="Noto Sans CJK JP"/>
                 <a:cs typeface="Noto Sans"/>
               </a:rPr>
-              <a:t>規則で使う属性は一般語である。正解の属性も一般語で出力され、採点時に同義語を別途まとめる処理はない。</a:t>
-            </a:r>
-          </a:p>
-          <a:p>
-            <a:pPr marL="457200" indent="-355600">
-              <a:lnSpc>
-                <a:spcPts val="2379"/>
-              </a:lnSpc>
-              <a:spcAft>
-                <a:spcPts val="0"/>
-              </a:spcAft>
-              <a:buSzPct val="66500"/>
-              <a:buFont typeface="Noto Sans CJK JP"/>
-              <a:buChar char="●"/>
-              <a:defRPr sz="2000" b="0">
-                <a:solidFill>
-                  <a:srgbClr val="303437"/>
-                </a:solidFill>
-                <a:latin typeface="Noto Sans"/>
-              </a:defRPr>
-            </a:pPr>
-            <a:r>
-              <a:rPr sz="2000" b="0" lang="ja-JP" altLang="en-US">
-                <a:solidFill>
-                  <a:srgbClr val="303437"/>
-                </a:solidFill>
-                <a:latin typeface="Noto Sans"/>
-                <a:ea typeface="Noto Sans CJK JP"/>
-                <a:cs typeface="Noto Sans"/>
-              </a:rPr>
-              <a:t>mediumは公式実装の説明に登場するが、Classic v0.4.0の公開run仕様はeasyとhardを使う。本資料もこの2設定を対象とする。</a:t>
+              <a:t>規則と正解には一般語を使う。入力の言い換えを一般属性へ対応させることが、hardの推論に含まれる。</a:t>
             </a:r>
           </a:p>
         </p:txBody>
@@ -29297,7 +24198,7 @@
                 <a:ea typeface="Noto Sans CJK JP"/>
                 <a:cs typeface="Noto Sans"/>
               </a:rPr>
-              <a:t>Appendix: 2. 採点と生成の詳細</a:t>
+              <a:t>Appendix: 2. 語彙と生成の補足</a:t>
             </a:r>
           </a:p>
         </p:txBody>
@@ -29311,7 +24212,7 @@
         <p:spPr>
           <a:xfrm>
             <a:off x="502920" y="4700016"/>
-            <a:ext cx="8183879" cy="530352"/>
+            <a:ext cx="8183879" cy="621792"/>
           </a:xfrm>
           <a:prstGeom prst="rect">
             <a:avLst/>
@@ -29351,7 +24252,7 @@
                 <a:ea typeface="Noto Sans CJK JP"/>
                 <a:cs typeface="Noto Sans"/>
               </a:rPr>
-              <a:t>[1] Stanford CRFM. SRNScenario, HELM v0.4.0.</a:t>
+              <a:t>[1] Stanford CRFM. SRNScenario — 自然言語の合成課題。</a:t>
             </a:r>
           </a:p>
           <a:p>
@@ -29496,7 +24397,7 @@
                 <a:ea typeface="Noto Sans CJK JP"/>
                 <a:cs typeface="Noto Sans"/>
               </a:rPr>
-              <a:t>HELMが作った小さな合成課題で、記号列の照合、変数の置換、規則の帰納を評価する。外部の事実知識をほとんど使わずに解けるよう設計された。</a:t>
+              <a:t>Stanford CRFM研究チームが2022年に設計した、推論の基本操作を調べる合成課題。抽象版は記号列の照合・変数置換・規則の帰納を扱う。</a:t>
             </a:r>
           </a:p>
           <a:p>
@@ -29526,7 +24427,7 @@
                 <a:ea typeface="Noto Sans CJK JP"/>
                 <a:cs typeface="Noto Sans"/>
               </a:rPr>
-              <a:t>自然言語版は、条件文の規則と1つの事実から、新たに導ける属性を答える。easyとhardを用意し、hardでは上位カテゴリや語の言い換えも扱う。</a:t>
+              <a:t>自然言語版は、条件文の規則と一つの事実から新しい属性を導く。easyとhardがあり、hardは上位カテゴリや語の言い換えも使う。</a:t>
             </a:r>
           </a:p>
           <a:p>
@@ -29556,7 +24457,7 @@
                 <a:ea typeface="Noto Sans CJK JP"/>
                 <a:cs typeface="Noto Sans"/>
               </a:rPr>
-              <a:t>抽象版と自然言語版は別の生成器である。同じ問題を英語へ直訳した組ではなく、推論の基本操作を異なる形式で試す。</a:t>
+              <a:t>二つの版は別の生成器で作る。それぞれの形式で、規則を読み取って適用できるかを調べる。</a:t>
             </a:r>
           </a:p>
         </p:txBody>
@@ -29617,8 +24518,8 @@
         </p:nvSpPr>
         <p:spPr>
           <a:xfrm>
-            <a:off x="502920" y="4700016"/>
-            <a:ext cx="8183879" cy="530352"/>
+            <a:off x="502920" y="4517136"/>
+            <a:ext cx="8183879" cy="621792"/>
           </a:xfrm>
           <a:prstGeom prst="rect">
             <a:avLst/>
@@ -29660,6 +24561,23 @@
               </a:rPr>
               <a:t>[1] Liang et al. (2023). Holistic Evaluation of Language Models. TMLR.</a:t>
             </a:r>
+          </a:p>
+          <a:p>
+            <a:pPr>
+              <a:lnSpc>
+                <a:spcPts val="940"/>
+              </a:lnSpc>
+              <a:spcAft>
+                <a:spcPts val="140"/>
+              </a:spcAft>
+              <a:buNone/>
+              <a:defRPr sz="810" b="0">
+                <a:solidFill>
+                  <a:srgbClr val="303437"/>
+                </a:solidFill>
+                <a:latin typeface="Noto Sans"/>
+              </a:defRPr>
+            </a:pPr>
             <a:r>
               <a:rPr sz="810" b="0" lang="ja-JP" altLang="en-US">
                 <a:solidFill>
@@ -29668,9 +24586,27 @@
                 <a:latin typeface="Noto Sans"/>
                 <a:ea typeface="Noto Sans CJK JP"/>
                 <a:cs typeface="Noto Sans"/>
-              </a:rPr>
-              <a:t>  </a:t>
-            </a:r>
+                <a:hlinkClick r:id="rId2"/>
+              </a:rPr>
+              <a:t>https://arxiv.org/abs/2211.09110</a:t>
+            </a:r>
+          </a:p>
+          <a:p>
+            <a:pPr>
+              <a:lnSpc>
+                <a:spcPts val="940"/>
+              </a:lnSpc>
+              <a:spcAft>
+                <a:spcPts val="140"/>
+              </a:spcAft>
+              <a:buNone/>
+              <a:defRPr sz="810" b="0">
+                <a:solidFill>
+                  <a:srgbClr val="303437"/>
+                </a:solidFill>
+                <a:latin typeface="Noto Sans"/>
+              </a:defRPr>
+            </a:pPr>
             <a:r>
               <a:rPr sz="810" b="0" lang="ja-JP" altLang="en-US">
                 <a:solidFill>
@@ -29679,9 +24615,8 @@
                 <a:latin typeface="Noto Sans"/>
                 <a:ea typeface="Noto Sans CJK JP"/>
                 <a:cs typeface="Noto Sans"/>
-                <a:hlinkClick r:id="rId2"/>
-              </a:rPr>
-              <a:t>https://arxiv.org/abs/2211.09110</a:t>
+              </a:rPr>
+              <a:t>[2] Stanford CRFM. Synthetic Reasoning — 公開生成器。</a:t>
             </a:r>
           </a:p>
           <a:p>
@@ -29700,28 +24635,6 @@
                 <a:latin typeface="Noto Sans"/>
               </a:defRPr>
             </a:pPr>
-            <a:r>
-              <a:rPr sz="810" b="0" lang="ja-JP" altLang="en-US">
-                <a:solidFill>
-                  <a:srgbClr val="626669"/>
-                </a:solidFill>
-                <a:latin typeface="Noto Sans"/>
-                <a:ea typeface="Noto Sans CJK JP"/>
-                <a:cs typeface="Noto Sans"/>
-              </a:rPr>
-              <a:t>[2] Stanford CRFM. HELM v0.4.0 公式生成器。</a:t>
-            </a:r>
-            <a:r>
-              <a:rPr sz="810" b="0" lang="ja-JP" altLang="en-US">
-                <a:solidFill>
-                  <a:srgbClr val="626669"/>
-                </a:solidFill>
-                <a:latin typeface="Noto Sans"/>
-                <a:ea typeface="Noto Sans CJK JP"/>
-                <a:cs typeface="Noto Sans"/>
-              </a:rPr>
-              <a:t>  </a:t>
-            </a:r>
             <a:r>
               <a:rPr sz="810" b="0" lang="ja-JP" altLang="en-US">
                 <a:solidFill>
@@ -29798,7 +24711,7 @@
                 <a:ea typeface="Noto Sans CJK JP"/>
                 <a:cs typeface="Noto Sans"/>
               </a:rPr>
-              <a:t>公式クラスを固定seedで初期化する</a:t>
+              <a:t>問題を生成し、入力と正解を取り出す</a:t>
             </a:r>
           </a:p>
         </p:txBody>
@@ -29846,7 +24759,7 @@
                 <a:ea typeface="Noto Sans CJK JP"/>
                 <a:cs typeface="Noto Sans"/>
               </a:rPr>
-              <a:t>Appendix: 2. 採点と生成の詳細</a:t>
+              <a:t>Appendix: 2. 語彙と生成の補足</a:t>
             </a:r>
           </a:p>
         </p:txBody>
@@ -29982,7 +24895,7 @@
                 <a:ea typeface="Noto Sans CJK JP"/>
                 <a:cs typeface="Liberation Mono"/>
               </a:rPr>
-              <a:t>    synthetic_reasoning_natural_scenario as nl,</a:t>
+              <a:t>)</a:t>
             </a:r>
           </a:p>
           <a:p>
@@ -30013,7 +24926,7 @@
                 <a:ea typeface="Noto Sans CJK JP"/>
                 <a:cs typeface="Liberation Mono"/>
               </a:rPr>
-              <a:t>)</a:t>
+              <a:t>task = sym.SyntheticReasoningScenario(</a:t>
             </a:r>
           </a:p>
           <a:p>
@@ -30044,7 +24957,7 @@
                 <a:ea typeface="Noto Sans CJK JP"/>
                 <a:cs typeface="Liberation Mono"/>
               </a:rPr>
-              <a:t>a = sym.SyntheticReasoningScenario(</a:t>
+              <a:t>    "variable_substitution", random_seed=42)</a:t>
             </a:r>
           </a:p>
           <a:p>
@@ -30075,7 +24988,7 @@
                 <a:ea typeface="Noto Sans CJK JP"/>
                 <a:cs typeface="Liberation Mono"/>
               </a:rPr>
-              <a:t>    mode="variable_substitution", random_seed=42</a:t>
+              <a:t>example = task.get_instances("")[6000]</a:t>
             </a:r>
           </a:p>
           <a:p>
@@ -30106,7 +25019,7 @@
                 <a:ea typeface="Noto Sans CJK JP"/>
                 <a:cs typeface="Liberation Mono"/>
               </a:rPr>
-              <a:t>)</a:t>
+              <a:t>print(example.input.text)</a:t>
             </a:r>
           </a:p>
           <a:p>
@@ -30137,7 +25050,7 @@
                 <a:ea typeface="Noto Sans CJK JP"/>
                 <a:cs typeface="Liberation Mono"/>
               </a:rPr>
-              <a:t>example = a.get_instances("unused")[6000]</a:t>
+              <a:t>print(example.references[0].output.text)</a:t>
             </a:r>
           </a:p>
         </p:txBody>
@@ -30151,7 +25064,7 @@
         <p:spPr>
           <a:xfrm>
             <a:off x="594360" y="3971543"/>
-            <a:ext cx="7955279" cy="457200"/>
+            <a:ext cx="7955279" cy="558800"/>
           </a:xfrm>
           <a:prstGeom prst="rect">
             <a:avLst/>
@@ -30191,7 +25104,7 @@
                 <a:ea typeface="Noto Sans CJK JP"/>
                 <a:cs typeface="Noto Sans"/>
               </a:rPr>
-              <a:t>HELM v0.4.0を使う。index6000は、生成順で最初のtest例。</a:t>
+              <a:t>公開実装を入れたPythonで実行する。変数置換問題を生成し、先頭のtest例の入力と正解を表示する。</a:t>
             </a:r>
           </a:p>
         </p:txBody>
@@ -30205,7 +25118,7 @@
         <p:spPr>
           <a:xfrm>
             <a:off x="502920" y="4700016"/>
-            <a:ext cx="8183879" cy="530352"/>
+            <a:ext cx="8183879" cy="621792"/>
           </a:xfrm>
           <a:prstGeom prst="rect">
             <a:avLst/>
@@ -30245,8 +25158,28 @@
                 <a:ea typeface="Noto Sans CJK JP"/>
                 <a:cs typeface="Noto Sans"/>
               </a:rPr>
-              <a:t>[1] Stanford CRFM. HELM v0.4.0 公式生成器。</a:t>
-            </a:r>
+              <a:t>[1] Stanford CRFM. SyntheticReasoningScenario — 記号列の合成課題。</a:t>
+            </a:r>
+          </a:p>
+          <a:p>
+            <a:pPr algn="l">
+              <a:lnSpc>
+                <a:spcPts val="940"/>
+              </a:lnSpc>
+              <a:spcBef>
+                <a:spcPts val="0"/>
+              </a:spcBef>
+              <a:spcAft>
+                <a:spcPts val="140"/>
+              </a:spcAft>
+              <a:buNone/>
+              <a:defRPr sz="810" b="0">
+                <a:solidFill>
+                  <a:srgbClr val="303437"/>
+                </a:solidFill>
+                <a:latin typeface="Noto Sans"/>
+              </a:defRPr>
+            </a:pPr>
             <a:r>
               <a:rPr sz="810" b="0" lang="ja-JP" altLang="en-US">
                 <a:solidFill>
@@ -30255,983 +25188,9 @@
                 <a:latin typeface="Noto Sans"/>
                 <a:ea typeface="Noto Sans CJK JP"/>
                 <a:cs typeface="Noto Sans"/>
-              </a:rPr>
-              <a:t>  </a:t>
-            </a:r>
-            <a:r>
-              <a:rPr sz="810" b="0" lang="ja-JP" altLang="en-US">
-                <a:solidFill>
-                  <a:srgbClr val="626669"/>
-                </a:solidFill>
-                <a:latin typeface="Noto Sans"/>
-                <a:ea typeface="Noto Sans CJK JP"/>
-                <a:cs typeface="Noto Sans"/>
-                <a:hlinkClick r:id="rId2"/>
-              </a:rPr>
-              <a:t>https://github.com/stanford-crfm/helm/tree/v0.4.0</a:t>
-            </a:r>
-          </a:p>
-        </p:txBody>
-      </p:sp>
-    </p:spTree>
-  </p:cSld>
-  <p:clrMapOvr>
-    <a:masterClrMapping/>
-  </p:clrMapOvr>
-</p:sld>
-</file>
-
-<file path=ppt/slides/slide51.xml><?xml version="1.0" encoding="utf-8"?>
-<p:sld xmlns:a="http://schemas.openxmlformats.org/drawingml/2006/main" xmlns:p="http://schemas.openxmlformats.org/presentationml/2006/main" xmlns:r="http://schemas.openxmlformats.org/officeDocument/2006/relationships">
-  <p:cSld>
-    <p:spTree>
-      <p:nvGrpSpPr>
-        <p:cNvPr id="1" name=""/>
-        <p:cNvGrpSpPr/>
-        <p:nvPr/>
-      </p:nvGrpSpPr>
-      <p:grpSpPr/>
-      <p:sp>
-        <p:nvSpPr>
-          <p:cNvPr id="2" name="Title 1"/>
-          <p:cNvSpPr>
-            <a:spLocks noGrp="1"/>
-          </p:cNvSpPr>
-          <p:nvPr>
-            <p:ph type="title"/>
-          </p:nvPr>
-        </p:nvSpPr>
-        <p:spPr>
-          <a:xfrm>
-            <a:off x="468172" y="650138"/>
-            <a:ext cx="8206740" cy="616305"/>
-          </a:xfrm>
-        </p:spPr>
-        <p:txBody>
-          <a:bodyPr wrap="square" lIns="0" rIns="0" tIns="0" bIns="0">
-            <a:noAutofit/>
-          </a:bodyPr>
-          <a:lstStyle/>
-          <a:p>
-            <a:pPr algn="l">
-              <a:lnSpc>
-                <a:spcPct val="110000"/>
-              </a:lnSpc>
-              <a:buNone/>
-              <a:defRPr sz="2800" b="0">
-                <a:solidFill>
-                  <a:srgbClr val="303437"/>
-                </a:solidFill>
-                <a:latin typeface="Noto Sans"/>
-              </a:defRPr>
-            </a:pPr>
-            <a:r>
-              <a:rPr sz="2800" b="1" lang="ja-JP" altLang="en-US">
-                <a:solidFill>
-                  <a:srgbClr val="303437"/>
-                </a:solidFill>
-                <a:latin typeface="Noto Sans"/>
-                <a:ea typeface="Noto Sans CJK JP"/>
-                <a:cs typeface="Noto Sans"/>
-              </a:rPr>
-              <a:t>生成器の初期化と乱数系列を固定する</a:t>
-            </a:r>
-          </a:p>
-        </p:txBody>
-      </p:sp>
-      <p:sp>
-        <p:nvSpPr>
-          <p:cNvPr id="3" name="Text Placeholder 2"/>
-          <p:cNvSpPr>
-            <a:spLocks noGrp="1"/>
-          </p:cNvSpPr>
-          <p:nvPr>
-            <p:ph type="body" idx="1"/>
-          </p:nvPr>
-        </p:nvSpPr>
-        <p:spPr>
-          <a:xfrm>
-            <a:off x="594360" y="1463040"/>
-            <a:ext cx="7955279" cy="3044952"/>
-          </a:xfrm>
-        </p:spPr>
-        <p:txBody>
-          <a:bodyPr wrap="square" tIns="91440" bIns="91440">
-            <a:noAutofit/>
-          </a:bodyPr>
-          <a:lstStyle/>
-          <a:p>
-            <a:pPr marL="457200" indent="-355600">
-              <a:lnSpc>
-                <a:spcPts val="2379"/>
-              </a:lnSpc>
-              <a:spcAft>
-                <a:spcPts val="700"/>
-              </a:spcAft>
-              <a:buSzPct val="66500"/>
-              <a:buFont typeface="Noto Sans CJK JP"/>
-              <a:buChar char="●"/>
-              <a:defRPr sz="2000" b="0">
-                <a:solidFill>
-                  <a:srgbClr val="303437"/>
-                </a:solidFill>
-                <a:latin typeface="Noto Sans"/>
-              </a:defRPr>
-            </a:pPr>
-            <a:r>
-              <a:rPr sz="2000" b="0" lang="ja-JP" altLang="en-US">
-                <a:solidFill>
-                  <a:srgbClr val="303437"/>
-                </a:solidFill>
-                <a:latin typeface="Noto Sans"/>
-                <a:ea typeface="Noto Sans CJK JP"/>
-                <a:cs typeface="Noto Sans"/>
-              </a:rPr>
-              <a:t>抽象版はNumPyのRandomStateをインスタンスの初期化時に作る。同じオブジェクトでget_instancesを繰り返すと乱数の位置が進むため、再生成には同じseedで新たに初期化する。</a:t>
-            </a:r>
-          </a:p>
-          <a:p>
-            <a:pPr marL="457200" indent="-355600">
-              <a:lnSpc>
-                <a:spcPts val="2379"/>
-              </a:lnSpc>
-              <a:spcAft>
-                <a:spcPts val="700"/>
-              </a:spcAft>
-              <a:buSzPct val="66500"/>
-              <a:buFont typeface="Noto Sans CJK JP"/>
-              <a:buChar char="●"/>
-              <a:defRPr sz="2000" b="0">
-                <a:solidFill>
-                  <a:srgbClr val="303437"/>
-                </a:solidFill>
-                <a:latin typeface="Noto Sans"/>
-              </a:defRPr>
-            </a:pPr>
-            <a:r>
-              <a:rPr sz="2000" b="0" lang="ja-JP" altLang="en-US">
-                <a:solidFill>
-                  <a:srgbClr val="303437"/>
-                </a:solidFill>
-                <a:latin typeface="Noto Sans"/>
-                <a:ea typeface="Noto Sans CJK JP"/>
-                <a:cs typeface="Noto Sans"/>
-              </a:rPr>
-              <a:t>自然言語版はget_instancesの開始時にPython random.seedを設定する。呼出しごとに同じseedから生成を始める。</a:t>
-            </a:r>
-          </a:p>
-          <a:p>
-            <a:pPr marL="457200" indent="-355600">
-              <a:lnSpc>
-                <a:spcPts val="2379"/>
-              </a:lnSpc>
-              <a:spcAft>
-                <a:spcPts val="0"/>
-              </a:spcAft>
-              <a:buSzPct val="66500"/>
-              <a:buFont typeface="Noto Sans CJK JP"/>
-              <a:buChar char="●"/>
-              <a:defRPr sz="2000" b="0">
-                <a:solidFill>
-                  <a:srgbClr val="303437"/>
-                </a:solidFill>
-                <a:latin typeface="Noto Sans"/>
-              </a:defRPr>
-            </a:pPr>
-            <a:r>
-              <a:rPr sz="2000" b="0" lang="ja-JP" altLang="en-US">
-                <a:solidFill>
-                  <a:srgbClr val="303437"/>
-                </a:solidFill>
-                <a:latin typeface="Noto Sans"/>
-                <a:ea typeface="Noto Sans CJK JP"/>
-                <a:cs typeface="Noto Sans"/>
-              </a:rPr>
-              <a:t>本資料は各モード・難度を新規に初期化した。入力・正解・モード・seed・indexと、未改変の公式ソースのSHA-256を原記録に保存した。</a:t>
-            </a:r>
-          </a:p>
-        </p:txBody>
-      </p:sp>
-      <p:sp>
-        <p:nvSpPr>
-          <p:cNvPr id="4" name="Title 3"/>
-          <p:cNvSpPr>
-            <a:spLocks noGrp="1"/>
-          </p:cNvSpPr>
-          <p:nvPr>
-            <p:ph type="title" idx="2"/>
-          </p:nvPr>
-        </p:nvSpPr>
-        <p:spPr>
-          <a:xfrm>
-            <a:off x="75895" y="0"/>
-            <a:ext cx="8115300" cy="480060"/>
-          </a:xfrm>
-        </p:spPr>
-        <p:txBody>
-          <a:bodyPr wrap="square" lIns="0" rIns="0" tIns="0" bIns="0" anchor="ctr">
-            <a:noAutofit/>
-          </a:bodyPr>
-          <a:lstStyle/>
-          <a:p>
-            <a:pPr algn="l">
-              <a:lnSpc>
-                <a:spcPct val="110000"/>
-              </a:lnSpc>
-              <a:buNone/>
-              <a:defRPr sz="1400" b="0">
-                <a:solidFill>
-                  <a:srgbClr val="303437"/>
-                </a:solidFill>
-                <a:latin typeface="Noto Sans"/>
-              </a:defRPr>
-            </a:pPr>
-            <a:r>
-              <a:rPr sz="1400" b="1" lang="ja-JP" altLang="en-US">
-                <a:solidFill>
-                  <a:srgbClr val="FFFEF8"/>
-                </a:solidFill>
-                <a:latin typeface="Noto Sans"/>
-                <a:ea typeface="Noto Sans CJK JP"/>
-                <a:cs typeface="Noto Sans"/>
-              </a:rPr>
-              <a:t>Appendix: 2. 採点と生成の詳細</a:t>
-            </a:r>
-          </a:p>
-        </p:txBody>
-      </p:sp>
-      <p:sp>
-        <p:nvSpPr>
-          <p:cNvPr id="5" name="sources"/>
-          <p:cNvSpPr txBox="1"/>
-          <p:nvPr/>
-        </p:nvSpPr>
-        <p:spPr>
-          <a:xfrm>
-            <a:off x="502920" y="4700016"/>
-            <a:ext cx="8183879" cy="530352"/>
-          </a:xfrm>
-          <a:prstGeom prst="rect">
-            <a:avLst/>
-          </a:prstGeom>
-          <a:noFill/>
-        </p:spPr>
-        <p:txBody>
-          <a:bodyPr wrap="square" lIns="0" rIns="0" tIns="0" bIns="0">
-            <a:noAutofit/>
-          </a:bodyPr>
-          <a:lstStyle/>
-          <a:p>
-            <a:pPr algn="l">
-              <a:lnSpc>
-                <a:spcPts val="940"/>
-              </a:lnSpc>
-              <a:spcBef>
-                <a:spcPts val="0"/>
-              </a:spcBef>
-              <a:spcAft>
-                <a:spcPts val="140"/>
-              </a:spcAft>
-              <a:buNone/>
-              <a:defRPr sz="810" b="0">
-                <a:solidFill>
-                  <a:srgbClr val="303437"/>
-                </a:solidFill>
-                <a:latin typeface="Noto Sans"/>
-              </a:defRPr>
-            </a:pPr>
-            <a:r>
-              <a:rPr sz="810" b="0" lang="ja-JP" altLang="en-US">
-                <a:solidFill>
-                  <a:srgbClr val="626669"/>
-                </a:solidFill>
-                <a:latin typeface="Noto Sans"/>
-                <a:ea typeface="Noto Sans CJK JP"/>
-                <a:cs typeface="Noto Sans"/>
-              </a:rPr>
-              <a:t>[1] Stanford CRFM. HELM v0.4.0 公式生成器。</a:t>
-            </a:r>
-            <a:r>
-              <a:rPr sz="810" b="0" lang="ja-JP" altLang="en-US">
-                <a:solidFill>
-                  <a:srgbClr val="626669"/>
-                </a:solidFill>
-                <a:latin typeface="Noto Sans"/>
-                <a:ea typeface="Noto Sans CJK JP"/>
-                <a:cs typeface="Noto Sans"/>
-              </a:rPr>
-              <a:t>  </a:t>
-            </a:r>
-            <a:r>
-              <a:rPr sz="810" b="0" lang="ja-JP" altLang="en-US">
-                <a:solidFill>
-                  <a:srgbClr val="626669"/>
-                </a:solidFill>
-                <a:latin typeface="Noto Sans"/>
-                <a:ea typeface="Noto Sans CJK JP"/>
-                <a:cs typeface="Noto Sans"/>
-                <a:hlinkClick r:id="rId2"/>
-              </a:rPr>
-              <a:t>https://github.com/stanford-crfm/helm/tree/v0.4.0</a:t>
-            </a:r>
-          </a:p>
-        </p:txBody>
-      </p:sp>
-    </p:spTree>
-  </p:cSld>
-  <p:clrMapOvr>
-    <a:masterClrMapping/>
-  </p:clrMapOvr>
-</p:sld>
-</file>
-
-<file path=ppt/slides/slide52.xml><?xml version="1.0" encoding="utf-8"?>
-<p:sld xmlns:a="http://schemas.openxmlformats.org/drawingml/2006/main" xmlns:p="http://schemas.openxmlformats.org/presentationml/2006/main" xmlns:r="http://schemas.openxmlformats.org/officeDocument/2006/relationships">
-  <p:cSld>
-    <p:spTree>
-      <p:nvGrpSpPr>
-        <p:cNvPr id="1" name=""/>
-        <p:cNvGrpSpPr/>
-        <p:nvPr/>
-      </p:nvGrpSpPr>
-      <p:grpSpPr/>
-      <p:sp>
-        <p:nvSpPr>
-          <p:cNvPr id="2" name="Title 1"/>
-          <p:cNvSpPr>
-            <a:spLocks noGrp="1"/>
-          </p:cNvSpPr>
-          <p:nvPr>
-            <p:ph type="title"/>
-          </p:nvPr>
-        </p:nvSpPr>
-        <p:spPr>
-          <a:xfrm>
-            <a:off x="468172" y="650138"/>
-            <a:ext cx="8206740" cy="616305"/>
-          </a:xfrm>
-        </p:spPr>
-        <p:txBody>
-          <a:bodyPr wrap="square" lIns="0" rIns="0" tIns="0" bIns="0">
-            <a:noAutofit/>
-          </a:bodyPr>
-          <a:lstStyle/>
-          <a:p>
-            <a:pPr algn="l">
-              <a:lnSpc>
-                <a:spcPct val="110000"/>
-              </a:lnSpc>
-              <a:buNone/>
-              <a:defRPr sz="2800" b="0">
-                <a:solidFill>
-                  <a:srgbClr val="303437"/>
-                </a:solidFill>
-                <a:latin typeface="Noto Sans"/>
-              </a:defRPr>
-            </a:pPr>
-            <a:r>
-              <a:rPr sz="2800" b="1" lang="ja-JP" altLang="en-US">
-                <a:solidFill>
-                  <a:srgbClr val="303437"/>
-                </a:solidFill>
-                <a:latin typeface="Noto Sans"/>
-                <a:ea typeface="Noto Sans CJK JP"/>
-                <a:cs typeface="Noto Sans"/>
-              </a:rPr>
-              <a:t>HELMの範囲と公開実行を対応させる</a:t>
-            </a:r>
-          </a:p>
-        </p:txBody>
-      </p:sp>
-      <p:sp>
-        <p:nvSpPr>
-          <p:cNvPr id="3" name="Text Placeholder 2"/>
-          <p:cNvSpPr>
-            <a:spLocks noGrp="1"/>
-          </p:cNvSpPr>
-          <p:nvPr>
-            <p:ph type="body" idx="1"/>
-          </p:nvPr>
-        </p:nvSpPr>
-        <p:spPr>
-          <a:xfrm>
-            <a:off x="594360" y="1463040"/>
-            <a:ext cx="7955279" cy="3044952"/>
-          </a:xfrm>
-        </p:spPr>
-        <p:txBody>
-          <a:bodyPr wrap="square" tIns="91440" bIns="91440">
-            <a:noAutofit/>
-          </a:bodyPr>
-          <a:lstStyle/>
-          <a:p>
-            <a:pPr marL="457200" indent="-355600">
-              <a:lnSpc>
-                <a:spcPts val="2379"/>
-              </a:lnSpc>
-              <a:spcAft>
-                <a:spcPts val="700"/>
-              </a:spcAft>
-              <a:buSzPct val="66500"/>
-              <a:buFont typeface="Noto Sans CJK JP"/>
-              <a:buChar char="●"/>
-              <a:defRPr sz="2000" b="0">
-                <a:solidFill>
-                  <a:srgbClr val="303437"/>
-                </a:solidFill>
-                <a:latin typeface="Noto Sans"/>
-              </a:defRPr>
-            </a:pPr>
-            <a:r>
-              <a:rPr sz="2000" b="0" lang="ja-JP" altLang="en-US">
-                <a:solidFill>
-                  <a:srgbClr val="303437"/>
-                </a:solidFill>
-                <a:latin typeface="Noto Sans"/>
-                <a:ea typeface="Noto Sans CJK JP"/>
-                <a:cs typeface="Noto Sans"/>
-              </a:rPr>
-              <a:t>Classic v0.4.0の公開run仕様は、抽象3課題と自然言語2難度に各69実行、合計345実行を含む。比較表には3系列のモデルから計15実行を選んだ。</a:t>
-            </a:r>
-          </a:p>
-          <a:p>
-            <a:pPr marL="457200" indent="-355600">
-              <a:lnSpc>
-                <a:spcPts val="2379"/>
-              </a:lnSpc>
-              <a:spcAft>
-                <a:spcPts val="700"/>
-              </a:spcAft>
-              <a:buSzPct val="66500"/>
-              <a:buFont typeface="Noto Sans CJK JP"/>
-              <a:buChar char="●"/>
-              <a:defRPr sz="2000" b="0">
-                <a:solidFill>
-                  <a:srgbClr val="303437"/>
-                </a:solidFill>
-                <a:latin typeface="Noto Sans"/>
-              </a:defRPr>
-            </a:pPr>
-            <a:r>
-              <a:rPr sz="2000" b="0" lang="ja-JP" altLang="en-US">
-                <a:solidFill>
-                  <a:srgbClr val="303437"/>
-                </a:solidFill>
-                <a:latin typeface="Noto Sans"/>
-                <a:ea typeface="Noto Sans CJK JP"/>
-                <a:cs typeface="Noto Sans"/>
-              </a:rPr>
-              <a:t>元run suiteはすべてv0.3.0。15実行の評価対象は各試行valid485 + test515で、本文の表はtest515だけを使う。</a:t>
-            </a:r>
-          </a:p>
-          <a:p>
-            <a:pPr marL="457200" indent="-355600">
-              <a:lnSpc>
-                <a:spcPts val="2379"/>
-              </a:lnSpc>
-              <a:spcAft>
-                <a:spcPts val="0"/>
-              </a:spcAft>
-              <a:buSzPct val="66500"/>
-              <a:buFont typeface="Noto Sans CJK JP"/>
-              <a:buChar char="●"/>
-              <a:defRPr sz="2000" b="0">
-                <a:solidFill>
-                  <a:srgbClr val="303437"/>
-                </a:solidFill>
-                <a:latin typeface="Noto Sans"/>
-              </a:defRPr>
-            </a:pPr>
-            <a:r>
-              <a:rPr sz="2000" b="0" lang="ja-JP" altLang="en-US">
-                <a:solidFill>
-                  <a:srgbClr val="303437"/>
-                </a:solidFill>
-                <a:latin typeface="Noto Sans"/>
-                <a:ea typeface="Noto Sans CJK JP"/>
-                <a:cs typeface="Noto Sans"/>
-              </a:rPr>
-              <a:t>Llama 2 70Bは各1試行、text-davinci-003とOPT-175Bは各3試行。</a:t>
-            </a:r>
-          </a:p>
-        </p:txBody>
-      </p:sp>
-      <p:sp>
-        <p:nvSpPr>
-          <p:cNvPr id="4" name="Title 3"/>
-          <p:cNvSpPr>
-            <a:spLocks noGrp="1"/>
-          </p:cNvSpPr>
-          <p:nvPr>
-            <p:ph type="title" idx="2"/>
-          </p:nvPr>
-        </p:nvSpPr>
-        <p:spPr>
-          <a:xfrm>
-            <a:off x="75895" y="0"/>
-            <a:ext cx="8115300" cy="480060"/>
-          </a:xfrm>
-        </p:spPr>
-        <p:txBody>
-          <a:bodyPr wrap="square" lIns="0" rIns="0" tIns="0" bIns="0" anchor="ctr">
-            <a:noAutofit/>
-          </a:bodyPr>
-          <a:lstStyle/>
-          <a:p>
-            <a:pPr algn="l">
-              <a:lnSpc>
-                <a:spcPct val="110000"/>
-              </a:lnSpc>
-              <a:buNone/>
-              <a:defRPr sz="1400" b="0">
-                <a:solidFill>
-                  <a:srgbClr val="303437"/>
-                </a:solidFill>
-                <a:latin typeface="Noto Sans"/>
-              </a:defRPr>
-            </a:pPr>
-            <a:r>
-              <a:rPr sz="1400" b="1" lang="ja-JP" altLang="en-US">
-                <a:solidFill>
-                  <a:srgbClr val="FFFEF8"/>
-                </a:solidFill>
-                <a:latin typeface="Noto Sans"/>
-                <a:ea typeface="Noto Sans CJK JP"/>
-                <a:cs typeface="Noto Sans"/>
-              </a:rPr>
-              <a:t>Appendix: 2. 採点と生成の詳細</a:t>
-            </a:r>
-          </a:p>
-        </p:txBody>
-      </p:sp>
-      <p:sp>
-        <p:nvSpPr>
-          <p:cNvPr id="5" name="sources"/>
-          <p:cNvSpPr txBox="1"/>
-          <p:nvPr/>
-        </p:nvSpPr>
-        <p:spPr>
-          <a:xfrm>
-            <a:off x="502920" y="4700016"/>
-            <a:ext cx="8183879" cy="530352"/>
-          </a:xfrm>
-          <a:prstGeom prst="rect">
-            <a:avLst/>
-          </a:prstGeom>
-          <a:noFill/>
-        </p:spPr>
-        <p:txBody>
-          <a:bodyPr wrap="square" lIns="0" rIns="0" tIns="0" bIns="0">
-            <a:noAutofit/>
-          </a:bodyPr>
-          <a:lstStyle/>
-          <a:p>
-            <a:pPr algn="l">
-              <a:lnSpc>
-                <a:spcPts val="940"/>
-              </a:lnSpc>
-              <a:spcBef>
-                <a:spcPts val="0"/>
-              </a:spcBef>
-              <a:spcAft>
-                <a:spcPts val="140"/>
-              </a:spcAft>
-              <a:buNone/>
-              <a:defRPr sz="810" b="0">
-                <a:solidFill>
-                  <a:srgbClr val="303437"/>
-                </a:solidFill>
-                <a:latin typeface="Noto Sans"/>
-              </a:defRPr>
-            </a:pPr>
-            <a:r>
-              <a:rPr sz="810" b="0" lang="ja-JP" altLang="en-US">
-                <a:solidFill>
-                  <a:srgbClr val="626669"/>
-                </a:solidFill>
-                <a:latin typeface="Noto Sans"/>
-                <a:ea typeface="Noto Sans CJK JP"/>
-                <a:cs typeface="Noto Sans"/>
-              </a:rPr>
-              <a:t>[1] Liang et al. (2023). Holistic Evaluation of Language Models. TMLR.</a:t>
-            </a:r>
-            <a:r>
-              <a:rPr sz="810" b="0" lang="ja-JP" altLang="en-US">
-                <a:solidFill>
-                  <a:srgbClr val="626669"/>
-                </a:solidFill>
-                <a:latin typeface="Noto Sans"/>
-                <a:ea typeface="Noto Sans CJK JP"/>
-                <a:cs typeface="Noto Sans"/>
-              </a:rPr>
-              <a:t>  </a:t>
-            </a:r>
-            <a:r>
-              <a:rPr sz="810" b="0" lang="ja-JP" altLang="en-US">
-                <a:solidFill>
-                  <a:srgbClr val="626669"/>
-                </a:solidFill>
-                <a:latin typeface="Noto Sans"/>
-                <a:ea typeface="Noto Sans CJK JP"/>
-                <a:cs typeface="Noto Sans"/>
-                <a:hlinkClick r:id="rId2"/>
-              </a:rPr>
-              <a:t>https://arxiv.org/abs/2211.09110</a:t>
-            </a:r>
-          </a:p>
-        </p:txBody>
-      </p:sp>
-    </p:spTree>
-  </p:cSld>
-  <p:clrMapOvr>
-    <a:masterClrMapping/>
-  </p:clrMapOvr>
-</p:sld>
-</file>
-
-<file path=ppt/slides/slide53.xml><?xml version="1.0" encoding="utf-8"?>
-<p:sld xmlns:a="http://schemas.openxmlformats.org/drawingml/2006/main" xmlns:p="http://schemas.openxmlformats.org/presentationml/2006/main" xmlns:r="http://schemas.openxmlformats.org/officeDocument/2006/relationships">
-  <p:cSld>
-    <p:spTree>
-      <p:nvGrpSpPr>
-        <p:cNvPr id="1" name=""/>
-        <p:cNvGrpSpPr/>
-        <p:nvPr/>
-      </p:nvGrpSpPr>
-      <p:grpSpPr/>
-      <p:sp>
-        <p:nvSpPr>
-          <p:cNvPr id="2" name="Title 1"/>
-          <p:cNvSpPr>
-            <a:spLocks noGrp="1"/>
-          </p:cNvSpPr>
-          <p:nvPr>
-            <p:ph type="title"/>
-          </p:nvPr>
-        </p:nvSpPr>
-        <p:spPr>
-          <a:xfrm>
-            <a:off x="468172" y="650138"/>
-            <a:ext cx="8206740" cy="616305"/>
-          </a:xfrm>
-        </p:spPr>
-        <p:txBody>
-          <a:bodyPr wrap="square" lIns="0" rIns="0" tIns="0" bIns="0">
-            <a:noAutofit/>
-          </a:bodyPr>
-          <a:lstStyle/>
-          <a:p>
-            <a:pPr algn="l">
-              <a:lnSpc>
-                <a:spcPct val="110000"/>
-              </a:lnSpc>
-              <a:buNone/>
-              <a:defRPr sz="2800" b="0">
-                <a:solidFill>
-                  <a:srgbClr val="303437"/>
-                </a:solidFill>
-                <a:latin typeface="Noto Sans"/>
-              </a:defRPr>
-            </a:pPr>
-            <a:r>
-              <a:rPr sz="2800" b="1" lang="ja-JP" altLang="en-US">
-                <a:solidFill>
-                  <a:srgbClr val="303437"/>
-                </a:solidFill>
-                <a:latin typeface="Noto Sans"/>
-                <a:ea typeface="Noto Sans CJK JP"/>
-                <a:cs typeface="Noto Sans"/>
-              </a:rPr>
-              <a:t>HELMの制作と、先行研究の役割</a:t>
-            </a:r>
-          </a:p>
-        </p:txBody>
-      </p:sp>
-      <p:sp>
-        <p:nvSpPr>
-          <p:cNvPr id="3" name="Text Placeholder 2"/>
-          <p:cNvSpPr>
-            <a:spLocks noGrp="1"/>
-          </p:cNvSpPr>
-          <p:nvPr>
-            <p:ph type="body" idx="1"/>
-          </p:nvPr>
-        </p:nvSpPr>
-        <p:spPr>
-          <a:xfrm>
-            <a:off x="594360" y="1463040"/>
-            <a:ext cx="7955279" cy="3044952"/>
-          </a:xfrm>
-        </p:spPr>
-        <p:txBody>
-          <a:bodyPr wrap="square" tIns="91440" bIns="91440">
-            <a:noAutofit/>
-          </a:bodyPr>
-          <a:lstStyle/>
-          <a:p>
-            <a:pPr marL="457200" indent="-355600">
-              <a:lnSpc>
-                <a:spcPts val="2379"/>
-              </a:lnSpc>
-              <a:spcAft>
-                <a:spcPts val="700"/>
-              </a:spcAft>
-              <a:buSzPct val="66500"/>
-              <a:buFont typeface="Noto Sans CJK JP"/>
-              <a:buChar char="●"/>
-              <a:defRPr sz="2000" b="0">
-                <a:solidFill>
-                  <a:srgbClr val="303437"/>
-                </a:solidFill>
-                <a:latin typeface="Noto Sans"/>
-              </a:defRPr>
-            </a:pPr>
-            <a:r>
-              <a:rPr sz="2000" b="0" lang="ja-JP" altLang="en-US">
-                <a:solidFill>
-                  <a:srgbClr val="303437"/>
-                </a:solidFill>
-                <a:latin typeface="Noto Sans"/>
-                <a:ea typeface="Noto Sans CJK JP"/>
-                <a:cs typeface="Noto Sans"/>
-              </a:rPr>
-              <a:t>HELMはStanford CRFMのPercy Liangらによる評価基盤で、2022年に公開され、2023年にTMLRへ掲載された。Synthetic Reasoningの生成器と結果も、その基盤の一部として公開された。</a:t>
-            </a:r>
-          </a:p>
-          <a:p>
-            <a:pPr marL="457200" indent="-355600">
-              <a:lnSpc>
-                <a:spcPts val="2379"/>
-              </a:lnSpc>
-              <a:spcAft>
-                <a:spcPts val="700"/>
-              </a:spcAft>
-              <a:buSzPct val="66500"/>
-              <a:buFont typeface="Noto Sans CJK JP"/>
-              <a:buChar char="●"/>
-              <a:defRPr sz="2000" b="0">
-                <a:solidFill>
-                  <a:srgbClr val="303437"/>
-                </a:solidFill>
-                <a:latin typeface="Noto Sans"/>
-              </a:defRPr>
-            </a:pPr>
-            <a:r>
-              <a:rPr sz="2000" b="0" lang="ja-JP" altLang="en-US">
-                <a:solidFill>
-                  <a:srgbClr val="303437"/>
-                </a:solidFill>
-                <a:latin typeface="Noto Sans"/>
-                <a:ea typeface="Noto Sans CJK JP"/>
-                <a:cs typeface="Noto Sans"/>
-              </a:rPr>
-              <a:t>HELMの貢献者一覧には、Eric ZelikmanとQian Huangが合成推論シナリオを実装したことが記されている。</a:t>
-            </a:r>
-          </a:p>
-          <a:p>
-            <a:pPr marL="457200" indent="-355600">
-              <a:lnSpc>
-                <a:spcPts val="2379"/>
-              </a:lnSpc>
-              <a:spcAft>
-                <a:spcPts val="0"/>
-              </a:spcAft>
-              <a:buSzPct val="66500"/>
-              <a:buFont typeface="Noto Sans CJK JP"/>
-              <a:buChar char="●"/>
-              <a:defRPr sz="2000" b="0">
-                <a:solidFill>
-                  <a:srgbClr val="303437"/>
-                </a:solidFill>
-                <a:latin typeface="Noto Sans"/>
-              </a:defRPr>
-            </a:pPr>
-            <a:r>
-              <a:rPr sz="2000" b="0" lang="ja-JP" altLang="en-US">
-                <a:solidFill>
-                  <a:srgbClr val="303437"/>
-                </a:solidFill>
-                <a:latin typeface="Noto Sans"/>
-                <a:ea typeface="Noto Sans CJK JP"/>
-                <a:cs typeface="Noto Sans"/>
-              </a:rPr>
-              <a:t>LIMEの第一著者Yuhuai Wuらは合成課題での事前学習を研究し、Clark、Tafjord、Richardsonは自然言語による規則推論を研究した。これらはHELMの課題設計の出発点となった。</a:t>
-            </a:r>
-          </a:p>
-        </p:txBody>
-      </p:sp>
-      <p:sp>
-        <p:nvSpPr>
-          <p:cNvPr id="4" name="Title 3"/>
-          <p:cNvSpPr>
-            <a:spLocks noGrp="1"/>
-          </p:cNvSpPr>
-          <p:nvPr>
-            <p:ph type="title" idx="2"/>
-          </p:nvPr>
-        </p:nvSpPr>
-        <p:spPr>
-          <a:xfrm>
-            <a:off x="75895" y="0"/>
-            <a:ext cx="8115300" cy="480060"/>
-          </a:xfrm>
-        </p:spPr>
-        <p:txBody>
-          <a:bodyPr wrap="square" lIns="0" rIns="0" tIns="0" bIns="0" anchor="ctr">
-            <a:noAutofit/>
-          </a:bodyPr>
-          <a:lstStyle/>
-          <a:p>
-            <a:pPr algn="l">
-              <a:lnSpc>
-                <a:spcPct val="110000"/>
-              </a:lnSpc>
-              <a:buNone/>
-              <a:defRPr sz="1400" b="0">
-                <a:solidFill>
-                  <a:srgbClr val="303437"/>
-                </a:solidFill>
-                <a:latin typeface="Noto Sans"/>
-              </a:defRPr>
-            </a:pPr>
-            <a:r>
-              <a:rPr sz="1400" b="1" lang="ja-JP" altLang="en-US">
-                <a:solidFill>
-                  <a:srgbClr val="FFFEF8"/>
-                </a:solidFill>
-                <a:latin typeface="Noto Sans"/>
-                <a:ea typeface="Noto Sans CJK JP"/>
-                <a:cs typeface="Noto Sans"/>
-              </a:rPr>
-              <a:t>Appendix: 3. 制作・関連研究と参考文献</a:t>
-            </a:r>
-          </a:p>
-        </p:txBody>
-      </p:sp>
-      <p:sp>
-        <p:nvSpPr>
-          <p:cNvPr id="5" name="sources"/>
-          <p:cNvSpPr txBox="1"/>
-          <p:nvPr/>
-        </p:nvSpPr>
-        <p:spPr>
-          <a:xfrm>
-            <a:off x="502920" y="4700016"/>
-            <a:ext cx="8183879" cy="530352"/>
-          </a:xfrm>
-          <a:prstGeom prst="rect">
-            <a:avLst/>
-          </a:prstGeom>
-          <a:noFill/>
-        </p:spPr>
-        <p:txBody>
-          <a:bodyPr wrap="square" lIns="0" rIns="0" tIns="0" bIns="0">
-            <a:noAutofit/>
-          </a:bodyPr>
-          <a:lstStyle/>
-          <a:p>
-            <a:pPr algn="l">
-              <a:lnSpc>
-                <a:spcPts val="940"/>
-              </a:lnSpc>
-              <a:spcBef>
-                <a:spcPts val="0"/>
-              </a:spcBef>
-              <a:spcAft>
-                <a:spcPts val="140"/>
-              </a:spcAft>
-              <a:buNone/>
-              <a:defRPr sz="810" b="0">
-                <a:solidFill>
-                  <a:srgbClr val="303437"/>
-                </a:solidFill>
-                <a:latin typeface="Noto Sans"/>
-              </a:defRPr>
-            </a:pPr>
-            <a:r>
-              <a:rPr sz="810" b="0" lang="ja-JP" altLang="en-US">
-                <a:solidFill>
-                  <a:srgbClr val="626669"/>
-                </a:solidFill>
-                <a:latin typeface="Noto Sans"/>
-                <a:ea typeface="Noto Sans CJK JP"/>
-                <a:cs typeface="Noto Sans"/>
-              </a:rPr>
-              <a:t>[1] Liang et al. (2023). Holistic Evaluation of Language Models. TMLR.</a:t>
-            </a:r>
-            <a:r>
-              <a:rPr sz="810" b="0" lang="ja-JP" altLang="en-US">
-                <a:solidFill>
-                  <a:srgbClr val="626669"/>
-                </a:solidFill>
-                <a:latin typeface="Noto Sans"/>
-                <a:ea typeface="Noto Sans CJK JP"/>
-                <a:cs typeface="Noto Sans"/>
-              </a:rPr>
-              <a:t>  </a:t>
-            </a:r>
-            <a:r>
-              <a:rPr sz="810" b="0" lang="ja-JP" altLang="en-US">
-                <a:solidFill>
-                  <a:srgbClr val="626669"/>
-                </a:solidFill>
-                <a:latin typeface="Noto Sans"/>
-                <a:ea typeface="Noto Sans CJK JP"/>
-                <a:cs typeface="Noto Sans"/>
-                <a:hlinkClick r:id="rId2"/>
-              </a:rPr>
-              <a:t>https://arxiv.org/abs/2211.09110</a:t>
-            </a:r>
-          </a:p>
-          <a:p>
-            <a:pPr>
-              <a:lnSpc>
-                <a:spcPts val="940"/>
-              </a:lnSpc>
-              <a:spcAft>
-                <a:spcPts val="140"/>
-              </a:spcAft>
-              <a:buNone/>
-              <a:defRPr sz="810" b="0">
-                <a:solidFill>
-                  <a:srgbClr val="303437"/>
-                </a:solidFill>
-                <a:latin typeface="Noto Sans"/>
-              </a:defRPr>
-            </a:pPr>
-            <a:r>
-              <a:rPr sz="810" b="0" lang="ja-JP" altLang="en-US">
-                <a:solidFill>
-                  <a:srgbClr val="626669"/>
-                </a:solidFill>
-                <a:latin typeface="Noto Sans"/>
-                <a:ea typeface="Noto Sans CJK JP"/>
-                <a:cs typeface="Noto Sans"/>
-              </a:rPr>
-              <a:t>[2] Wu et al. (2021). LIME: Learning Inductive Bias for Primitives of Mathematical Reasoning. ICML.</a:t>
-            </a:r>
-            <a:r>
-              <a:rPr sz="810" b="0" lang="ja-JP" altLang="en-US">
-                <a:solidFill>
-                  <a:srgbClr val="626669"/>
-                </a:solidFill>
-                <a:latin typeface="Noto Sans"/>
-                <a:ea typeface="Noto Sans CJK JP"/>
-                <a:cs typeface="Noto Sans"/>
-              </a:rPr>
-              <a:t>  </a:t>
-            </a:r>
-            <a:r>
-              <a:rPr sz="810" b="0" lang="ja-JP" altLang="en-US">
-                <a:solidFill>
-                  <a:srgbClr val="626669"/>
-                </a:solidFill>
-                <a:latin typeface="Noto Sans"/>
-                <a:ea typeface="Noto Sans CJK JP"/>
-                <a:cs typeface="Noto Sans"/>
                 <a:hlinkClick r:id="rId3"/>
               </a:rPr>
-              <a:t>https://proceedings.mlr.press/v139/wu21c.html</a:t>
+              <a:t>https://github.com/stanford-crfm/helm/blob/v0.4.0/src/helm/benchmark/scenarios/synthetic_reasoning_scenario.py</a:t>
             </a:r>
           </a:p>
         </p:txBody>
@@ -31345,7 +25304,7 @@
                 <a:ea typeface="Noto Sans CJK JP"/>
                 <a:cs typeface="Noto Sans"/>
               </a:rPr>
-              <a:t>Appendix: 3. 制作・関連研究と参考文献</a:t>
+              <a:t>Appendix: 3. 関連研究と参考文献</a:t>
             </a:r>
           </a:p>
         </p:txBody>
@@ -31453,7 +25412,7 @@
                 <a:ea typeface="Noto Sans CJK JP"/>
                 <a:cs typeface="Noto Sans"/>
               </a:rPr>
-              <a:t>複数のシナリオと指標を用いて汎用言語モデルを評価する。抽象・自然言語の合成推論課題も、この評価枠組みに含まれる。</a:t>
+              <a:t>記号列の操作と、自然言語での1段の規則適用を評価する合成課題を提示する。</a:t>
             </a:r>
           </a:p>
         </p:txBody>
@@ -31466,7 +25425,7 @@
         </p:nvSpPr>
         <p:spPr>
           <a:xfrm>
-            <a:off x="594360" y="2642616"/>
+            <a:off x="594360" y="2718816"/>
             <a:ext cx="7955279" cy="237744"/>
           </a:xfrm>
           <a:prstGeom prst="rect">
@@ -31629,7 +25588,7 @@
         </p:nvSpPr>
         <p:spPr>
           <a:xfrm>
-            <a:off x="594360" y="4197096"/>
+            <a:off x="594360" y="4273296"/>
             <a:ext cx="7955279" cy="237744"/>
           </a:xfrm>
           <a:prstGeom prst="rect">
@@ -31785,7 +25744,7 @@
                 <a:ea typeface="Noto Sans CJK JP"/>
                 <a:cs typeface="Noto Sans"/>
               </a:rPr>
-              <a:t>Appendix: 3. 制作・関連研究と参考文献</a:t>
+              <a:t>Appendix: 3. 関連研究と参考文献</a:t>
             </a:r>
           </a:p>
         </p:txBody>
@@ -31906,7 +25865,7 @@
         </p:nvSpPr>
         <p:spPr>
           <a:xfrm>
-            <a:off x="594360" y="2642616"/>
+            <a:off x="594360" y="2718816"/>
             <a:ext cx="7955279" cy="237744"/>
           </a:xfrm>
           <a:prstGeom prst="rect">
@@ -32002,7 +25961,7 @@
                 <a:ea typeface="Noto Sans CJK JP"/>
                 <a:cs typeface="Noto Sans"/>
               </a:rPr>
-              <a:t>Stanford CRFM. HELM v0.4.0 公式生成器。</a:t>
+              <a:t>Stanford CRFM (n.d.). Synthetic Reasoning 公開生成器。参照2026-10-19。</a:t>
             </a:r>
           </a:p>
         </p:txBody>
@@ -32056,7 +26015,7 @@
                 <a:ea typeface="Noto Sans CJK JP"/>
                 <a:cs typeface="Noto Sans"/>
               </a:rPr>
-              <a:t>抽象版と自然言語版の生成器、課題の設定、採点実装を含む固定タグの公式コード。</a:t>
+              <a:t>抽象版の3課題と自然言語easy/hardを生成する。短い語彙と規則から、問題文と正解を作る。</a:t>
             </a:r>
           </a:p>
         </p:txBody>
@@ -32069,7 +26028,7 @@
         </p:nvSpPr>
         <p:spPr>
           <a:xfrm>
-            <a:off x="594360" y="4197096"/>
+            <a:off x="594360" y="4273296"/>
             <a:ext cx="7955279" cy="237744"/>
           </a:xfrm>
           <a:prstGeom prst="rect">
@@ -32279,7 +26238,7 @@
                 <a:ea typeface="Noto Sans CJK JP"/>
                 <a:cs typeface="Noto Sans"/>
               </a:rPr>
-              <a:t>公式生成器 / seed 42 / test index 0 / 問題全文</a:t>
+              <a:t>問題（全文）</a:t>
             </a:r>
           </a:p>
         </p:txBody>
@@ -32560,7 +26519,7 @@
         <p:spPr>
           <a:xfrm>
             <a:off x="502920" y="4700016"/>
-            <a:ext cx="8183879" cy="530352"/>
+            <a:ext cx="8183879" cy="621792"/>
           </a:xfrm>
           <a:prstGeom prst="rect">
             <a:avLst/>
@@ -32600,8 +26559,28 @@
                 <a:ea typeface="Noto Sans CJK JP"/>
                 <a:cs typeface="Noto Sans"/>
               </a:rPr>
-              <a:t>[1] Stanford CRFM. HELM v0.4.0 公式生成器。 変数置換 / index 6000</a:t>
-            </a:r>
+              <a:t>[1] Stanford CRFM. SyntheticReasoningScenario — 記号列の合成課題。</a:t>
+            </a:r>
+          </a:p>
+          <a:p>
+            <a:pPr algn="l">
+              <a:lnSpc>
+                <a:spcPts val="940"/>
+              </a:lnSpc>
+              <a:spcBef>
+                <a:spcPts val="0"/>
+              </a:spcBef>
+              <a:spcAft>
+                <a:spcPts val="140"/>
+              </a:spcAft>
+              <a:buNone/>
+              <a:defRPr sz="810" b="0">
+                <a:solidFill>
+                  <a:srgbClr val="303437"/>
+                </a:solidFill>
+                <a:latin typeface="Noto Sans"/>
+              </a:defRPr>
+            </a:pPr>
             <a:r>
               <a:rPr sz="810" b="0" lang="ja-JP" altLang="en-US">
                 <a:solidFill>
@@ -32610,20 +26589,9 @@
                 <a:latin typeface="Noto Sans"/>
                 <a:ea typeface="Noto Sans CJK JP"/>
                 <a:cs typeface="Noto Sans"/>
-              </a:rPr>
-              <a:t>  </a:t>
-            </a:r>
-            <a:r>
-              <a:rPr sz="810" b="0" lang="ja-JP" altLang="en-US">
-                <a:solidFill>
-                  <a:srgbClr val="626669"/>
-                </a:solidFill>
-                <a:latin typeface="Noto Sans"/>
-                <a:ea typeface="Noto Sans CJK JP"/>
-                <a:cs typeface="Noto Sans"/>
-                <a:hlinkClick r:id="rId2"/>
-              </a:rPr>
-              <a:t>https://github.com/stanford-crfm/helm/tree/v0.4.0</a:t>
+                <a:hlinkClick r:id="rId3"/>
+              </a:rPr>
+              <a:t>https://github.com/stanford-crfm/helm/blob/v0.4.0/src/helm/benchmark/scenarios/synthetic_reasoning_scenario.py</a:t>
             </a:r>
           </a:p>
         </p:txBody>
@@ -32772,7 +26740,7 @@
                 <a:ea typeface="Noto Sans CJK JP"/>
                 <a:cs typeface="Noto Sans"/>
               </a:rPr>
-              <a:t>+、-、*、=はこの課題では文字列を作る記号である。計算式として正しいかを判定したり、数値を計算したりする課題ではない。</a:t>
+              <a:t>+、-、*、=は、文字列を組み立てるための記号として使う。</a:t>
             </a:r>
           </a:p>
           <a:p>
@@ -32864,7 +26832,7 @@
         <p:spPr>
           <a:xfrm>
             <a:off x="502920" y="4700016"/>
-            <a:ext cx="8183879" cy="530352"/>
+            <a:ext cx="8183879" cy="621792"/>
           </a:xfrm>
           <a:prstGeom prst="rect">
             <a:avLst/>
@@ -32904,7 +26872,7 @@
                 <a:ea typeface="Noto Sans CJK JP"/>
                 <a:cs typeface="Noto Sans"/>
               </a:rPr>
-              <a:t>[1] Stanford CRFM. SyntheticReasoningScenario, HELM v0.4.0.</a:t>
+              <a:t>[1] Stanford CRFM. SyntheticReasoningScenario — 記号列の合成課題。</a:t>
             </a:r>
           </a:p>
           <a:p>
@@ -33098,7 +27066,7 @@
                 <a:ea typeface="Noto Sans CJK JP"/>
                 <a:cs typeface="Noto Sans"/>
               </a:rPr>
-              <a:t>公式生成器 / seed 42 / test index 0 / 問題全文</a:t>
+              <a:t>問題（全文）</a:t>
             </a:r>
           </a:p>
         </p:txBody>
@@ -33379,7 +27347,7 @@
         <p:spPr>
           <a:xfrm>
             <a:off x="502920" y="4700016"/>
-            <a:ext cx="8183879" cy="530352"/>
+            <a:ext cx="8183879" cy="621792"/>
           </a:xfrm>
           <a:prstGeom prst="rect">
             <a:avLst/>
@@ -33419,8 +27387,28 @@
                 <a:ea typeface="Noto Sans CJK JP"/>
                 <a:cs typeface="Noto Sans"/>
               </a:rPr>
-              <a:t>[1] Stanford CRFM. HELM v0.4.0 公式生成器。 規則の照合 / index 6000</a:t>
-            </a:r>
+              <a:t>[1] Stanford CRFM. SyntheticReasoningScenario — 記号列の合成課題。</a:t>
+            </a:r>
+          </a:p>
+          <a:p>
+            <a:pPr algn="l">
+              <a:lnSpc>
+                <a:spcPts val="940"/>
+              </a:lnSpc>
+              <a:spcBef>
+                <a:spcPts val="0"/>
+              </a:spcBef>
+              <a:spcAft>
+                <a:spcPts val="140"/>
+              </a:spcAft>
+              <a:buNone/>
+              <a:defRPr sz="810" b="0">
+                <a:solidFill>
+                  <a:srgbClr val="303437"/>
+                </a:solidFill>
+                <a:latin typeface="Noto Sans"/>
+              </a:defRPr>
+            </a:pPr>
             <a:r>
               <a:rPr sz="810" b="0" lang="ja-JP" altLang="en-US">
                 <a:solidFill>
@@ -33429,20 +27417,9 @@
                 <a:latin typeface="Noto Sans"/>
                 <a:ea typeface="Noto Sans CJK JP"/>
                 <a:cs typeface="Noto Sans"/>
-              </a:rPr>
-              <a:t>  </a:t>
-            </a:r>
-            <a:r>
-              <a:rPr sz="810" b="0" lang="ja-JP" altLang="en-US">
-                <a:solidFill>
-                  <a:srgbClr val="626669"/>
-                </a:solidFill>
-                <a:latin typeface="Noto Sans"/>
-                <a:ea typeface="Noto Sans CJK JP"/>
-                <a:cs typeface="Noto Sans"/>
-                <a:hlinkClick r:id="rId2"/>
-              </a:rPr>
-              <a:t>https://github.com/stanford-crfm/helm/tree/v0.4.0</a:t>
+                <a:hlinkClick r:id="rId3"/>
+              </a:rPr>
+              <a:t>https://github.com/stanford-crfm/helm/blob/v0.4.0/src/helm/benchmark/scenarios/synthetic_reasoning_scenario.py</a:t>
             </a:r>
           </a:p>
         </p:txBody>
@@ -33683,7 +27660,7 @@
         <p:spPr>
           <a:xfrm>
             <a:off x="502920" y="4700016"/>
-            <a:ext cx="8183879" cy="530352"/>
+            <a:ext cx="8183879" cy="621792"/>
           </a:xfrm>
           <a:prstGeom prst="rect">
             <a:avLst/>
@@ -33723,7 +27700,7 @@
                 <a:ea typeface="Noto Sans CJK JP"/>
                 <a:cs typeface="Noto Sans"/>
               </a:rPr>
-              <a:t>[1] Stanford CRFM. SyntheticReasoningScenario, HELM v0.4.0.</a:t>
+              <a:t>[1] Stanford CRFM. SyntheticReasoningScenario — 記号列の合成課題。</a:t>
             </a:r>
           </a:p>
           <a:p>
